--- a/docs/agent-delegation-overview.pptx
+++ b/docs/agent-delegation-overview.pptx
@@ -511,7 +511,7 @@
           <a:p>
             <a:r>
               <a:rPr lang="en-US" dirty="0"/>
-              <a:t>Set expectations in the first ten seconds: there is no code in this talk. Everything here is about delegating work to something that does not get tired, does not ask questions, and will confidently tell you it finished when it did not.</a:t>
+              <a:t>Positioning: this is a thing I use daily, not a demo. Two Python files doing something conceptually trivial — and the reason they are 500 lines each rather than 40 is the talk.</a:t>
             </a:r>
             <a:endParaRPr lang="en-US" dirty="0"/>
           </a:p>
@@ -599,7 +599,7 @@
           <a:p>
             <a:r>
               <a:rPr lang="en-US" dirty="0"/>
-              <a:t>Close on the contractor line — it is the sentence people will repeat afterwards. Leave the link up during questions.</a:t>
+              <a:t>Close on the contractor line. The two questions that come up most are the security posture of auto-approve, and whether the cheaper models are actually good enough — the answer to the second is yes, for work with a spec tight enough.</a:t>
             </a:r>
             <a:endParaRPr lang="en-US" dirty="0"/>
           </a:p>
@@ -687,7 +687,7 @@
           <a:p>
             <a:r>
               <a:rPr lang="en-US" dirty="0"/>
-              <a:t>Do not dwell on the price. The point of the slide is the reframe: a rationed expert is a staffing problem, and people already know how staffing problems are solved.</a:t>
+              <a:t>If someone raises an unmetered API budget — yes, that removes most of this. Slide 9 handles it directly; do not get pulled into it here.</a:t>
             </a:r>
             <a:endParaRPr lang="en-US" dirty="0"/>
           </a:p>
@@ -775,7 +775,7 @@
           <a:p>
             <a:r>
               <a:rPr lang="en-US" dirty="0"/>
-              <a:t>Walk it left to right once, slowly, then put a finger on the return arrow. Most people's mental model of AI delegation stops at the third box.</a:t>
+              <a:t>Both are plain MCP servers, one Python file each, shipped together as a plugin — kept small enough to read before installing, because they run with permissions auto-approved.</a:t>
             </a:r>
             <a:endParaRPr lang="en-US" dirty="0"/>
           </a:p>
@@ -863,7 +863,7 @@
           <a:p>
             <a:r>
               <a:rPr lang="en-US" dirty="0"/>
-              <a:t>This is where a non-engineer audience gets the real shape of it: unattended means unattended. The helper approves its own actions, including ones that throw work away. There is no are-you-sure prompt in the middle. That is a deliberate trade, not an oversight.</a:t>
+              <a:t>Be explicit that auto-approve covers destructive git operations. The mitigation is scope, not supervision: do not point it at a directory you would not hand to a stranger with a shell. The delegate also cannot read Claude's memory, your skills or your CLAUDE.md, so any rule that matters has to be inlined into the spec.</a:t>
             </a:r>
             <a:endParaRPr lang="en-US" dirty="0"/>
           </a:p>
@@ -951,7 +951,7 @@
           <a:p>
             <a:r>
               <a:rPr lang="en-US" dirty="0"/>
-              <a:t>These three land with any audience because none of them need code to understand. If you only have time for one, use the middle one — an error message that was wrong in the reassuring direction is the one people have never considered.</a:t>
+              <a:t>The middle case is the one worth dwelling on: an error that was wrong in the reassuring direction. Believe it and you either redo an hour of finished work or, worse, dispatch it again on top of itself.</a:t>
             </a:r>
             <a:endParaRPr lang="en-US" dirty="0"/>
           </a:p>
@@ -1039,7 +1039,7 @@
           <a:p>
             <a:r>
               <a:rPr lang="en-US" dirty="0"/>
-              <a:t>For a QA or product audience this is the slide that earns the talk. Green does not mean working; it means nothing that is being watched is broken. Ask the room whether they have shipped one of these three — hands go up.</a:t>
+              <a:t>This is the slide a product audience should take away. Green means nothing being watched is broken. The delegate is not lying in any of these — it answered the question it was asked, which was narrower than the one that mattered.</a:t>
             </a:r>
             <a:endParaRPr lang="en-US" dirty="0"/>
           </a:p>
@@ -1127,7 +1127,7 @@
           <a:p>
             <a:r>
               <a:rPr lang="en-US" dirty="0"/>
-              <a:t>Rule 3 surprises people who assume all the AI tools share a brain. They do not. The cheaper helper knows only what this one message tells it, and it will not stop itself, because it was started with permission to do anything.</a:t>
+              <a:t>Rule 2 is the one people can use immediately: the spec is the product, and how much you write depends entirely on who is reading it. A mechanical spec for a frontier model is wasted effort; a goal-level spec for a weak model produces confident junk.</a:t>
             </a:r>
             <a:endParaRPr lang="en-US" dirty="0"/>
           </a:p>
@@ -1215,7 +1215,7 @@
           <a:p>
             <a:r>
               <a:rPr lang="en-US" dirty="0"/>
-              <a:t>Resist explaining the plumbing bug in detail. The takeaway is that a leaderboard score measured the wrong thing for this job, and the fix was to write down first-hand observations and admit the gaps.</a:t>
+              <a:t>Do not get into the tool-calling bug's mechanics. The point is that the thing breaking runs was plumbing, so ranking models by reasoning score was measuring the wrong axis entirely.</a:t>
             </a:r>
             <a:endParaRPr lang="en-US" dirty="0"/>
           </a:p>
@@ -1303,7 +1303,7 @@
           <a:p>
             <a:r>
               <a:rPr lang="en-US" dirty="0"/>
-              <a:t>Say the objection out loud before someone else does — it buys credibility for the rest. Then the code-review point, which is the part that survives any budget.</a:t>
+              <a:t>Raise this yourself rather than waiting for it — conceding the strong version buys credibility for the code-review point, which is the part that holds at any budget.</a:t>
             </a:r>
             <a:endParaRPr lang="en-US" dirty="0"/>
           </a:p>
@@ -1742,7 +1742,7 @@
                 <a:ea typeface="Courier New" pitchFamily="34" charset="-122"/>
                 <a:cs typeface="Courier New" pitchFamily="34" charset="-120"/>
               </a:rPr>
-              <a:t>A PRACTICAL TALK · NO CODE IN IT</a:t>
+              <a:t>A CLAUDE CODE PLUGIN · MIT · v1.0.2</a:t>
             </a:r>
             <a:endParaRPr lang="en-US" sz="1200" dirty="0"/>
           </a:p>
@@ -1773,7 +1773,7 @@
               <a:buNone/>
             </a:pPr>
             <a:r>
-              <a:rPr lang="en-US" sz="4600" b="1" spc="-70" kern="0" dirty="0">
+              <a:rPr lang="en-US" sz="5000" b="1" spc="-80" kern="0" dirty="0">
                 <a:solidFill>
                   <a:srgbClr val="16191D"/>
                 </a:solidFill>
@@ -1781,9 +1781,9 @@
                 <a:ea typeface="Arial" pitchFamily="34" charset="-122"/>
                 <a:cs typeface="Arial" pitchFamily="34" charset="-120"/>
               </a:rPr>
-              <a:t>Getting AI to do the boring half</a:t>
-            </a:r>
-            <a:endParaRPr lang="en-US" sz="4600" dirty="0"/>
+              <a:t>agent-delegation-mcp</a:t>
+            </a:r>
+            <a:endParaRPr lang="en-US" sz="5000" dirty="0"/>
           </a:p>
         </p:txBody>
       </p:sp>
@@ -1796,7 +1796,7 @@
         <p:spPr>
           <a:xfrm>
             <a:off x="640080" y="2834640"/>
-            <a:ext cx="9692640" cy="548640"/>
+            <a:ext cx="10058400" cy="548640"/>
           </a:xfrm>
           <a:prstGeom prst="rect">
             <a:avLst/>
@@ -1812,7 +1812,7 @@
               <a:buNone/>
             </a:pPr>
             <a:r>
-              <a:rPr lang="en-US" sz="2400" b="1" dirty="0">
+              <a:rPr lang="en-US" sz="2300" b="1" dirty="0">
                 <a:solidFill>
                   <a:srgbClr val="16191D"/>
                 </a:solidFill>
@@ -1820,13 +1820,13 @@
                 <a:ea typeface="Arial" pitchFamily="34" charset="-122"/>
                 <a:cs typeface="Arial" pitchFamily="34" charset="-120"/>
               </a:rPr>
-              <a:t>…and the much harder problem of </a:t>
+              <a:t>Claude plans and reviews. </a:t>
             </a:r>
             <a:pPr indent="0" marL="0">
               <a:buNone/>
             </a:pPr>
             <a:r>
-              <a:rPr lang="en-US" sz="2400" b="1" dirty="0">
+              <a:rPr lang="en-US" sz="2300" b="1" dirty="0">
                 <a:solidFill>
                   <a:srgbClr val="6D4AC4"/>
                 </a:solidFill>
@@ -1834,9 +1834,9 @@
                 <a:ea typeface="Arial" pitchFamily="34" charset="-122"/>
                 <a:cs typeface="Arial" pitchFamily="34" charset="-120"/>
               </a:rPr>
-              <a:t>checking its work.</a:t>
-            </a:r>
-            <a:endParaRPr lang="en-US" sz="2400" dirty="0"/>
+              <a:t>Cheaper models do the implementation.</a:t>
+            </a:r>
+            <a:endParaRPr lang="en-US" sz="2300" dirty="0"/>
           </a:p>
         </p:txBody>
       </p:sp>
@@ -1848,8 +1848,8 @@
         </p:nvSpPr>
         <p:spPr>
           <a:xfrm>
-            <a:off x="640080" y="3611880"/>
-            <a:ext cx="7863840" cy="822960"/>
+            <a:off x="640080" y="3566160"/>
+            <a:ext cx="8138160" cy="914400"/>
           </a:xfrm>
           <a:prstGeom prst="rect">
             <a:avLst/>
@@ -1876,7 +1876,7 @@
                 <a:ea typeface="Calibri" pitchFamily="34" charset="-122"/>
                 <a:cs typeface="Calibri" pitchFamily="34" charset="-120"/>
               </a:rPr>
-              <a:t>The expensive AI assistant decides what to build and whether it came out right. Cheaper ones do the typing. Everything interesting is in the handoff between them.</a:t>
+              <a:t>It hands coding tasks to other CLI agents, lets them run unattended against a real repo, then makes Claude verify the result. The handoff was an afternoon. Learning not to believe what came back took weeks.</a:t>
             </a:r>
             <a:endParaRPr lang="en-US" sz="1600" dirty="0"/>
           </a:p>
@@ -1891,7 +1891,7 @@
         <p:spPr>
           <a:xfrm>
             <a:off x="640080" y="5029200"/>
-            <a:ext cx="8229600" cy="365760"/>
+            <a:ext cx="8686800" cy="365760"/>
           </a:xfrm>
           <a:prstGeom prst="rect">
             <a:avLst/>
@@ -1907,7 +1907,7 @@
               <a:buNone/>
             </a:pPr>
             <a:r>
-              <a:rPr lang="en-US" sz="1400" dirty="0">
+              <a:rPr lang="en-US" sz="1450" dirty="0">
                 <a:solidFill>
                   <a:srgbClr val="16191D"/>
                 </a:solidFill>
@@ -1915,9 +1915,9 @@
                 <a:ea typeface="Calibri" pitchFamily="34" charset="-122"/>
                 <a:cs typeface="Calibri" pitchFamily="34" charset="-120"/>
               </a:rPr>
-              <a:t>Arthur Carroll  ·  a small open-source tool, and what it taught me</a:t>
-            </a:r>
-            <a:endParaRPr lang="en-US" sz="1400" dirty="0"/>
+              <a:t>What it does, why it is built this way, and the rules that came out of it</a:t>
+            </a:r>
+            <a:endParaRPr lang="en-US" sz="1450" dirty="0"/>
           </a:p>
         </p:txBody>
       </p:sp>
@@ -1979,7 +1979,7 @@
                 <a:ea typeface="Arial" pitchFamily="34" charset="-122"/>
                 <a:cs typeface="Arial" pitchFamily="34" charset="-120"/>
               </a:rPr>
-              <a:t>Four things worth stealing</a:t>
+              <a:t>Where it nets out</a:t>
             </a:r>
             <a:endParaRPr lang="en-US" sz="3800" dirty="0"/>
           </a:p>
@@ -2018,7 +2018,7 @@
                 <a:ea typeface="Courier New" pitchFamily="34" charset="-122"/>
                 <a:cs typeface="Courier New" pitchFamily="34" charset="-120"/>
               </a:rPr>
-              <a:t>TAKEAWAYS — AND NONE OF THEM ARE REALLY ABOUT AI</a:t>
+              <a:t>TAKEAWAYS</a:t>
             </a:r>
             <a:endParaRPr lang="en-US" sz="1100" dirty="0"/>
           </a:p>
@@ -2032,12 +2032,12 @@
         </p:nvSpPr>
         <p:spPr>
           <a:xfrm>
-            <a:off x="640080" y="1737360"/>
-            <a:ext cx="2522144" cy="2240280"/>
+            <a:off x="640080" y="1691640"/>
+            <a:ext cx="2522144" cy="2377440"/>
           </a:xfrm>
           <a:prstGeom prst="roundRect">
             <a:avLst>
-              <a:gd name="adj" fmla="val 2449"/>
+              <a:gd name="adj" fmla="val 2308"/>
             </a:avLst>
           </a:prstGeom>
           <a:solidFill>
@@ -2059,8 +2059,8 @@
         </p:nvSpPr>
         <p:spPr>
           <a:xfrm>
-            <a:off x="896112" y="1965960"/>
-            <a:ext cx="420624" cy="420624"/>
+            <a:off x="896112" y="1901952"/>
+            <a:ext cx="402336" cy="402336"/>
           </a:xfrm>
           <a:prstGeom prst="ellipse">
             <a:avLst/>
@@ -2079,8 +2079,8 @@
         </p:nvSpPr>
         <p:spPr>
           <a:xfrm>
-            <a:off x="896112" y="1965960"/>
-            <a:ext cx="420624" cy="420624"/>
+            <a:off x="896112" y="1901952"/>
+            <a:ext cx="402336" cy="402336"/>
           </a:xfrm>
           <a:prstGeom prst="rect">
             <a:avLst/>
@@ -2096,7 +2096,7 @@
               <a:buNone/>
             </a:pPr>
             <a:r>
-              <a:rPr lang="en-US" sz="1500" b="1" dirty="0">
+              <a:rPr lang="en-US" sz="1400" b="1" dirty="0">
                 <a:solidFill>
                   <a:srgbClr val="FFFFFF"/>
                 </a:solidFill>
@@ -2106,7 +2106,7 @@
               </a:rPr>
               <a:t>1</a:t>
             </a:r>
-            <a:endParaRPr lang="en-US" sz="1500" dirty="0"/>
+            <a:endParaRPr lang="en-US" sz="1400" dirty="0"/>
           </a:p>
         </p:txBody>
       </p:sp>
@@ -2118,8 +2118,8 @@
         </p:nvSpPr>
         <p:spPr>
           <a:xfrm>
-            <a:off x="896112" y="2542032"/>
-            <a:ext cx="2010080" cy="713232"/>
+            <a:off x="896112" y="2432304"/>
+            <a:ext cx="2010080" cy="822960"/>
           </a:xfrm>
           <a:prstGeom prst="rect">
             <a:avLst/>
@@ -2138,7 +2138,7 @@
               <a:buNone/>
             </a:pPr>
             <a:r>
-              <a:rPr lang="en-US" sz="1650" b="1" dirty="0">
+              <a:rPr lang="en-US" sz="1500" b="1" dirty="0">
                 <a:solidFill>
                   <a:srgbClr val="16191D"/>
                 </a:solidFill>
@@ -2146,9 +2146,9 @@
                 <a:ea typeface="Arial" pitchFamily="34" charset="-122"/>
                 <a:cs typeface="Arial" pitchFamily="34" charset="-120"/>
               </a:rPr>
-              <a:t>Written beats spoken</a:t>
-            </a:r>
-            <a:endParaRPr lang="en-US" sz="1650" dirty="0"/>
+              <a:t>Delegate keystrokes, keep judgement</a:t>
+            </a:r>
+            <a:endParaRPr lang="en-US" sz="1500" dirty="0"/>
           </a:p>
         </p:txBody>
       </p:sp>
@@ -2160,8 +2160,8 @@
         </p:nvSpPr>
         <p:spPr>
           <a:xfrm>
-            <a:off x="896112" y="3291840"/>
-            <a:ext cx="2010080" cy="603504"/>
+            <a:off x="896112" y="3310128"/>
+            <a:ext cx="2010080" cy="658368"/>
           </a:xfrm>
           <a:prstGeom prst="rect">
             <a:avLst/>
@@ -2175,12 +2175,12 @@
           <a:p>
             <a:pPr indent="0" marL="0">
               <a:lnSpc>
-                <a:spcPct val="120000"/>
+                <a:spcPct val="118000"/>
               </a:lnSpc>
               <a:buNone/>
             </a:pPr>
             <a:r>
-              <a:rPr lang="en-US" sz="1400" dirty="0">
+              <a:rPr lang="en-US" sz="1300" dirty="0">
                 <a:solidFill>
                   <a:srgbClr val="16191D"/>
                 </a:solidFill>
@@ -2188,9 +2188,9 @@
                 <a:ea typeface="Calibri" pitchFamily="34" charset="-122"/>
                 <a:cs typeface="Calibri" pitchFamily="34" charset="-120"/>
               </a:rPr>
-              <a:t>If it matters, put it in a file. Chat is not a record.</a:t>
-            </a:r>
-            <a:endParaRPr lang="en-US" sz="1400" dirty="0"/>
+              <a:t>The split holds. Mechanical work goes out; architecture, review and the gate stay.</a:t>
+            </a:r>
+            <a:endParaRPr lang="en-US" sz="1300" dirty="0"/>
           </a:p>
         </p:txBody>
       </p:sp>
@@ -2202,12 +2202,12 @@
         </p:nvSpPr>
         <p:spPr>
           <a:xfrm>
-            <a:off x="3436544" y="1737360"/>
-            <a:ext cx="2522144" cy="2240280"/>
+            <a:off x="3436544" y="1691640"/>
+            <a:ext cx="2522144" cy="2377440"/>
           </a:xfrm>
           <a:prstGeom prst="roundRect">
             <a:avLst>
-              <a:gd name="adj" fmla="val 2449"/>
+              <a:gd name="adj" fmla="val 2308"/>
             </a:avLst>
           </a:prstGeom>
           <a:solidFill>
@@ -2229,8 +2229,8 @@
         </p:nvSpPr>
         <p:spPr>
           <a:xfrm>
-            <a:off x="3692576" y="1965960"/>
-            <a:ext cx="420624" cy="420624"/>
+            <a:off x="3692576" y="1901952"/>
+            <a:ext cx="402336" cy="402336"/>
           </a:xfrm>
           <a:prstGeom prst="ellipse">
             <a:avLst/>
@@ -2249,8 +2249,8 @@
         </p:nvSpPr>
         <p:spPr>
           <a:xfrm>
-            <a:off x="3692576" y="1965960"/>
-            <a:ext cx="420624" cy="420624"/>
+            <a:off x="3692576" y="1901952"/>
+            <a:ext cx="402336" cy="402336"/>
           </a:xfrm>
           <a:prstGeom prst="rect">
             <a:avLst/>
@@ -2266,7 +2266,7 @@
               <a:buNone/>
             </a:pPr>
             <a:r>
-              <a:rPr lang="en-US" sz="1500" b="1" dirty="0">
+              <a:rPr lang="en-US" sz="1400" b="1" dirty="0">
                 <a:solidFill>
                   <a:srgbClr val="FFFFFF"/>
                 </a:solidFill>
@@ -2276,7 +2276,7 @@
               </a:rPr>
               <a:t>2</a:t>
             </a:r>
-            <a:endParaRPr lang="en-US" sz="1500" dirty="0"/>
+            <a:endParaRPr lang="en-US" sz="1400" dirty="0"/>
           </a:p>
         </p:txBody>
       </p:sp>
@@ -2288,8 +2288,8 @@
         </p:nvSpPr>
         <p:spPr>
           <a:xfrm>
-            <a:off x="3692576" y="2542032"/>
-            <a:ext cx="2010080" cy="713232"/>
+            <a:off x="3692576" y="2432304"/>
+            <a:ext cx="2010080" cy="822960"/>
           </a:xfrm>
           <a:prstGeom prst="rect">
             <a:avLst/>
@@ -2308,7 +2308,7 @@
               <a:buNone/>
             </a:pPr>
             <a:r>
-              <a:rPr lang="en-US" sz="1650" b="1" dirty="0">
+              <a:rPr lang="en-US" sz="1500" b="1" dirty="0">
                 <a:solidFill>
                   <a:srgbClr val="16191D"/>
                 </a:solidFill>
@@ -2316,9 +2316,9 @@
                 <a:ea typeface="Arial" pitchFamily="34" charset="-122"/>
                 <a:cs typeface="Arial" pitchFamily="34" charset="-120"/>
               </a:rPr>
-              <a:t>A report is not evidence</a:t>
-            </a:r>
-            <a:endParaRPr lang="en-US" sz="1650" dirty="0"/>
+              <a:t>Treat every report as a rumour</a:t>
+            </a:r>
+            <a:endParaRPr lang="en-US" sz="1500" dirty="0"/>
           </a:p>
         </p:txBody>
       </p:sp>
@@ -2330,8 +2330,8 @@
         </p:nvSpPr>
         <p:spPr>
           <a:xfrm>
-            <a:off x="3692576" y="3291840"/>
-            <a:ext cx="2010080" cy="603504"/>
+            <a:off x="3692576" y="3310128"/>
+            <a:ext cx="2010080" cy="658368"/>
           </a:xfrm>
           <a:prstGeom prst="rect">
             <a:avLst/>
@@ -2345,12 +2345,12 @@
           <a:p>
             <a:pPr indent="0" marL="0">
               <a:lnSpc>
-                <a:spcPct val="120000"/>
+                <a:spcPct val="118000"/>
               </a:lnSpc>
               <a:buNone/>
             </a:pPr>
             <a:r>
-              <a:rPr lang="en-US" sz="1400" dirty="0">
+              <a:rPr lang="en-US" sz="1300" dirty="0">
                 <a:solidFill>
                   <a:srgbClr val="16191D"/>
                 </a:solidFill>
@@ -2358,9 +2358,9 @@
                 <a:ea typeface="Calibri" pitchFamily="34" charset="-122"/>
                 <a:cs typeface="Calibri" pitchFamily="34" charset="-120"/>
               </a:rPr>
-              <a:t>Go and look at the work yourself.</a:t>
-            </a:r>
-            <a:endParaRPr lang="en-US" sz="1400" dirty="0"/>
+              <a:t>Verify from the repo: diff, gate, and whether the named files exist.</a:t>
+            </a:r>
+            <a:endParaRPr lang="en-US" sz="1300" dirty="0"/>
           </a:p>
         </p:txBody>
       </p:sp>
@@ -2372,12 +2372,12 @@
         </p:nvSpPr>
         <p:spPr>
           <a:xfrm>
-            <a:off x="6233008" y="1737360"/>
-            <a:ext cx="2522144" cy="2240280"/>
+            <a:off x="6233008" y="1691640"/>
+            <a:ext cx="2522144" cy="2377440"/>
           </a:xfrm>
           <a:prstGeom prst="roundRect">
             <a:avLst>
-              <a:gd name="adj" fmla="val 2449"/>
+              <a:gd name="adj" fmla="val 2308"/>
             </a:avLst>
           </a:prstGeom>
           <a:solidFill>
@@ -2399,8 +2399,8 @@
         </p:nvSpPr>
         <p:spPr>
           <a:xfrm>
-            <a:off x="6489040" y="1965960"/>
-            <a:ext cx="420624" cy="420624"/>
+            <a:off x="6489040" y="1901952"/>
+            <a:ext cx="402336" cy="402336"/>
           </a:xfrm>
           <a:prstGeom prst="ellipse">
             <a:avLst/>
@@ -2419,8 +2419,8 @@
         </p:nvSpPr>
         <p:spPr>
           <a:xfrm>
-            <a:off x="6489040" y="1965960"/>
-            <a:ext cx="420624" cy="420624"/>
+            <a:off x="6489040" y="1901952"/>
+            <a:ext cx="402336" cy="402336"/>
           </a:xfrm>
           <a:prstGeom prst="rect">
             <a:avLst/>
@@ -2436,7 +2436,7 @@
               <a:buNone/>
             </a:pPr>
             <a:r>
-              <a:rPr lang="en-US" sz="1500" b="1" dirty="0">
+              <a:rPr lang="en-US" sz="1400" b="1" dirty="0">
                 <a:solidFill>
                   <a:srgbClr val="FFFFFF"/>
                 </a:solidFill>
@@ -2446,7 +2446,7 @@
               </a:rPr>
               <a:t>3</a:t>
             </a:r>
-            <a:endParaRPr lang="en-US" sz="1500" dirty="0"/>
+            <a:endParaRPr lang="en-US" sz="1400" dirty="0"/>
           </a:p>
         </p:txBody>
       </p:sp>
@@ -2458,8 +2458,8 @@
         </p:nvSpPr>
         <p:spPr>
           <a:xfrm>
-            <a:off x="6489040" y="2542032"/>
-            <a:ext cx="2010080" cy="713232"/>
+            <a:off x="6489040" y="2432304"/>
+            <a:ext cx="2010080" cy="822960"/>
           </a:xfrm>
           <a:prstGeom prst="rect">
             <a:avLst/>
@@ -2478,7 +2478,7 @@
               <a:buNone/>
             </a:pPr>
             <a:r>
-              <a:rPr lang="en-US" sz="1650" b="1" dirty="0">
+              <a:rPr lang="en-US" sz="1500" b="1" dirty="0">
                 <a:solidFill>
                   <a:srgbClr val="16191D"/>
                 </a:solidFill>
@@ -2486,9 +2486,9 @@
                 <a:ea typeface="Arial" pitchFamily="34" charset="-122"/>
                 <a:cs typeface="Arial" pitchFamily="34" charset="-120"/>
               </a:rPr>
-              <a:t>Green is not working</a:t>
-            </a:r>
-            <a:endParaRPr lang="en-US" sz="1650" dirty="0"/>
+              <a:t>Put the state in files</a:t>
+            </a:r>
+            <a:endParaRPr lang="en-US" sz="1500" dirty="0"/>
           </a:p>
         </p:txBody>
       </p:sp>
@@ -2500,8 +2500,8 @@
         </p:nvSpPr>
         <p:spPr>
           <a:xfrm>
-            <a:off x="6489040" y="3291840"/>
-            <a:ext cx="2010080" cy="603504"/>
+            <a:off x="6489040" y="3310128"/>
+            <a:ext cx="2010080" cy="658368"/>
           </a:xfrm>
           <a:prstGeom prst="rect">
             <a:avLst/>
@@ -2515,12 +2515,12 @@
           <a:p>
             <a:pPr indent="0" marL="0">
               <a:lnSpc>
-                <a:spcPct val="120000"/>
+                <a:spcPct val="118000"/>
               </a:lnSpc>
               <a:buNone/>
             </a:pPr>
             <a:r>
-              <a:rPr lang="en-US" sz="1400" dirty="0">
+              <a:rPr lang="en-US" sz="1300" dirty="0">
                 <a:solidFill>
                   <a:srgbClr val="16191D"/>
                 </a:solidFill>
@@ -2528,9 +2528,9 @@
                 <a:ea typeface="Calibri" pitchFamily="34" charset="-122"/>
                 <a:cs typeface="Calibri" pitchFamily="34" charset="-120"/>
               </a:rPr>
-              <a:t>Check the things you asked for exist.</a:t>
-            </a:r>
-            <a:endParaRPr lang="en-US" sz="1400" dirty="0"/>
+              <a:t>Specs and results in version control, not in one assistant's context.</a:t>
+            </a:r>
+            <a:endParaRPr lang="en-US" sz="1300" dirty="0"/>
           </a:p>
         </p:txBody>
       </p:sp>
@@ -2542,12 +2542,12 @@
         </p:nvSpPr>
         <p:spPr>
           <a:xfrm>
-            <a:off x="9029471" y="1737360"/>
-            <a:ext cx="2522144" cy="2240280"/>
+            <a:off x="9029471" y="1691640"/>
+            <a:ext cx="2522144" cy="2377440"/>
           </a:xfrm>
           <a:prstGeom prst="roundRect">
             <a:avLst>
-              <a:gd name="adj" fmla="val 2449"/>
+              <a:gd name="adj" fmla="val 2308"/>
             </a:avLst>
           </a:prstGeom>
           <a:solidFill>
@@ -2569,8 +2569,8 @@
         </p:nvSpPr>
         <p:spPr>
           <a:xfrm>
-            <a:off x="9285503" y="1965960"/>
-            <a:ext cx="420624" cy="420624"/>
+            <a:off x="9285503" y="1901952"/>
+            <a:ext cx="402336" cy="402336"/>
           </a:xfrm>
           <a:prstGeom prst="ellipse">
             <a:avLst/>
@@ -2589,8 +2589,8 @@
         </p:nvSpPr>
         <p:spPr>
           <a:xfrm>
-            <a:off x="9285503" y="1965960"/>
-            <a:ext cx="420624" cy="420624"/>
+            <a:off x="9285503" y="1901952"/>
+            <a:ext cx="402336" cy="402336"/>
           </a:xfrm>
           <a:prstGeom prst="rect">
             <a:avLst/>
@@ -2606,7 +2606,7 @@
               <a:buNone/>
             </a:pPr>
             <a:r>
-              <a:rPr lang="en-US" sz="1500" b="1" dirty="0">
+              <a:rPr lang="en-US" sz="1400" b="1" dirty="0">
                 <a:solidFill>
                   <a:srgbClr val="FFFFFF"/>
                 </a:solidFill>
@@ -2616,7 +2616,7 @@
               </a:rPr>
               <a:t>4</a:t>
             </a:r>
-            <a:endParaRPr lang="en-US" sz="1500" dirty="0"/>
+            <a:endParaRPr lang="en-US" sz="1400" dirty="0"/>
           </a:p>
         </p:txBody>
       </p:sp>
@@ -2628,8 +2628,8 @@
         </p:nvSpPr>
         <p:spPr>
           <a:xfrm>
-            <a:off x="9285503" y="2542032"/>
-            <a:ext cx="2010080" cy="713232"/>
+            <a:off x="9285503" y="2432304"/>
+            <a:ext cx="2010080" cy="822960"/>
           </a:xfrm>
           <a:prstGeom prst="rect">
             <a:avLst/>
@@ -2648,7 +2648,7 @@
               <a:buNone/>
             </a:pPr>
             <a:r>
-              <a:rPr lang="en-US" sz="1650" b="1" dirty="0">
+              <a:rPr lang="en-US" sz="1500" b="1" dirty="0">
                 <a:solidFill>
                   <a:srgbClr val="16191D"/>
                 </a:solidFill>
@@ -2656,9 +2656,9 @@
                 <a:ea typeface="Arial" pitchFamily="34" charset="-122"/>
                 <a:cs typeface="Arial" pitchFamily="34" charset="-120"/>
               </a:rPr>
-              <a:t>Dependable beats impressive</a:t>
-            </a:r>
-            <a:endParaRPr lang="en-US" sz="1650" dirty="0"/>
+              <a:t>Optimise for dependable, not impressive</a:t>
+            </a:r>
+            <a:endParaRPr lang="en-US" sz="1500" dirty="0"/>
           </a:p>
         </p:txBody>
       </p:sp>
@@ -2670,8 +2670,89 @@
         </p:nvSpPr>
         <p:spPr>
           <a:xfrm>
-            <a:off x="9285503" y="3291840"/>
-            <a:ext cx="2010080" cy="603504"/>
+            <a:off x="9285503" y="3310128"/>
+            <a:ext cx="2010080" cy="658368"/>
+          </a:xfrm>
+          <a:prstGeom prst="rect">
+            <a:avLst/>
+          </a:prstGeom>
+          <a:noFill/>
+          <a:ln/>
+        </p:spPr>
+        <p:txBody>
+          <a:bodyPr wrap="square" lIns="0" tIns="0" rIns="0" bIns="0" rtlCol="0" anchor="t"/>
+          <a:lstStyle/>
+          <a:p>
+            <a:pPr indent="0" marL="0">
+              <a:lnSpc>
+                <a:spcPct val="118000"/>
+              </a:lnSpc>
+              <a:buNone/>
+            </a:pPr>
+            <a:r>
+              <a:rPr lang="en-US" sz="1300" dirty="0">
+                <a:solidFill>
+                  <a:srgbClr val="16191D"/>
+                </a:solidFill>
+                <a:latin typeface="Calibri" pitchFamily="34" charset="0"/>
+                <a:ea typeface="Calibri" pitchFamily="34" charset="-122"/>
+                <a:cs typeface="Calibri" pitchFamily="34" charset="-120"/>
+              </a:rPr>
+              <a:t>For unattended work, no surprises beats better benchmark scores.</a:t>
+            </a:r>
+            <a:endParaRPr lang="en-US" sz="1300" dirty="0"/>
+          </a:p>
+        </p:txBody>
+      </p:sp>
+      <p:sp>
+        <p:nvSpPr>
+          <p:cNvPr id="24" name="Text 22"/>
+          <p:cNvSpPr txBox="1"/>
+          <p:nvPr/>
+        </p:nvSpPr>
+        <p:spPr>
+          <a:xfrm>
+            <a:off x="640080" y="4389120"/>
+            <a:ext cx="7680960" cy="411480"/>
+          </a:xfrm>
+          <a:prstGeom prst="rect">
+            <a:avLst/>
+          </a:prstGeom>
+          <a:noFill/>
+          <a:ln/>
+        </p:spPr>
+        <p:txBody>
+          <a:bodyPr wrap="square" lIns="0" tIns="0" rIns="0" bIns="0" rtlCol="0" anchor="ctr"/>
+          <a:lstStyle/>
+          <a:p>
+            <a:pPr indent="0" marL="0">
+              <a:buNone/>
+            </a:pPr>
+            <a:r>
+              <a:rPr lang="en-US" sz="1900" b="1" dirty="0">
+                <a:solidFill>
+                  <a:srgbClr val="16191D"/>
+                </a:solidFill>
+                <a:latin typeface="Arial" pitchFamily="34" charset="0"/>
+                <a:ea typeface="Arial" pitchFamily="34" charset="-122"/>
+                <a:cs typeface="Arial" pitchFamily="34" charset="-120"/>
+              </a:rPr>
+              <a:t>The uncomfortable part: none of it is AI-specific.</a:t>
+            </a:r>
+            <a:endParaRPr lang="en-US" sz="1900" dirty="0"/>
+          </a:p>
+        </p:txBody>
+      </p:sp>
+      <p:sp>
+        <p:nvSpPr>
+          <p:cNvPr id="25" name="Text 23"/>
+          <p:cNvSpPr txBox="1"/>
+          <p:nvPr/>
+        </p:nvSpPr>
+        <p:spPr>
+          <a:xfrm>
+            <a:off x="640080" y="4846320"/>
+            <a:ext cx="7680960" cy="640080"/>
           </a:xfrm>
           <a:prstGeom prst="rect">
             <a:avLst/>
@@ -2690,98 +2771,17 @@
               <a:buNone/>
             </a:pPr>
             <a:r>
-              <a:rPr lang="en-US" sz="1400" dirty="0">
-                <a:solidFill>
-                  <a:srgbClr val="16191D"/>
+              <a:rPr lang="en-US" sz="1500" dirty="0">
+                <a:solidFill>
+                  <a:srgbClr val="6B7280"/>
                 </a:solidFill>
                 <a:latin typeface="Calibri" pitchFamily="34" charset="0"/>
                 <a:ea typeface="Calibri" pitchFamily="34" charset="-122"/>
                 <a:cs typeface="Calibri" pitchFamily="34" charset="-120"/>
               </a:rPr>
-              <a:t>For unwatched work, no surprises wins.</a:t>
-            </a:r>
-            <a:endParaRPr lang="en-US" sz="1400" dirty="0"/>
-          </a:p>
-        </p:txBody>
-      </p:sp>
-      <p:sp>
-        <p:nvSpPr>
-          <p:cNvPr id="24" name="Text 22"/>
-          <p:cNvSpPr txBox="1"/>
-          <p:nvPr/>
-        </p:nvSpPr>
-        <p:spPr>
-          <a:xfrm>
-            <a:off x="640080" y="4206240"/>
-            <a:ext cx="7589520" cy="411480"/>
-          </a:xfrm>
-          <a:prstGeom prst="rect">
-            <a:avLst/>
-          </a:prstGeom>
-          <a:noFill/>
-          <a:ln/>
-        </p:spPr>
-        <p:txBody>
-          <a:bodyPr wrap="square" lIns="0" tIns="0" rIns="0" bIns="0" rtlCol="0" anchor="ctr"/>
-          <a:lstStyle/>
-          <a:p>
-            <a:pPr indent="0" marL="0">
-              <a:buNone/>
-            </a:pPr>
-            <a:r>
-              <a:rPr lang="en-US" sz="2000" b="1" dirty="0">
-                <a:solidFill>
-                  <a:srgbClr val="16191D"/>
-                </a:solidFill>
-                <a:latin typeface="Arial" pitchFamily="34" charset="0"/>
-                <a:ea typeface="Arial" pitchFamily="34" charset="-122"/>
-                <a:cs typeface="Arial" pitchFamily="34" charset="-120"/>
-              </a:rPr>
-              <a:t>This is just how you delegate to anyone.</a:t>
-            </a:r>
-            <a:endParaRPr lang="en-US" sz="2000" dirty="0"/>
-          </a:p>
-        </p:txBody>
-      </p:sp>
-      <p:sp>
-        <p:nvSpPr>
-          <p:cNvPr id="25" name="Text 23"/>
-          <p:cNvSpPr txBox="1"/>
-          <p:nvPr/>
-        </p:nvSpPr>
-        <p:spPr>
-          <a:xfrm>
-            <a:off x="640080" y="4663440"/>
-            <a:ext cx="7589520" cy="640080"/>
-          </a:xfrm>
-          <a:prstGeom prst="rect">
-            <a:avLst/>
-          </a:prstGeom>
-          <a:noFill/>
-          <a:ln/>
-        </p:spPr>
-        <p:txBody>
-          <a:bodyPr wrap="square" lIns="0" tIns="0" rIns="0" bIns="0" rtlCol="0" anchor="t"/>
-          <a:lstStyle/>
-          <a:p>
-            <a:pPr indent="0" marL="0">
-              <a:lnSpc>
-                <a:spcPct val="120000"/>
-              </a:lnSpc>
-              <a:buNone/>
-            </a:pPr>
-            <a:r>
-              <a:rPr lang="en-US" sz="1550" dirty="0">
-                <a:solidFill>
-                  <a:srgbClr val="6B7280"/>
-                </a:solidFill>
-                <a:latin typeface="Calibri" pitchFamily="34" charset="0"/>
-                <a:ea typeface="Calibri" pitchFamily="34" charset="-122"/>
-                <a:cs typeface="Calibri" pitchFamily="34" charset="-120"/>
-              </a:rPr>
-              <a:t>A fast, tireless contractor who never asks a question and always says it went fine.</a:t>
-            </a:r>
-            <a:endParaRPr lang="en-US" sz="1550" dirty="0"/>
+              <a:t>It is how you would supervise any contractor who works fast, never asks a question, and always reports that it went fine.</a:t>
+            </a:r>
+            <a:endParaRPr lang="en-US" sz="1500" dirty="0"/>
           </a:p>
         </p:txBody>
       </p:sp>
@@ -2793,12 +2793,12 @@
         </p:nvSpPr>
         <p:spPr>
           <a:xfrm>
-            <a:off x="8503920" y="4206240"/>
-            <a:ext cx="3047695" cy="1234440"/>
+            <a:off x="8595360" y="4389120"/>
+            <a:ext cx="2956255" cy="1188720"/>
           </a:xfrm>
           <a:prstGeom prst="roundRect">
             <a:avLst>
-              <a:gd name="adj" fmla="val 4444"/>
+              <a:gd name="adj" fmla="val 4615"/>
             </a:avLst>
           </a:prstGeom>
           <a:solidFill>
@@ -2820,8 +2820,8 @@
         </p:nvSpPr>
         <p:spPr>
           <a:xfrm>
-            <a:off x="8778240" y="4370832"/>
-            <a:ext cx="2773375" cy="292608"/>
+            <a:off x="8851392" y="4544568"/>
+            <a:ext cx="2700223" cy="274320"/>
           </a:xfrm>
           <a:prstGeom prst="rect">
             <a:avLst/>
@@ -2837,7 +2837,7 @@
               <a:buNone/>
             </a:pPr>
             <a:r>
-              <a:rPr lang="en-US" sz="1350" dirty="0">
+              <a:rPr lang="en-US" sz="1300" dirty="0">
                 <a:solidFill>
                   <a:srgbClr val="D5D9DE"/>
                 </a:solidFill>
@@ -2845,9 +2845,9 @@
                 <a:ea typeface="Calibri" pitchFamily="34" charset="-122"/>
                 <a:cs typeface="Calibri" pitchFamily="34" charset="-120"/>
               </a:rPr>
-              <a:t>It is free, and open source</a:t>
-            </a:r>
-            <a:endParaRPr lang="en-US" sz="1350" dirty="0"/>
+              <a:t>MIT, and small enough to read</a:t>
+            </a:r>
+            <a:endParaRPr lang="en-US" sz="1300" dirty="0"/>
           </a:p>
         </p:txBody>
       </p:sp>
@@ -2859,8 +2859,8 @@
         </p:nvSpPr>
         <p:spPr>
           <a:xfrm>
-            <a:off x="8778240" y="4663440"/>
-            <a:ext cx="2773375" cy="640080"/>
+            <a:off x="8851392" y="4818888"/>
+            <a:ext cx="2700223" cy="621792"/>
           </a:xfrm>
           <a:prstGeom prst="rect">
             <a:avLst/>
@@ -2971,7 +2971,7 @@
                 <a:ea typeface="Arial" pitchFamily="34" charset="-122"/>
                 <a:cs typeface="Arial" pitchFamily="34" charset="-120"/>
               </a:rPr>
-              <a:t>The good AI help is metered</a:t>
+              <a:t>Why it exists</a:t>
             </a:r>
             <a:endParaRPr lang="en-US" sz="3800" dirty="0"/>
           </a:p>
@@ -3010,7 +3010,7 @@
                 <a:ea typeface="Courier New" pitchFamily="34" charset="-122"/>
                 <a:cs typeface="Courier New" pitchFamily="34" charset="-120"/>
               </a:rPr>
-              <a:t>THE PROBLEM</a:t>
+              <a:t>THE CONSTRAINT</a:t>
             </a:r>
             <a:endParaRPr lang="en-US" sz="1100" dirty="0"/>
           </a:p>
@@ -3018,99 +3018,18 @@
       </p:sp>
       <p:sp>
         <p:nvSpPr>
-          <p:cNvPr id="4" name="Text 2"/>
-          <p:cNvSpPr txBox="1"/>
-          <p:nvPr/>
-        </p:nvSpPr>
-        <p:spPr>
-          <a:xfrm>
-            <a:off x="640080" y="1737360"/>
-            <a:ext cx="2377440" cy="1188720"/>
-          </a:xfrm>
-          <a:prstGeom prst="rect">
-            <a:avLst/>
-          </a:prstGeom>
-          <a:noFill/>
-          <a:ln/>
-        </p:spPr>
-        <p:txBody>
-          <a:bodyPr wrap="square" lIns="0" tIns="0" rIns="0" bIns="0" rtlCol="0" anchor="ctr"/>
-          <a:lstStyle/>
-          <a:p>
-            <a:pPr indent="0" marL="0">
-              <a:buNone/>
-            </a:pPr>
-            <a:r>
-              <a:rPr lang="en-US" sz="6600" b="1" spc="-100" kern="0" dirty="0">
-                <a:solidFill>
-                  <a:srgbClr val="6D4AC4"/>
-                </a:solidFill>
-                <a:latin typeface="Arial" pitchFamily="34" charset="0"/>
-                <a:ea typeface="Arial" pitchFamily="34" charset="-122"/>
-                <a:cs typeface="Arial" pitchFamily="34" charset="-120"/>
-              </a:rPr>
-              <a:t>$20</a:t>
-            </a:r>
-            <a:endParaRPr lang="en-US" sz="6600" dirty="0"/>
-          </a:p>
-        </p:txBody>
-      </p:sp>
-      <p:sp>
-        <p:nvSpPr>
-          <p:cNvPr id="5" name="Text 3"/>
-          <p:cNvSpPr txBox="1"/>
-          <p:nvPr/>
-        </p:nvSpPr>
-        <p:spPr>
-          <a:xfrm>
-            <a:off x="640080" y="2880360"/>
-            <a:ext cx="4754880" cy="1005840"/>
-          </a:xfrm>
-          <a:prstGeom prst="rect">
-            <a:avLst/>
-          </a:prstGeom>
-          <a:noFill/>
-          <a:ln/>
-        </p:spPr>
-        <p:txBody>
-          <a:bodyPr wrap="square" lIns="0" tIns="0" rIns="0" bIns="0" rtlCol="0" anchor="t"/>
-          <a:lstStyle/>
-          <a:p>
-            <a:pPr indent="0" marL="0">
-              <a:lnSpc>
-                <a:spcPct val="125000"/>
-              </a:lnSpc>
-              <a:buNone/>
-            </a:pPr>
-            <a:r>
-              <a:rPr lang="en-US" sz="1600" dirty="0">
-                <a:solidFill>
-                  <a:srgbClr val="16191D"/>
-                </a:solidFill>
-                <a:latin typeface="Calibri" pitchFamily="34" charset="0"/>
-                <a:ea typeface="Calibri" pitchFamily="34" charset="-122"/>
-                <a:cs typeface="Calibri" pitchFamily="34" charset="-120"/>
-              </a:rPr>
-              <a:t>a month buys a fixed amount of the best model's attention. Run out on a Tuesday afternoon and you are waiting hours, mid-task.</a:t>
-            </a:r>
-            <a:endParaRPr lang="en-US" sz="1600" dirty="0"/>
-          </a:p>
-        </p:txBody>
-      </p:sp>
-      <p:sp>
-        <p:nvSpPr>
-          <p:cNvPr id="6" name="Shape 4"/>
+          <p:cNvPr id="4" name="Shape 2"/>
           <p:cNvSpPr/>
           <p:nvPr/>
         </p:nvSpPr>
         <p:spPr>
           <a:xfrm>
-            <a:off x="640080" y="4114800"/>
-            <a:ext cx="4754880" cy="1691640"/>
+            <a:off x="640080" y="1645920"/>
+            <a:ext cx="5394960" cy="1965960"/>
           </a:xfrm>
           <a:prstGeom prst="roundRect">
             <a:avLst>
-              <a:gd name="adj" fmla="val 3243"/>
+              <a:gd name="adj" fmla="val 2791"/>
             </a:avLst>
           </a:prstGeom>
           <a:solidFill>
@@ -3126,14 +3045,14 @@
       </p:sp>
       <p:sp>
         <p:nvSpPr>
-          <p:cNvPr id="7" name="Text 5"/>
-          <p:cNvSpPr txBox="1"/>
-          <p:nvPr/>
-        </p:nvSpPr>
-        <p:spPr>
-          <a:xfrm>
-            <a:off x="914400" y="4279392"/>
-            <a:ext cx="4206240" cy="292608"/>
+          <p:cNvPr id="5" name="Text 3"/>
+          <p:cNvSpPr txBox="1"/>
+          <p:nvPr/>
+        </p:nvSpPr>
+        <p:spPr>
+          <a:xfrm>
+            <a:off x="932688" y="1828800"/>
+            <a:ext cx="4846320" cy="320040"/>
           </a:xfrm>
           <a:prstGeom prst="rect">
             <a:avLst/>
@@ -3149,7 +3068,7 @@
               <a:buNone/>
             </a:pPr>
             <a:r>
-              <a:rPr lang="en-US" sz="1500" b="1" dirty="0">
+              <a:rPr lang="en-US" sz="1700" b="1" dirty="0">
                 <a:solidFill>
                   <a:srgbClr val="16191D"/>
                 </a:solidFill>
@@ -3157,22 +3076,22 @@
                 <a:ea typeface="Arial" pitchFamily="34" charset="-122"/>
                 <a:cs typeface="Arial" pitchFamily="34" charset="-120"/>
               </a:rPr>
-              <a:t>The useful way to think about it</a:t>
-            </a:r>
-            <a:endParaRPr lang="en-US" sz="1500" dirty="0"/>
-          </a:p>
-        </p:txBody>
-      </p:sp>
-      <p:sp>
-        <p:nvSpPr>
-          <p:cNvPr id="8" name="Text 6"/>
-          <p:cNvSpPr txBox="1"/>
-          <p:nvPr/>
-        </p:nvSpPr>
-        <p:spPr>
-          <a:xfrm>
-            <a:off x="914400" y="4617720"/>
-            <a:ext cx="4206240" cy="1051560"/>
+              <a:t>Opus quota is the scarce input</a:t>
+            </a:r>
+            <a:endParaRPr lang="en-US" sz="1700" dirty="0"/>
+          </a:p>
+        </p:txBody>
+      </p:sp>
+      <p:sp>
+        <p:nvSpPr>
+          <p:cNvPr id="6" name="Text 4"/>
+          <p:cNvSpPr txBox="1"/>
+          <p:nvPr/>
+        </p:nvSpPr>
+        <p:spPr>
+          <a:xfrm>
+            <a:off x="932688" y="2212848"/>
+            <a:ext cx="4846320" cy="1280160"/>
           </a:xfrm>
           <a:prstGeom prst="rect">
             <a:avLst/>
@@ -3186,12 +3105,12 @@
           <a:p>
             <a:pPr indent="0" marL="0">
               <a:lnSpc>
-                <a:spcPct val="120000"/>
+                <a:spcPct val="122000"/>
               </a:lnSpc>
               <a:buNone/>
             </a:pPr>
             <a:r>
-              <a:rPr lang="en-US" sz="1450" dirty="0">
+              <a:rPr lang="en-US" sz="1500" dirty="0">
                 <a:solidFill>
                   <a:srgbClr val="16191D"/>
                 </a:solidFill>
@@ -3199,26 +3118,26 @@
                 <a:ea typeface="Calibri" pitchFamily="34" charset="-122"/>
                 <a:cs typeface="Calibri" pitchFamily="34" charset="-120"/>
               </a:rPr>
-              <a:t>It is not “AI is expensive.” It is that the expert's time is the scarce thing — exactly like a team with one senior engineer and a lot of work.</a:t>
-            </a:r>
-            <a:endParaRPr lang="en-US" sz="1450" dirty="0"/>
-          </a:p>
-        </p:txBody>
-      </p:sp>
-      <p:sp>
-        <p:nvSpPr>
-          <p:cNvPr id="9" name="Shape 7"/>
+              <a:t>A $20 plan buys a fixed amount per five hours. Spending it on mechanical edits — renames, boilerplate, the twentieth similar test — means running dry before the work that actually needs judgement.</a:t>
+            </a:r>
+            <a:endParaRPr lang="en-US" sz="1500" dirty="0"/>
+          </a:p>
+        </p:txBody>
+      </p:sp>
+      <p:sp>
+        <p:nvSpPr>
+          <p:cNvPr id="7" name="Shape 5"/>
           <p:cNvSpPr/>
           <p:nvPr/>
         </p:nvSpPr>
         <p:spPr>
           <a:xfrm>
-            <a:off x="5943600" y="1737360"/>
-            <a:ext cx="5608015" cy="4069080"/>
+            <a:off x="640080" y="3794760"/>
+            <a:ext cx="5394960" cy="1965960"/>
           </a:xfrm>
           <a:prstGeom prst="roundRect">
             <a:avLst>
-              <a:gd name="adj" fmla="val 1348"/>
+              <a:gd name="adj" fmla="val 2791"/>
             </a:avLst>
           </a:prstGeom>
           <a:solidFill>
@@ -3234,14 +3153,14 @@
       </p:sp>
       <p:sp>
         <p:nvSpPr>
-          <p:cNvPr id="10" name="Text 8"/>
-          <p:cNvSpPr txBox="1"/>
-          <p:nvPr/>
-        </p:nvSpPr>
-        <p:spPr>
-          <a:xfrm>
-            <a:off x="6217920" y="1938528"/>
-            <a:ext cx="5029200" cy="320040"/>
+          <p:cNvPr id="8" name="Text 6"/>
+          <p:cNvSpPr txBox="1"/>
+          <p:nvPr/>
+        </p:nvSpPr>
+        <p:spPr>
+          <a:xfrm>
+            <a:off x="932688" y="3977640"/>
+            <a:ext cx="4846320" cy="320040"/>
           </a:xfrm>
           <a:prstGeom prst="rect">
             <a:avLst/>
@@ -3257,7 +3176,7 @@
               <a:buNone/>
             </a:pPr>
             <a:r>
-              <a:rPr lang="en-US" sz="1800" b="1" dirty="0">
+              <a:rPr lang="en-US" sz="1700" b="1" dirty="0">
                 <a:solidFill>
                   <a:srgbClr val="16191D"/>
                 </a:solidFill>
@@ -3265,42 +3184,91 @@
                 <a:ea typeface="Arial" pitchFamily="34" charset="-122"/>
                 <a:cs typeface="Arial" pitchFamily="34" charset="-120"/>
               </a:rPr>
-              <a:t>So you have two kinds of help</a:t>
-            </a:r>
-            <a:endParaRPr lang="en-US" sz="1800" dirty="0"/>
-          </a:p>
-        </p:txBody>
-      </p:sp>
-      <p:sp>
-        <p:nvSpPr>
-          <p:cNvPr id="11" name="Shape 9"/>
+              <a:t>Other providers are not scarce</a:t>
+            </a:r>
+            <a:endParaRPr lang="en-US" sz="1700" dirty="0"/>
+          </a:p>
+        </p:txBody>
+      </p:sp>
+      <p:sp>
+        <p:nvSpPr>
+          <p:cNvPr id="9" name="Text 7"/>
+          <p:cNvSpPr txBox="1"/>
+          <p:nvPr/>
+        </p:nvSpPr>
+        <p:spPr>
+          <a:xfrm>
+            <a:off x="932688" y="4361688"/>
+            <a:ext cx="4846320" cy="1280160"/>
+          </a:xfrm>
+          <a:prstGeom prst="rect">
+            <a:avLst/>
+          </a:prstGeom>
+          <a:noFill/>
+          <a:ln/>
+        </p:spPr>
+        <p:txBody>
+          <a:bodyPr wrap="square" lIns="0" tIns="0" rIns="0" bIns="0" rtlCol="0" anchor="t"/>
+          <a:lstStyle/>
+          <a:p>
+            <a:pPr indent="0" marL="0">
+              <a:lnSpc>
+                <a:spcPct val="122000"/>
+              </a:lnSpc>
+              <a:buNone/>
+            </a:pPr>
+            <a:r>
+              <a:rPr lang="en-US" sz="1500" dirty="0">
+                <a:solidFill>
+                  <a:srgbClr val="16191D"/>
+                </a:solidFill>
+                <a:latin typeface="Calibri" pitchFamily="34" charset="0"/>
+                <a:ea typeface="Calibri" pitchFamily="34" charset="-122"/>
+                <a:cs typeface="Calibri" pitchFamily="34" charset="-120"/>
+              </a:rPr>
+              <a:t>Antigravity's Gemini allowance is very large, and OpenCode fronts about 34 models on generous per-five-hour limits. Several are genuinely strong at implementation work.</a:t>
+            </a:r>
+            <a:endParaRPr lang="en-US" sz="1500" dirty="0"/>
+          </a:p>
+        </p:txBody>
+      </p:sp>
+      <p:sp>
+        <p:nvSpPr>
+          <p:cNvPr id="10" name="Shape 8"/>
           <p:cNvSpPr/>
           <p:nvPr/>
         </p:nvSpPr>
         <p:spPr>
           <a:xfrm>
-            <a:off x="6217920" y="2542032"/>
-            <a:ext cx="420624" cy="420624"/>
-          </a:xfrm>
-          <a:prstGeom prst="ellipse">
-            <a:avLst/>
+            <a:off x="6492240" y="1645920"/>
+            <a:ext cx="5059375" cy="4114800"/>
+          </a:xfrm>
+          <a:prstGeom prst="roundRect">
+            <a:avLst>
+              <a:gd name="adj" fmla="val 1333"/>
+            </a:avLst>
           </a:prstGeom>
           <a:solidFill>
-            <a:srgbClr val="6D4AC4"/>
+            <a:srgbClr val="16191D"/>
           </a:solidFill>
-          <a:ln/>
-        </p:spPr>
-      </p:sp>
-      <p:sp>
-        <p:nvSpPr>
-          <p:cNvPr id="12" name="Text 10"/>
-          <p:cNvSpPr txBox="1"/>
-          <p:nvPr/>
-        </p:nvSpPr>
-        <p:spPr>
-          <a:xfrm>
-            <a:off x="6217920" y="2542032"/>
-            <a:ext cx="420624" cy="420624"/>
+          <a:ln w="12700">
+            <a:solidFill>
+              <a:srgbClr val="16191D"/>
+            </a:solidFill>
+            <a:prstDash val="solid"/>
+          </a:ln>
+        </p:spPr>
+      </p:sp>
+      <p:sp>
+        <p:nvSpPr>
+          <p:cNvPr id="11" name="Text 9"/>
+          <p:cNvSpPr txBox="1"/>
+          <p:nvPr/>
+        </p:nvSpPr>
+        <p:spPr>
+          <a:xfrm>
+            <a:off x="6784848" y="1874520"/>
+            <a:ext cx="4754880" cy="320040"/>
           </a:xfrm>
           <a:prstGeom prst="rect">
             <a:avLst/>
@@ -3312,11 +3280,11 @@
           <a:bodyPr wrap="square" lIns="0" tIns="0" rIns="0" bIns="0" rtlCol="0" anchor="ctr"/>
           <a:lstStyle/>
           <a:p>
-            <a:pPr algn="ctr" indent="0" marL="0">
-              <a:buNone/>
-            </a:pPr>
-            <a:r>
-              <a:rPr lang="en-US" sz="1500" b="1" dirty="0">
+            <a:pPr indent="0" marL="0">
+              <a:buNone/>
+            </a:pPr>
+            <a:r>
+              <a:rPr lang="en-US" sz="1700" b="1" dirty="0">
                 <a:solidFill>
                   <a:srgbClr val="FFFFFF"/>
                 </a:solidFill>
@@ -3324,9 +3292,48 @@
                 <a:ea typeface="Arial" pitchFamily="34" charset="-122"/>
                 <a:cs typeface="Arial" pitchFamily="34" charset="-120"/>
               </a:rPr>
-              <a:t>1</a:t>
-            </a:r>
-            <a:endParaRPr lang="en-US" sz="1500" dirty="0"/>
+              <a:t>So the split is by what the work needs</a:t>
+            </a:r>
+            <a:endParaRPr lang="en-US" sz="1700" dirty="0"/>
+          </a:p>
+        </p:txBody>
+      </p:sp>
+      <p:sp>
+        <p:nvSpPr>
+          <p:cNvPr id="12" name="Text 10"/>
+          <p:cNvSpPr txBox="1"/>
+          <p:nvPr/>
+        </p:nvSpPr>
+        <p:spPr>
+          <a:xfrm>
+            <a:off x="6784848" y="2377440"/>
+            <a:ext cx="4754880" cy="274320"/>
+          </a:xfrm>
+          <a:prstGeom prst="rect">
+            <a:avLst/>
+          </a:prstGeom>
+          <a:noFill/>
+          <a:ln/>
+        </p:spPr>
+        <p:txBody>
+          <a:bodyPr wrap="square" lIns="0" tIns="0" rIns="0" bIns="0" rtlCol="0" anchor="ctr"/>
+          <a:lstStyle/>
+          <a:p>
+            <a:pPr indent="0" marL="0">
+              <a:buNone/>
+            </a:pPr>
+            <a:r>
+              <a:rPr lang="en-US" sz="1200" b="1" dirty="0">
+                <a:solidFill>
+                  <a:srgbClr val="C9B6F5"/>
+                </a:solidFill>
+                <a:latin typeface="Courier New" pitchFamily="34" charset="0"/>
+                <a:ea typeface="Courier New" pitchFamily="34" charset="-122"/>
+                <a:cs typeface="Courier New" pitchFamily="34" charset="-120"/>
+              </a:rPr>
+              <a:t>Claude · Opus</a:t>
+            </a:r>
+            <a:endParaRPr lang="en-US" sz="1200" dirty="0"/>
           </a:p>
         </p:txBody>
       </p:sp>
@@ -3338,47 +3345,8 @@
         </p:nvSpPr>
         <p:spPr>
           <a:xfrm>
-            <a:off x="6812280" y="2523744"/>
-            <a:ext cx="4572000" cy="347472"/>
-          </a:xfrm>
-          <a:prstGeom prst="rect">
-            <a:avLst/>
-          </a:prstGeom>
-          <a:noFill/>
-          <a:ln/>
-        </p:spPr>
-        <p:txBody>
-          <a:bodyPr wrap="square" lIns="0" tIns="0" rIns="0" bIns="0" rtlCol="0" anchor="ctr"/>
-          <a:lstStyle/>
-          <a:p>
-            <a:pPr indent="0" marL="0">
-              <a:buNone/>
-            </a:pPr>
-            <a:r>
-              <a:rPr lang="en-US" sz="1600" b="1" dirty="0">
-                <a:solidFill>
-                  <a:srgbClr val="16191D"/>
-                </a:solidFill>
-                <a:latin typeface="Arial" pitchFamily="34" charset="0"/>
-                <a:ea typeface="Arial" pitchFamily="34" charset="-122"/>
-                <a:cs typeface="Arial" pitchFamily="34" charset="-120"/>
-              </a:rPr>
-              <a:t>Expensive and excellent</a:t>
-            </a:r>
-            <a:endParaRPr lang="en-US" sz="1600" dirty="0"/>
-          </a:p>
-        </p:txBody>
-      </p:sp>
-      <p:sp>
-        <p:nvSpPr>
-          <p:cNvPr id="14" name="Text 12"/>
-          <p:cNvSpPr txBox="1"/>
-          <p:nvPr/>
-        </p:nvSpPr>
-        <p:spPr>
-          <a:xfrm>
-            <a:off x="6812280" y="2926080"/>
-            <a:ext cx="4526280" cy="868680"/>
+            <a:off x="6784848" y="2670048"/>
+            <a:ext cx="4754880" cy="713232"/>
           </a:xfrm>
           <a:prstGeom prst="rect">
             <a:avLst/>
@@ -3397,50 +3365,30 @@
               <a:buNone/>
             </a:pPr>
             <a:r>
-              <a:rPr lang="en-US" sz="1450" dirty="0">
-                <a:solidFill>
-                  <a:srgbClr val="16191D"/>
+              <a:rPr lang="en-US" sz="1400" dirty="0">
+                <a:solidFill>
+                  <a:srgbClr val="D5D9DE"/>
                 </a:solidFill>
                 <a:latin typeface="Calibri" pitchFamily="34" charset="0"/>
                 <a:ea typeface="Calibri" pitchFamily="34" charset="-122"/>
                 <a:cs typeface="Calibri" pitchFamily="34" charset="-120"/>
               </a:rPr>
-              <a:t>Strictly limited. Worth spending on decisions and on judging results.</a:t>
-            </a:r>
-            <a:endParaRPr lang="en-US" sz="1450" dirty="0"/>
-          </a:p>
-        </p:txBody>
-      </p:sp>
-      <p:sp>
-        <p:nvSpPr>
-          <p:cNvPr id="15" name="Shape 13"/>
-          <p:cNvSpPr/>
-          <p:nvPr/>
-        </p:nvSpPr>
-        <p:spPr>
-          <a:xfrm>
-            <a:off x="6217920" y="4142232"/>
-            <a:ext cx="420624" cy="420624"/>
-          </a:xfrm>
-          <a:prstGeom prst="ellipse">
-            <a:avLst/>
-          </a:prstGeom>
-          <a:solidFill>
-            <a:srgbClr val="C1690C"/>
-          </a:solidFill>
-          <a:ln/>
-        </p:spPr>
-      </p:sp>
-      <p:sp>
-        <p:nvSpPr>
-          <p:cNvPr id="16" name="Text 14"/>
-          <p:cNvSpPr txBox="1"/>
-          <p:nvPr/>
-        </p:nvSpPr>
-        <p:spPr>
-          <a:xfrm>
-            <a:off x="6217920" y="4142232"/>
-            <a:ext cx="420624" cy="420624"/>
+              <a:t>Architecture. Writing the spec. Reviewing the diff. Running the gate. Deciding whether it is done.</a:t>
+            </a:r>
+            <a:endParaRPr lang="en-US" sz="1400" dirty="0"/>
+          </a:p>
+        </p:txBody>
+      </p:sp>
+      <p:sp>
+        <p:nvSpPr>
+          <p:cNvPr id="14" name="Text 12"/>
+          <p:cNvSpPr txBox="1"/>
+          <p:nvPr/>
+        </p:nvSpPr>
+        <p:spPr>
+          <a:xfrm>
+            <a:off x="6784848" y="3474720"/>
+            <a:ext cx="4754880" cy="274320"/>
           </a:xfrm>
           <a:prstGeom prst="rect">
             <a:avLst/>
@@ -3452,73 +3400,34 @@
           <a:bodyPr wrap="square" lIns="0" tIns="0" rIns="0" bIns="0" rtlCol="0" anchor="ctr"/>
           <a:lstStyle/>
           <a:p>
-            <a:pPr algn="ctr" indent="0" marL="0">
-              <a:buNone/>
-            </a:pPr>
-            <a:r>
-              <a:rPr lang="en-US" sz="1500" b="1" dirty="0">
-                <a:solidFill>
-                  <a:srgbClr val="FFFFFF"/>
-                </a:solidFill>
-                <a:latin typeface="Arial" pitchFamily="34" charset="0"/>
-                <a:ea typeface="Arial" pitchFamily="34" charset="-122"/>
-                <a:cs typeface="Arial" pitchFamily="34" charset="-120"/>
-              </a:rPr>
-              <a:t>2</a:t>
-            </a:r>
-            <a:endParaRPr lang="en-US" sz="1500" dirty="0"/>
-          </a:p>
-        </p:txBody>
-      </p:sp>
-      <p:sp>
-        <p:nvSpPr>
-          <p:cNvPr id="17" name="Text 15"/>
-          <p:cNvSpPr txBox="1"/>
-          <p:nvPr/>
-        </p:nvSpPr>
-        <p:spPr>
-          <a:xfrm>
-            <a:off x="6812280" y="4123944"/>
-            <a:ext cx="4572000" cy="347472"/>
-          </a:xfrm>
-          <a:prstGeom prst="rect">
-            <a:avLst/>
-          </a:prstGeom>
-          <a:noFill/>
-          <a:ln/>
-        </p:spPr>
-        <p:txBody>
-          <a:bodyPr wrap="square" lIns="0" tIns="0" rIns="0" bIns="0" rtlCol="0" anchor="ctr"/>
-          <a:lstStyle/>
-          <a:p>
             <a:pPr indent="0" marL="0">
               <a:buNone/>
             </a:pPr>
             <a:r>
-              <a:rPr lang="en-US" sz="1600" b="1" dirty="0">
-                <a:solidFill>
-                  <a:srgbClr val="16191D"/>
-                </a:solidFill>
-                <a:latin typeface="Arial" pitchFamily="34" charset="0"/>
-                <a:ea typeface="Arial" pitchFamily="34" charset="-122"/>
-                <a:cs typeface="Arial" pitchFamily="34" charset="-120"/>
-              </a:rPr>
-              <a:t>Cheap and plentiful</a:t>
-            </a:r>
-            <a:endParaRPr lang="en-US" sz="1600" dirty="0"/>
-          </a:p>
-        </p:txBody>
-      </p:sp>
-      <p:sp>
-        <p:nvSpPr>
-          <p:cNvPr id="18" name="Text 16"/>
-          <p:cNvSpPr txBox="1"/>
-          <p:nvPr/>
-        </p:nvSpPr>
-        <p:spPr>
-          <a:xfrm>
-            <a:off x="6812280" y="4526280"/>
-            <a:ext cx="4526280" cy="868680"/>
+              <a:rPr lang="en-US" sz="1200" b="1" dirty="0">
+                <a:solidFill>
+                  <a:srgbClr val="F0C48A"/>
+                </a:solidFill>
+                <a:latin typeface="Courier New" pitchFamily="34" charset="0"/>
+                <a:ea typeface="Courier New" pitchFamily="34" charset="-122"/>
+                <a:cs typeface="Courier New" pitchFamily="34" charset="-120"/>
+              </a:rPr>
+              <a:t>agy · Gemini</a:t>
+            </a:r>
+            <a:endParaRPr lang="en-US" sz="1200" dirty="0"/>
+          </a:p>
+        </p:txBody>
+      </p:sp>
+      <p:sp>
+        <p:nvSpPr>
+          <p:cNvPr id="15" name="Text 13"/>
+          <p:cNvSpPr txBox="1"/>
+          <p:nvPr/>
+        </p:nvSpPr>
+        <p:spPr>
+          <a:xfrm>
+            <a:off x="6784848" y="3767328"/>
+            <a:ext cx="4754880" cy="713232"/>
           </a:xfrm>
           <a:prstGeom prst="rect">
             <a:avLst/>
@@ -3537,30 +3446,30 @@
               <a:buNone/>
             </a:pPr>
             <a:r>
-              <a:rPr lang="en-US" sz="1450" dirty="0">
-                <a:solidFill>
-                  <a:srgbClr val="16191D"/>
+              <a:rPr lang="en-US" sz="1400" dirty="0">
+                <a:solidFill>
+                  <a:srgbClr val="D5D9DE"/>
                 </a:solidFill>
                 <a:latin typeface="Calibri" pitchFamily="34" charset="0"/>
                 <a:ea typeface="Calibri" pitchFamily="34" charset="-122"/>
                 <a:cs typeface="Calibri" pitchFamily="34" charset="-120"/>
               </a:rPr>
-              <a:t>Other providers give away far more capacity. Good at following exact instructions.</a:t>
-            </a:r>
-            <a:endParaRPr lang="en-US" sz="1450" dirty="0"/>
-          </a:p>
-        </p:txBody>
-      </p:sp>
-      <p:sp>
-        <p:nvSpPr>
-          <p:cNvPr id="19" name="Text 17"/>
-          <p:cNvSpPr txBox="1"/>
-          <p:nvPr/>
-        </p:nvSpPr>
-        <p:spPr>
-          <a:xfrm>
-            <a:off x="6217920" y="5257800"/>
-            <a:ext cx="5120640" cy="365760"/>
+              <a:t>Bulk and mechanical execution against an exact spec.</a:t>
+            </a:r>
+            <a:endParaRPr lang="en-US" sz="1400" dirty="0"/>
+          </a:p>
+        </p:txBody>
+      </p:sp>
+      <p:sp>
+        <p:nvSpPr>
+          <p:cNvPr id="16" name="Text 14"/>
+          <p:cNvSpPr txBox="1"/>
+          <p:nvPr/>
+        </p:nvSpPr>
+        <p:spPr>
+          <a:xfrm>
+            <a:off x="6784848" y="4572000"/>
+            <a:ext cx="4754880" cy="274320"/>
           </a:xfrm>
           <a:prstGeom prst="rect">
             <a:avLst/>
@@ -3576,17 +3485,98 @@
               <a:buNone/>
             </a:pPr>
             <a:r>
-              <a:rPr lang="en-US" sz="1450" b="1" dirty="0">
-                <a:solidFill>
-                  <a:srgbClr val="6D4AC4"/>
+              <a:rPr lang="en-US" sz="1200" b="1" dirty="0">
+                <a:solidFill>
+                  <a:srgbClr val="9BE8CF"/>
+                </a:solidFill>
+                <a:latin typeface="Courier New" pitchFamily="34" charset="0"/>
+                <a:ea typeface="Courier New" pitchFamily="34" charset="-122"/>
+                <a:cs typeface="Courier New" pitchFamily="34" charset="-120"/>
+              </a:rPr>
+              <a:t>opencode · GLM, Kimi, GPT-class</a:t>
+            </a:r>
+            <a:endParaRPr lang="en-US" sz="1200" dirty="0"/>
+          </a:p>
+        </p:txBody>
+      </p:sp>
+      <p:sp>
+        <p:nvSpPr>
+          <p:cNvPr id="17" name="Text 15"/>
+          <p:cNvSpPr txBox="1"/>
+          <p:nvPr/>
+        </p:nvSpPr>
+        <p:spPr>
+          <a:xfrm>
+            <a:off x="6784848" y="4864608"/>
+            <a:ext cx="4754880" cy="713232"/>
+          </a:xfrm>
+          <a:prstGeom prst="rect">
+            <a:avLst/>
+          </a:prstGeom>
+          <a:noFill/>
+          <a:ln/>
+        </p:spPr>
+        <p:txBody>
+          <a:bodyPr wrap="square" lIns="0" tIns="0" rIns="0" bIns="0" rtlCol="0" anchor="t"/>
+          <a:lstStyle/>
+          <a:p>
+            <a:pPr indent="0" marL="0">
+              <a:lnSpc>
+                <a:spcPct val="120000"/>
+              </a:lnSpc>
+              <a:buNone/>
+            </a:pPr>
+            <a:r>
+              <a:rPr lang="en-US" sz="1400" dirty="0">
+                <a:solidFill>
+                  <a:srgbClr val="D5D9DE"/>
                 </a:solidFill>
                 <a:latin typeface="Calibri" pitchFamily="34" charset="0"/>
                 <a:ea typeface="Calibri" pitchFamily="34" charset="-122"/>
                 <a:cs typeface="Calibri" pitchFamily="34" charset="-120"/>
               </a:rPr>
-              <a:t>The whole idea is just: stop using the expensive one for typing.</a:t>
-            </a:r>
-            <a:endParaRPr lang="en-US" sz="1450" dirty="0"/>
+              <a:t>Harder delegated work — strong enough to write specs itself.</a:t>
+            </a:r>
+            <a:endParaRPr lang="en-US" sz="1400" dirty="0"/>
+          </a:p>
+        </p:txBody>
+      </p:sp>
+      <p:sp>
+        <p:nvSpPr>
+          <p:cNvPr id="18" name="Text 16"/>
+          <p:cNvSpPr txBox="1"/>
+          <p:nvPr/>
+        </p:nvSpPr>
+        <p:spPr>
+          <a:xfrm>
+            <a:off x="6784848" y="5349240"/>
+            <a:ext cx="4754880" cy="320040"/>
+          </a:xfrm>
+          <a:prstGeom prst="rect">
+            <a:avLst/>
+          </a:prstGeom>
+          <a:noFill/>
+          <a:ln/>
+        </p:spPr>
+        <p:txBody>
+          <a:bodyPr wrap="square" lIns="0" tIns="0" rIns="0" bIns="0" rtlCol="0" anchor="ctr"/>
+          <a:lstStyle/>
+          <a:p>
+            <a:pPr indent="0" marL="0">
+              <a:buNone/>
+            </a:pPr>
+            <a:r>
+              <a:rPr lang="en-US" sz="1350" i="1" dirty="0">
+                <a:solidFill>
+                  <a:srgbClr val="6B7280"/>
+                </a:solidFill>
+                <a:latin typeface="Calibri" pitchFamily="34" charset="0"/>
+                <a:ea typeface="Calibri" pitchFamily="34" charset="-122"/>
+                <a:cs typeface="Calibri" pitchFamily="34" charset="-120"/>
+              </a:rPr>
+              <a:t>Claude's tokens buy judgement. Someone else's buy keystrokes.</a:t>
+            </a:r>
+            <a:endParaRPr lang="en-US" sz="1350" dirty="0"/>
           </a:p>
         </p:txBody>
       </p:sp>
@@ -3648,7 +3638,7 @@
                 <a:ea typeface="Arial" pitchFamily="34" charset="-122"/>
                 <a:cs typeface="Arial" pitchFamily="34" charset="-120"/>
               </a:rPr>
-              <a:t>Like a contractor and a crew</a:t>
+              <a:t>Two tools, and a loop that closes on the repo</a:t>
             </a:r>
             <a:endParaRPr lang="en-US" sz="3800" dirty="0"/>
           </a:p>
@@ -3687,7 +3677,7 @@
                 <a:ea typeface="Courier New" pitchFamily="34" charset="-122"/>
                 <a:cs typeface="Courier New" pitchFamily="34" charset="-120"/>
               </a:rPr>
-              <a:t>THE IDEA</a:t>
+              <a:t>THE SHAPE OF IT</a:t>
             </a:r>
             <a:endParaRPr lang="en-US" sz="1100" dirty="0"/>
           </a:p>
@@ -3701,12 +3691,12 @@
         </p:nvSpPr>
         <p:spPr>
           <a:xfrm>
-            <a:off x="640080" y="2331720"/>
-            <a:ext cx="2468880" cy="1463040"/>
+            <a:off x="640080" y="2286000"/>
+            <a:ext cx="2377440" cy="1417320"/>
           </a:xfrm>
           <a:prstGeom prst="roundRect">
             <a:avLst>
-              <a:gd name="adj" fmla="val 3750"/>
+              <a:gd name="adj" fmla="val 3871"/>
             </a:avLst>
           </a:prstGeom>
           <a:solidFill>
@@ -3728,8 +3718,8 @@
         </p:nvSpPr>
         <p:spPr>
           <a:xfrm>
-            <a:off x="640080" y="2514600"/>
-            <a:ext cx="2468880" cy="320040"/>
+            <a:off x="640080" y="2450592"/>
+            <a:ext cx="2377440" cy="292608"/>
           </a:xfrm>
           <a:prstGeom prst="rect">
             <a:avLst/>
@@ -3753,7 +3743,7 @@
                 <a:ea typeface="Arial" pitchFamily="34" charset="-122"/>
                 <a:cs typeface="Arial" pitchFamily="34" charset="-120"/>
               </a:rPr>
-              <a:t>The expert</a:t>
+              <a:t>Claude Code</a:t>
             </a:r>
             <a:endParaRPr lang="en-US" sz="1600" dirty="0"/>
           </a:p>
@@ -3767,8 +3757,8 @@
         </p:nvSpPr>
         <p:spPr>
           <a:xfrm>
-            <a:off x="640080" y="2852928"/>
-            <a:ext cx="2468880" cy="685800"/>
+            <a:off x="640080" y="2798064"/>
+            <a:ext cx="2377440" cy="292608"/>
           </a:xfrm>
           <a:prstGeom prst="rect">
             <a:avLst/>
@@ -3781,9 +3771,6 @@
           <a:lstStyle/>
           <a:p>
             <a:pPr algn="ctr" indent="0" marL="0">
-              <a:lnSpc>
-                <a:spcPct val="115000"/>
-              </a:lnSpc>
               <a:buNone/>
             </a:pPr>
             <a:r>
@@ -3795,46 +3782,65 @@
                 <a:ea typeface="Calibri" pitchFamily="34" charset="-122"/>
                 <a:cs typeface="Calibri" pitchFamily="34" charset="-120"/>
               </a:rPr>
-              <a:t>decides what to build,</a:t>
+              <a:t>plan · review · gate</a:t>
             </a:r>
             <a:endParaRPr lang="en-US" sz="1400" dirty="0"/>
           </a:p>
+        </p:txBody>
+      </p:sp>
+      <p:sp>
+        <p:nvSpPr>
+          <p:cNvPr id="7" name="Text 5"/>
+          <p:cNvSpPr txBox="1"/>
+          <p:nvPr/>
+        </p:nvSpPr>
+        <p:spPr>
+          <a:xfrm>
+            <a:off x="640080" y="3163824"/>
+            <a:ext cx="2377440" cy="274320"/>
+          </a:xfrm>
+          <a:prstGeom prst="rect">
+            <a:avLst/>
+          </a:prstGeom>
+          <a:noFill/>
+          <a:ln/>
+        </p:spPr>
+        <p:txBody>
+          <a:bodyPr wrap="square" lIns="0" tIns="0" rIns="0" bIns="0" rtlCol="0" anchor="ctr"/>
+          <a:lstStyle/>
           <a:p>
             <a:pPr algn="ctr" indent="0" marL="0">
-              <a:lnSpc>
-                <a:spcPct val="115000"/>
-              </a:lnSpc>
-              <a:buNone/>
-            </a:pPr>
-            <a:r>
-              <a:rPr lang="en-US" sz="1400" dirty="0">
-                <a:solidFill>
-                  <a:srgbClr val="16191D"/>
-                </a:solidFill>
-                <a:latin typeface="Calibri" pitchFamily="34" charset="0"/>
-                <a:ea typeface="Calibri" pitchFamily="34" charset="-122"/>
-                <a:cs typeface="Calibri" pitchFamily="34" charset="-120"/>
-              </a:rPr>
-              <a:t>then inspects it</a:t>
-            </a:r>
-            <a:endParaRPr lang="en-US" sz="1400" dirty="0"/>
-          </a:p>
-        </p:txBody>
-      </p:sp>
-      <p:sp>
-        <p:nvSpPr>
-          <p:cNvPr id="7" name="Shape 5"/>
+              <a:buNone/>
+            </a:pPr>
+            <a:r>
+              <a:rPr lang="en-US" sz="1050" dirty="0">
+                <a:solidFill>
+                  <a:srgbClr val="6D4AC4"/>
+                </a:solidFill>
+                <a:latin typeface="Courier New" pitchFamily="34" charset="0"/>
+                <a:ea typeface="Courier New" pitchFamily="34" charset="-122"/>
+                <a:cs typeface="Courier New" pitchFamily="34" charset="-120"/>
+              </a:rPr>
+              <a:t>two MCP tools</a:t>
+            </a:r>
+            <a:endParaRPr lang="en-US" sz="1050" dirty="0"/>
+          </a:p>
+        </p:txBody>
+      </p:sp>
+      <p:sp>
+        <p:nvSpPr>
+          <p:cNvPr id="8" name="Shape 6"/>
           <p:cNvSpPr/>
           <p:nvPr/>
         </p:nvSpPr>
         <p:spPr>
           <a:xfrm>
-            <a:off x="3794760" y="2542032"/>
-            <a:ext cx="1920240" cy="1051560"/>
+            <a:off x="3657600" y="2487168"/>
+            <a:ext cx="1965960" cy="1005840"/>
           </a:xfrm>
           <a:prstGeom prst="roundRect">
             <a:avLst>
-              <a:gd name="adj" fmla="val 5217"/>
+              <a:gd name="adj" fmla="val 5455"/>
             </a:avLst>
           </a:prstGeom>
           <a:solidFill>
@@ -3850,14 +3856,14 @@
       </p:sp>
       <p:sp>
         <p:nvSpPr>
-          <p:cNvPr id="8" name="Text 6"/>
-          <p:cNvSpPr txBox="1"/>
-          <p:nvPr/>
-        </p:nvSpPr>
-        <p:spPr>
-          <a:xfrm>
-            <a:off x="3794760" y="2697480"/>
-            <a:ext cx="1920240" cy="292608"/>
+          <p:cNvPr id="9" name="Text 7"/>
+          <p:cNvSpPr txBox="1"/>
+          <p:nvPr/>
+        </p:nvSpPr>
+        <p:spPr>
+          <a:xfrm>
+            <a:off x="3657600" y="2633472"/>
+            <a:ext cx="1965960" cy="274320"/>
           </a:xfrm>
           <a:prstGeom prst="rect">
             <a:avLst/>
@@ -3881,7 +3887,7 @@
                 <a:ea typeface="Arial" pitchFamily="34" charset="-122"/>
                 <a:cs typeface="Arial" pitchFamily="34" charset="-120"/>
               </a:rPr>
-              <a:t>a written plan</a:t>
+              <a:t>spec file</a:t>
             </a:r>
             <a:endParaRPr lang="en-US" sz="1400" dirty="0"/>
           </a:p>
@@ -3889,14 +3895,14 @@
       </p:sp>
       <p:sp>
         <p:nvSpPr>
-          <p:cNvPr id="9" name="Text 7"/>
-          <p:cNvSpPr txBox="1"/>
-          <p:nvPr/>
-        </p:nvSpPr>
-        <p:spPr>
-          <a:xfrm>
-            <a:off x="3794760" y="2999232"/>
-            <a:ext cx="1920240" cy="548640"/>
+          <p:cNvPr id="10" name="Text 8"/>
+          <p:cNvSpPr txBox="1"/>
+          <p:nvPr/>
+        </p:nvSpPr>
+        <p:spPr>
+          <a:xfrm>
+            <a:off x="3657600" y="2926080"/>
+            <a:ext cx="1965960" cy="502920"/>
           </a:xfrm>
           <a:prstGeom prst="rect">
             <a:avLst/>
@@ -3915,7 +3921,7 @@
               <a:buNone/>
             </a:pPr>
             <a:r>
-              <a:rPr lang="en-US" sz="1250" dirty="0">
+              <a:rPr lang="en-US" sz="1200" dirty="0">
                 <a:solidFill>
                   <a:srgbClr val="6B7280"/>
                 </a:solidFill>
@@ -3923,9 +3929,9 @@
                 <a:ea typeface="Calibri" pitchFamily="34" charset="-122"/>
                 <a:cs typeface="Calibri" pitchFamily="34" charset="-120"/>
               </a:rPr>
-              <a:t>exact, and saved</a:t>
-            </a:r>
-            <a:endParaRPr lang="en-US" sz="1250" dirty="0"/>
+              <a:t>phase-gated,</a:t>
+            </a:r>
+            <a:endParaRPr lang="en-US" sz="1200" dirty="0"/>
           </a:p>
           <a:p>
             <a:pPr algn="ctr" indent="0" marL="0">
@@ -3935,7 +3941,7 @@
               <a:buNone/>
             </a:pPr>
             <a:r>
-              <a:rPr lang="en-US" sz="1250" dirty="0">
+              <a:rPr lang="en-US" sz="1200" dirty="0">
                 <a:solidFill>
                   <a:srgbClr val="6B7280"/>
                 </a:solidFill>
@@ -3943,26 +3949,26 @@
                 <a:ea typeface="Calibri" pitchFamily="34" charset="-122"/>
                 <a:cs typeface="Calibri" pitchFamily="34" charset="-120"/>
               </a:rPr>
-              <a:t>to a file</a:t>
-            </a:r>
-            <a:endParaRPr lang="en-US" sz="1250" dirty="0"/>
-          </a:p>
-        </p:txBody>
-      </p:sp>
-      <p:sp>
-        <p:nvSpPr>
-          <p:cNvPr id="10" name="Shape 8"/>
+              <a:t>in version control</a:t>
+            </a:r>
+            <a:endParaRPr lang="en-US" sz="1200" dirty="0"/>
+          </a:p>
+        </p:txBody>
+      </p:sp>
+      <p:sp>
+        <p:nvSpPr>
+          <p:cNvPr id="11" name="Shape 9"/>
           <p:cNvSpPr/>
           <p:nvPr/>
         </p:nvSpPr>
         <p:spPr>
           <a:xfrm>
-            <a:off x="6400800" y="2331720"/>
-            <a:ext cx="2743200" cy="1463040"/>
+            <a:off x="6309360" y="1783080"/>
+            <a:ext cx="2834640" cy="960120"/>
           </a:xfrm>
           <a:prstGeom prst="roundRect">
             <a:avLst>
-              <a:gd name="adj" fmla="val 3750"/>
+              <a:gd name="adj" fmla="val 5714"/>
             </a:avLst>
           </a:prstGeom>
           <a:solidFill>
@@ -3978,14 +3984,14 @@
       </p:sp>
       <p:sp>
         <p:nvSpPr>
-          <p:cNvPr id="11" name="Text 9"/>
-          <p:cNvSpPr txBox="1"/>
-          <p:nvPr/>
-        </p:nvSpPr>
-        <p:spPr>
-          <a:xfrm>
-            <a:off x="6400800" y="2514600"/>
-            <a:ext cx="2743200" cy="320040"/>
+          <p:cNvPr id="12" name="Text 10"/>
+          <p:cNvSpPr txBox="1"/>
+          <p:nvPr/>
+        </p:nvSpPr>
+        <p:spPr>
+          <a:xfrm>
+            <a:off x="6309360" y="1920240"/>
+            <a:ext cx="2834640" cy="274320"/>
           </a:xfrm>
           <a:prstGeom prst="rect">
             <a:avLst/>
@@ -4001,30 +4007,30 @@
               <a:buNone/>
             </a:pPr>
             <a:r>
-              <a:rPr lang="en-US" sz="1600" b="1" dirty="0">
+              <a:rPr lang="en-US" sz="1300" b="1" dirty="0">
                 <a:solidFill>
                   <a:srgbClr val="C1690C"/>
                 </a:solidFill>
-                <a:latin typeface="Arial" pitchFamily="34" charset="0"/>
-                <a:ea typeface="Arial" pitchFamily="34" charset="-122"/>
-                <a:cs typeface="Arial" pitchFamily="34" charset="-120"/>
-              </a:rPr>
-              <a:t>The crew</a:t>
-            </a:r>
-            <a:endParaRPr lang="en-US" sz="1600" dirty="0"/>
-          </a:p>
-        </p:txBody>
-      </p:sp>
-      <p:sp>
-        <p:nvSpPr>
-          <p:cNvPr id="12" name="Text 10"/>
-          <p:cNvSpPr txBox="1"/>
-          <p:nvPr/>
-        </p:nvSpPr>
-        <p:spPr>
-          <a:xfrm>
-            <a:off x="6400800" y="2852928"/>
-            <a:ext cx="2743200" cy="685800"/>
+                <a:latin typeface="Courier New" pitchFamily="34" charset="0"/>
+                <a:ea typeface="Courier New" pitchFamily="34" charset="-122"/>
+                <a:cs typeface="Courier New" pitchFamily="34" charset="-120"/>
+              </a:rPr>
+              <a:t>ask_agy</a:t>
+            </a:r>
+            <a:endParaRPr lang="en-US" sz="1300" dirty="0"/>
+          </a:p>
+        </p:txBody>
+      </p:sp>
+      <p:sp>
+        <p:nvSpPr>
+          <p:cNvPr id="13" name="Text 11"/>
+          <p:cNvSpPr txBox="1"/>
+          <p:nvPr/>
+        </p:nvSpPr>
+        <p:spPr>
+          <a:xfrm>
+            <a:off x="6309360" y="2240280"/>
+            <a:ext cx="2834640" cy="411480"/>
           </a:xfrm>
           <a:prstGeom prst="rect">
             <a:avLst/>
@@ -4037,13 +4043,10 @@
           <a:lstStyle/>
           <a:p>
             <a:pPr algn="ctr" indent="0" marL="0">
-              <a:lnSpc>
-                <a:spcPct val="115000"/>
-              </a:lnSpc>
-              <a:buNone/>
-            </a:pPr>
-            <a:r>
-              <a:rPr lang="en-US" sz="1400" dirty="0">
+              <a:buNone/>
+            </a:pPr>
+            <a:r>
+              <a:rPr lang="en-US" sz="1250" dirty="0">
                 <a:solidFill>
                   <a:srgbClr val="16191D"/>
                 </a:solidFill>
@@ -4051,19 +4054,104 @@
                 <a:ea typeface="Calibri" pitchFamily="34" charset="-122"/>
                 <a:cs typeface="Calibri" pitchFamily="34" charset="-120"/>
               </a:rPr>
-              <a:t>two cheaper models,</a:t>
-            </a:r>
-            <a:endParaRPr lang="en-US" sz="1400" dirty="0"/>
-          </a:p>
+              <a:t>Gemini, via the Antigravity CLI</a:t>
+            </a:r>
+            <a:endParaRPr lang="en-US" sz="1250" dirty="0"/>
+          </a:p>
+        </p:txBody>
+      </p:sp>
+      <p:sp>
+        <p:nvSpPr>
+          <p:cNvPr id="14" name="Shape 12"/>
+          <p:cNvSpPr/>
+          <p:nvPr/>
+        </p:nvSpPr>
+        <p:spPr>
+          <a:xfrm>
+            <a:off x="6309360" y="3200400"/>
+            <a:ext cx="2834640" cy="960120"/>
+          </a:xfrm>
+          <a:prstGeom prst="roundRect">
+            <a:avLst>
+              <a:gd name="adj" fmla="val 5714"/>
+            </a:avLst>
+          </a:prstGeom>
+          <a:solidFill>
+            <a:srgbClr val="F4F5F7"/>
+          </a:solidFill>
+          <a:ln w="12700">
+            <a:solidFill>
+              <a:srgbClr val="DCE0E6"/>
+            </a:solidFill>
+            <a:prstDash val="solid"/>
+          </a:ln>
+        </p:spPr>
+      </p:sp>
+      <p:sp>
+        <p:nvSpPr>
+          <p:cNvPr id="15" name="Text 13"/>
+          <p:cNvSpPr txBox="1"/>
+          <p:nvPr/>
+        </p:nvSpPr>
+        <p:spPr>
+          <a:xfrm>
+            <a:off x="6309360" y="3337560"/>
+            <a:ext cx="2834640" cy="274320"/>
+          </a:xfrm>
+          <a:prstGeom prst="rect">
+            <a:avLst/>
+          </a:prstGeom>
+          <a:noFill/>
+          <a:ln/>
+        </p:spPr>
+        <p:txBody>
+          <a:bodyPr wrap="square" lIns="0" tIns="0" rIns="0" bIns="0" rtlCol="0" anchor="ctr"/>
+          <a:lstStyle/>
           <a:p>
             <a:pPr algn="ctr" indent="0" marL="0">
-              <a:lnSpc>
-                <a:spcPct val="115000"/>
-              </a:lnSpc>
-              <a:buNone/>
-            </a:pPr>
-            <a:r>
-              <a:rPr lang="en-US" sz="1400" dirty="0">
+              <a:buNone/>
+            </a:pPr>
+            <a:r>
+              <a:rPr lang="en-US" sz="1300" b="1" dirty="0">
+                <a:solidFill>
+                  <a:srgbClr val="17795E"/>
+                </a:solidFill>
+                <a:latin typeface="Courier New" pitchFamily="34" charset="0"/>
+                <a:ea typeface="Courier New" pitchFamily="34" charset="-122"/>
+                <a:cs typeface="Courier New" pitchFamily="34" charset="-120"/>
+              </a:rPr>
+              <a:t>ask_opencode</a:t>
+            </a:r>
+            <a:endParaRPr lang="en-US" sz="1300" dirty="0"/>
+          </a:p>
+        </p:txBody>
+      </p:sp>
+      <p:sp>
+        <p:nvSpPr>
+          <p:cNvPr id="16" name="Text 14"/>
+          <p:cNvSpPr txBox="1"/>
+          <p:nvPr/>
+        </p:nvSpPr>
+        <p:spPr>
+          <a:xfrm>
+            <a:off x="6309360" y="3657600"/>
+            <a:ext cx="2834640" cy="411480"/>
+          </a:xfrm>
+          <a:prstGeom prst="rect">
+            <a:avLst/>
+          </a:prstGeom>
+          <a:noFill/>
+          <a:ln/>
+        </p:spPr>
+        <p:txBody>
+          <a:bodyPr wrap="square" lIns="0" tIns="0" rIns="0" bIns="0" rtlCol="0" anchor="ctr"/>
+          <a:lstStyle/>
+          <a:p>
+            <a:pPr algn="ctr" indent="0" marL="0">
+              <a:buNone/>
+            </a:pPr>
+            <a:r>
+              <a:rPr lang="en-US" sz="1250" dirty="0">
                 <a:solidFill>
                   <a:srgbClr val="16191D"/>
                 </a:solidFill>
@@ -4071,26 +4159,26 @@
                 <a:ea typeface="Calibri" pitchFamily="34" charset="-122"/>
                 <a:cs typeface="Calibri" pitchFamily="34" charset="-120"/>
               </a:rPr>
-              <a:t>working unsupervised</a:t>
-            </a:r>
-            <a:endParaRPr lang="en-US" sz="1400" dirty="0"/>
-          </a:p>
-        </p:txBody>
-      </p:sp>
-      <p:sp>
-        <p:nvSpPr>
-          <p:cNvPr id="13" name="Shape 11"/>
+              <a:t>34 models, one argument away</a:t>
+            </a:r>
+            <a:endParaRPr lang="en-US" sz="1250" dirty="0"/>
+          </a:p>
+        </p:txBody>
+      </p:sp>
+      <p:sp>
+        <p:nvSpPr>
+          <p:cNvPr id="17" name="Shape 15"/>
           <p:cNvSpPr/>
           <p:nvPr/>
         </p:nvSpPr>
         <p:spPr>
           <a:xfrm>
-            <a:off x="9829800" y="2331720"/>
-            <a:ext cx="1721815" cy="1463040"/>
+            <a:off x="9829800" y="2286000"/>
+            <a:ext cx="1721815" cy="1417320"/>
           </a:xfrm>
           <a:prstGeom prst="roundRect">
             <a:avLst>
-              <a:gd name="adj" fmla="val 3750"/>
+              <a:gd name="adj" fmla="val 3871"/>
             </a:avLst>
           </a:prstGeom>
           <a:solidFill>
@@ -4106,14 +4194,14 @@
       </p:sp>
       <p:sp>
         <p:nvSpPr>
-          <p:cNvPr id="14" name="Text 12"/>
-          <p:cNvSpPr txBox="1"/>
-          <p:nvPr/>
-        </p:nvSpPr>
-        <p:spPr>
-          <a:xfrm>
-            <a:off x="9829800" y="2651760"/>
-            <a:ext cx="1721815" cy="365760"/>
+          <p:cNvPr id="18" name="Text 16"/>
+          <p:cNvSpPr txBox="1"/>
+          <p:nvPr/>
+        </p:nvSpPr>
+        <p:spPr>
+          <a:xfrm>
+            <a:off x="9829800" y="2542032"/>
+            <a:ext cx="1721815" cy="320040"/>
           </a:xfrm>
           <a:prstGeom prst="rect">
             <a:avLst/>
@@ -4137,7 +4225,7 @@
                 <a:ea typeface="Arial" pitchFamily="34" charset="-122"/>
                 <a:cs typeface="Arial" pitchFamily="34" charset="-120"/>
               </a:rPr>
-              <a:t>your codebase</a:t>
+              <a:t>your repo</a:t>
             </a:r>
             <a:endParaRPr lang="en-US" sz="1500" dirty="0"/>
           </a:p>
@@ -4145,14 +4233,14 @@
       </p:sp>
       <p:sp>
         <p:nvSpPr>
-          <p:cNvPr id="15" name="Text 13"/>
-          <p:cNvSpPr txBox="1"/>
-          <p:nvPr/>
-        </p:nvSpPr>
-        <p:spPr>
-          <a:xfrm>
-            <a:off x="9829800" y="3017520"/>
-            <a:ext cx="1721815" cy="365760"/>
+          <p:cNvPr id="19" name="Text 17"/>
+          <p:cNvSpPr txBox="1"/>
+          <p:nvPr/>
+        </p:nvSpPr>
+        <p:spPr>
+          <a:xfrm>
+            <a:off x="9829800" y="2871216"/>
+            <a:ext cx="1721815" cy="594360"/>
           </a:xfrm>
           <a:prstGeom prst="rect">
             <a:avLst/>
@@ -4165,10 +4253,13 @@
           <a:lstStyle/>
           <a:p>
             <a:pPr algn="ctr" indent="0" marL="0">
-              <a:buNone/>
-            </a:pPr>
-            <a:r>
-              <a:rPr lang="en-US" sz="1300" dirty="0">
+              <a:lnSpc>
+                <a:spcPct val="120000"/>
+              </a:lnSpc>
+              <a:buNone/>
+            </a:pPr>
+            <a:r>
+              <a:rPr lang="en-US" sz="1250" dirty="0">
                 <a:solidFill>
                   <a:srgbClr val="9BE8CF"/>
                 </a:solidFill>
@@ -4176,21 +4267,41 @@
                 <a:ea typeface="Calibri" pitchFamily="34" charset="-122"/>
                 <a:cs typeface="Calibri" pitchFamily="34" charset="-120"/>
               </a:rPr>
-              <a:t>changed, for real</a:t>
-            </a:r>
-            <a:endParaRPr lang="en-US" sz="1300" dirty="0"/>
-          </a:p>
-        </p:txBody>
-      </p:sp>
-      <p:sp>
-        <p:nvSpPr>
-          <p:cNvPr id="16" name="Shape 14"/>
+              <a:t>real commits</a:t>
+            </a:r>
+            <a:endParaRPr lang="en-US" sz="1250" dirty="0"/>
+          </a:p>
+          <a:p>
+            <a:pPr algn="ctr" indent="0" marL="0">
+              <a:lnSpc>
+                <a:spcPct val="120000"/>
+              </a:lnSpc>
+              <a:buNone/>
+            </a:pPr>
+            <a:r>
+              <a:rPr lang="en-US" sz="1250" dirty="0">
+                <a:solidFill>
+                  <a:srgbClr val="9BE8CF"/>
+                </a:solidFill>
+                <a:latin typeface="Calibri" pitchFamily="34" charset="0"/>
+                <a:ea typeface="Calibri" pitchFamily="34" charset="-122"/>
+                <a:cs typeface="Calibri" pitchFamily="34" charset="-120"/>
+              </a:rPr>
+              <a:t>on a real branch</a:t>
+            </a:r>
+            <a:endParaRPr lang="en-US" sz="1250" dirty="0"/>
+          </a:p>
+        </p:txBody>
+      </p:sp>
+      <p:sp>
+        <p:nvSpPr>
+          <p:cNvPr id="20" name="Shape 18"/>
           <p:cNvSpPr/>
           <p:nvPr/>
         </p:nvSpPr>
         <p:spPr>
           <a:xfrm>
-            <a:off x="3200400" y="3063240"/>
+            <a:off x="3063240" y="2990088"/>
             <a:ext cx="548640" cy="0"/>
           </a:xfrm>
           <a:prstGeom prst="line">
@@ -4208,14 +4319,14 @@
       </p:sp>
       <p:sp>
         <p:nvSpPr>
-          <p:cNvPr id="17" name="Shape 15"/>
+          <p:cNvPr id="21" name="Shape 19"/>
           <p:cNvSpPr/>
           <p:nvPr/>
         </p:nvSpPr>
         <p:spPr>
-          <a:xfrm>
-            <a:off x="5760720" y="3063240"/>
-            <a:ext cx="594360" cy="0"/>
+          <a:xfrm flipV="1">
+            <a:off x="5669280" y="2377440"/>
+            <a:ext cx="594360" cy="411480"/>
           </a:xfrm>
           <a:prstGeom prst="line">
             <a:avLst/>
@@ -4232,14 +4343,14 @@
       </p:sp>
       <p:sp>
         <p:nvSpPr>
-          <p:cNvPr id="18" name="Shape 16"/>
+          <p:cNvPr id="22" name="Shape 20"/>
           <p:cNvSpPr/>
           <p:nvPr/>
         </p:nvSpPr>
         <p:spPr>
           <a:xfrm>
-            <a:off x="9189720" y="3063240"/>
-            <a:ext cx="594360" cy="0"/>
+            <a:off x="5669280" y="3200400"/>
+            <a:ext cx="594360" cy="411480"/>
           </a:xfrm>
           <a:prstGeom prst="line">
             <a:avLst/>
@@ -4256,14 +4367,62 @@
       </p:sp>
       <p:sp>
         <p:nvSpPr>
-          <p:cNvPr id="19" name="Shape 17"/>
+          <p:cNvPr id="23" name="Shape 21"/>
           <p:cNvSpPr/>
           <p:nvPr/>
         </p:nvSpPr>
         <p:spPr>
           <a:xfrm>
-            <a:off x="10881360" y="3794760"/>
-            <a:ext cx="914" cy="777240"/>
+            <a:off x="9189720" y="2286000"/>
+            <a:ext cx="594360" cy="411480"/>
+          </a:xfrm>
+          <a:prstGeom prst="line">
+            <a:avLst/>
+          </a:prstGeom>
+          <a:noFill/>
+          <a:ln w="22225">
+            <a:solidFill>
+              <a:srgbClr val="6B7280"/>
+            </a:solidFill>
+            <a:prstDash val="solid"/>
+            <a:tailEnd type="triangle"/>
+          </a:ln>
+        </p:spPr>
+      </p:sp>
+      <p:sp>
+        <p:nvSpPr>
+          <p:cNvPr id="24" name="Shape 22"/>
+          <p:cNvSpPr/>
+          <p:nvPr/>
+        </p:nvSpPr>
+        <p:spPr>
+          <a:xfrm flipV="1">
+            <a:off x="9189720" y="3291840"/>
+            <a:ext cx="594360" cy="731520"/>
+          </a:xfrm>
+          <a:prstGeom prst="line">
+            <a:avLst/>
+          </a:prstGeom>
+          <a:noFill/>
+          <a:ln w="22225">
+            <a:solidFill>
+              <a:srgbClr val="6B7280"/>
+            </a:solidFill>
+            <a:prstDash val="solid"/>
+            <a:tailEnd type="triangle"/>
+          </a:ln>
+        </p:spPr>
+      </p:sp>
+      <p:sp>
+        <p:nvSpPr>
+          <p:cNvPr id="25" name="Shape 23"/>
+          <p:cNvSpPr/>
+          <p:nvPr/>
+        </p:nvSpPr>
+        <p:spPr>
+          <a:xfrm>
+            <a:off x="10881360" y="3703320"/>
+            <a:ext cx="914" cy="914400"/>
           </a:xfrm>
           <a:prstGeom prst="line">
             <a:avLst/>
@@ -4279,14 +4438,14 @@
       </p:sp>
       <p:sp>
         <p:nvSpPr>
-          <p:cNvPr id="20" name="Shape 18"/>
+          <p:cNvPr id="26" name="Shape 24"/>
           <p:cNvSpPr/>
           <p:nvPr/>
         </p:nvSpPr>
         <p:spPr>
           <a:xfrm>
-            <a:off x="1874520" y="4572000"/>
-            <a:ext cx="9006840" cy="914"/>
+            <a:off x="1828800" y="4617720"/>
+            <a:ext cx="9052560" cy="914"/>
           </a:xfrm>
           <a:prstGeom prst="line">
             <a:avLst/>
@@ -4302,14 +4461,14 @@
       </p:sp>
       <p:sp>
         <p:nvSpPr>
-          <p:cNvPr id="21" name="Shape 19"/>
+          <p:cNvPr id="27" name="Shape 25"/>
           <p:cNvSpPr/>
           <p:nvPr/>
         </p:nvSpPr>
         <p:spPr>
           <a:xfrm flipV="1">
-            <a:off x="1874520" y="3794760"/>
-            <a:ext cx="914" cy="777240"/>
+            <a:off x="1828800" y="3703320"/>
+            <a:ext cx="914" cy="914400"/>
           </a:xfrm>
           <a:prstGeom prst="line">
             <a:avLst/>
@@ -4326,14 +4485,14 @@
       </p:sp>
       <p:sp>
         <p:nvSpPr>
-          <p:cNvPr id="22" name="Text 20"/>
-          <p:cNvSpPr txBox="1"/>
-          <p:nvPr/>
-        </p:nvSpPr>
-        <p:spPr>
-          <a:xfrm>
-            <a:off x="3657600" y="4114800"/>
-            <a:ext cx="5486400" cy="365760"/>
+          <p:cNvPr id="28" name="Text 26"/>
+          <p:cNvSpPr txBox="1"/>
+          <p:nvPr/>
+        </p:nvSpPr>
+        <p:spPr>
+          <a:xfrm>
+            <a:off x="3291840" y="4160520"/>
+            <a:ext cx="6217920" cy="365760"/>
           </a:xfrm>
           <a:prstGeom prst="rect">
             <a:avLst/>
@@ -4349,23 +4508,23 @@
               <a:buNone/>
             </a:pPr>
             <a:r>
-              <a:rPr lang="en-US" sz="1450" b="1" dirty="0">
+              <a:rPr lang="en-US" sz="1150" b="1" dirty="0">
                 <a:solidFill>
                   <a:srgbClr val="16191D"/>
                 </a:solidFill>
-                <a:latin typeface="Calibri" pitchFamily="34" charset="0"/>
-                <a:ea typeface="Calibri" pitchFamily="34" charset="-122"/>
-                <a:cs typeface="Calibri" pitchFamily="34" charset="-120"/>
-              </a:rPr>
-              <a:t>and then the expert checks it, personally, every time</a:t>
-            </a:r>
-            <a:endParaRPr lang="en-US" sz="1450" dirty="0"/>
-          </a:p>
-        </p:txBody>
-      </p:sp>
-      <p:sp>
-        <p:nvSpPr>
-          <p:cNvPr id="23" name="Shape 21"/>
+                <a:latin typeface="Courier New" pitchFamily="34" charset="0"/>
+                <a:ea typeface="Courier New" pitchFamily="34" charset="-122"/>
+                <a:cs typeface="Courier New" pitchFamily="34" charset="-120"/>
+              </a:rPr>
+              <a:t>git log  ·  git diff --stat  ·  re-run the test gate</a:t>
+            </a:r>
+            <a:endParaRPr lang="en-US" sz="1150" dirty="0"/>
+          </a:p>
+        </p:txBody>
+      </p:sp>
+      <p:sp>
+        <p:nvSpPr>
+          <p:cNvPr id="29" name="Shape 27"/>
           <p:cNvSpPr/>
           <p:nvPr/>
         </p:nvSpPr>
@@ -4392,7 +4551,7 @@
       </p:sp>
       <p:sp>
         <p:nvSpPr>
-          <p:cNvPr id="24" name="Text 22"/>
+          <p:cNvPr id="30" name="Text 28"/>
           <p:cNvSpPr txBox="1"/>
           <p:nvPr/>
         </p:nvSpPr>
@@ -4426,7 +4585,7 @@
                 <a:ea typeface="Calibri" pitchFamily="34" charset="-122"/>
                 <a:cs typeface="Calibri" pitchFamily="34" charset="-120"/>
               </a:rPr>
-              <a:t>That last arrow is the entire talk. </a:t>
+              <a:t>The return leg is the product. </a:t>
             </a:r>
             <a:pPr indent="0" marL="0">
               <a:lnSpc>
@@ -4443,7 +4602,7 @@
                 <a:ea typeface="Calibri" pitchFamily="34" charset="-122"/>
                 <a:cs typeface="Calibri" pitchFamily="34" charset="-120"/>
               </a:rPr>
-              <a:t>Handing work out is easy. Knowing whether it actually got done is the part that took me weeks to get right.</a:t>
+              <a:t>Wrapping a CLI in an MCP tool is an afternoon's work. Everything after that exists because the delegate's own report turned out not to be evidence.</a:t>
             </a:r>
             <a:endParaRPr lang="en-US" sz="1500" dirty="0"/>
           </a:p>
@@ -4507,7 +4666,7 @@
                 <a:ea typeface="Arial" pitchFamily="34" charset="-122"/>
                 <a:cs typeface="Arial" pitchFamily="34" charset="-120"/>
               </a:rPr>
-              <a:t>What actually happens when you press go</a:t>
+              <a:t>What one dispatch actually looks like</a:t>
             </a:r>
             <a:endParaRPr lang="en-US" sz="3800" dirty="0"/>
           </a:p>
@@ -4546,7 +4705,7 @@
                 <a:ea typeface="Courier New" pitchFamily="34" charset="-122"/>
                 <a:cs typeface="Courier New" pitchFamily="34" charset="-120"/>
               </a:rPr>
-              <a:t>THE HANDOFF</a:t>
+              <a:t>THE MECHANICS, BRIEFLY</a:t>
             </a:r>
             <a:endParaRPr lang="en-US" sz="1100" dirty="0"/>
           </a:p>
@@ -4560,12 +4719,12 @@
         </p:nvSpPr>
         <p:spPr>
           <a:xfrm>
-            <a:off x="640080" y="1691640"/>
-            <a:ext cx="2508428" cy="3063240"/>
+            <a:off x="640080" y="1645920"/>
+            <a:ext cx="2522144" cy="2423160"/>
           </a:xfrm>
           <a:prstGeom prst="roundRect">
             <a:avLst>
-              <a:gd name="adj" fmla="val 2187"/>
+              <a:gd name="adj" fmla="val 2264"/>
             </a:avLst>
           </a:prstGeom>
           <a:solidFill>
@@ -4587,8 +4746,8 @@
         </p:nvSpPr>
         <p:spPr>
           <a:xfrm>
-            <a:off x="896112" y="1920240"/>
-            <a:ext cx="420624" cy="420624"/>
+            <a:off x="896112" y="1847088"/>
+            <a:ext cx="402336" cy="402336"/>
           </a:xfrm>
           <a:prstGeom prst="ellipse">
             <a:avLst/>
@@ -4607,8 +4766,8 @@
         </p:nvSpPr>
         <p:spPr>
           <a:xfrm>
-            <a:off x="896112" y="1920240"/>
-            <a:ext cx="420624" cy="420624"/>
+            <a:off x="896112" y="1847088"/>
+            <a:ext cx="402336" cy="402336"/>
           </a:xfrm>
           <a:prstGeom prst="rect">
             <a:avLst/>
@@ -4624,7 +4783,7 @@
               <a:buNone/>
             </a:pPr>
             <a:r>
-              <a:rPr lang="en-US" sz="1500" b="1" dirty="0">
+              <a:rPr lang="en-US" sz="1400" b="1" dirty="0">
                 <a:solidFill>
                   <a:srgbClr val="FFFFFF"/>
                 </a:solidFill>
@@ -4634,7 +4793,7 @@
               </a:rPr>
               <a:t>1</a:t>
             </a:r>
-            <a:endParaRPr lang="en-US" sz="1500" dirty="0"/>
+            <a:endParaRPr lang="en-US" sz="1400" dirty="0"/>
           </a:p>
         </p:txBody>
       </p:sp>
@@ -4646,8 +4805,8 @@
         </p:nvSpPr>
         <p:spPr>
           <a:xfrm>
-            <a:off x="896112" y="2487168"/>
-            <a:ext cx="1996364" cy="731520"/>
+            <a:off x="896112" y="2377440"/>
+            <a:ext cx="2010080" cy="566928"/>
           </a:xfrm>
           <a:prstGeom prst="rect">
             <a:avLst/>
@@ -4666,7 +4825,7 @@
               <a:buNone/>
             </a:pPr>
             <a:r>
-              <a:rPr lang="en-US" sz="1650" b="1" dirty="0">
+              <a:rPr lang="en-US" sz="1550" b="1" dirty="0">
                 <a:solidFill>
                   <a:srgbClr val="16191D"/>
                 </a:solidFill>
@@ -4674,9 +4833,9 @@
                 <a:ea typeface="Arial" pitchFamily="34" charset="-122"/>
                 <a:cs typeface="Arial" pitchFamily="34" charset="-120"/>
               </a:rPr>
-              <a:t>You describe the job</a:t>
-            </a:r>
-            <a:endParaRPr lang="en-US" sz="1650" dirty="0"/>
+              <a:t>Write the spec to a file</a:t>
+            </a:r>
+            <a:endParaRPr lang="en-US" sz="1550" dirty="0"/>
           </a:p>
         </p:txBody>
       </p:sp>
@@ -4688,8 +4847,8 @@
         </p:nvSpPr>
         <p:spPr>
           <a:xfrm>
-            <a:off x="896112" y="3291840"/>
-            <a:ext cx="1996364" cy="1325880"/>
+            <a:off x="896112" y="2980944"/>
+            <a:ext cx="2010080" cy="1051560"/>
           </a:xfrm>
           <a:prstGeom prst="rect">
             <a:avLst/>
@@ -4708,7 +4867,7 @@
               <a:buNone/>
             </a:pPr>
             <a:r>
-              <a:rPr lang="en-US" sz="1400" dirty="0">
+              <a:rPr lang="en-US" sz="1350" dirty="0">
                 <a:solidFill>
                   <a:srgbClr val="16191D"/>
                 </a:solidFill>
@@ -4716,9 +4875,9 @@
                 <a:ea typeface="Calibri" pitchFamily="34" charset="-122"/>
                 <a:cs typeface="Calibri" pitchFamily="34" charset="-120"/>
               </a:rPr>
-              <a:t>Not in a chat box — written into a file, so it can be re-read and reviewed. Every decision already made.</a:t>
-            </a:r>
-            <a:endParaRPr lang="en-US" sz="1400" dirty="0"/>
+              <a:t>Not into the prompt argument. Escaping safety, a reviewable artifact, and the delegate can re-read it.</a:t>
+            </a:r>
+            <a:endParaRPr lang="en-US" sz="1350" dirty="0"/>
           </a:p>
         </p:txBody>
       </p:sp>
@@ -4730,12 +4889,12 @@
         </p:nvSpPr>
         <p:spPr>
           <a:xfrm>
-            <a:off x="3441116" y="1691640"/>
-            <a:ext cx="2508428" cy="3063240"/>
+            <a:off x="3436544" y="1645920"/>
+            <a:ext cx="2522144" cy="2423160"/>
           </a:xfrm>
           <a:prstGeom prst="roundRect">
             <a:avLst>
-              <a:gd name="adj" fmla="val 2187"/>
+              <a:gd name="adj" fmla="val 2264"/>
             </a:avLst>
           </a:prstGeom>
           <a:solidFill>
@@ -4757,8 +4916,8 @@
         </p:nvSpPr>
         <p:spPr>
           <a:xfrm>
-            <a:off x="3697148" y="1920240"/>
-            <a:ext cx="420624" cy="420624"/>
+            <a:off x="3692576" y="1847088"/>
+            <a:ext cx="402336" cy="402336"/>
           </a:xfrm>
           <a:prstGeom prst="ellipse">
             <a:avLst/>
@@ -4777,8 +4936,8 @@
         </p:nvSpPr>
         <p:spPr>
           <a:xfrm>
-            <a:off x="3697148" y="1920240"/>
-            <a:ext cx="420624" cy="420624"/>
+            <a:off x="3692576" y="1847088"/>
+            <a:ext cx="402336" cy="402336"/>
           </a:xfrm>
           <a:prstGeom prst="rect">
             <a:avLst/>
@@ -4794,7 +4953,7 @@
               <a:buNone/>
             </a:pPr>
             <a:r>
-              <a:rPr lang="en-US" sz="1500" b="1" dirty="0">
+              <a:rPr lang="en-US" sz="1400" b="1" dirty="0">
                 <a:solidFill>
                   <a:srgbClr val="FFFFFF"/>
                 </a:solidFill>
@@ -4804,7 +4963,7 @@
               </a:rPr>
               <a:t>2</a:t>
             </a:r>
-            <a:endParaRPr lang="en-US" sz="1500" dirty="0"/>
+            <a:endParaRPr lang="en-US" sz="1400" dirty="0"/>
           </a:p>
         </p:txBody>
       </p:sp>
@@ -4816,8 +4975,8 @@
         </p:nvSpPr>
         <p:spPr>
           <a:xfrm>
-            <a:off x="3697148" y="2487168"/>
-            <a:ext cx="1996364" cy="731520"/>
+            <a:off x="3692576" y="2377440"/>
+            <a:ext cx="2010080" cy="566928"/>
           </a:xfrm>
           <a:prstGeom prst="rect">
             <a:avLst/>
@@ -4836,7 +4995,7 @@
               <a:buNone/>
             </a:pPr>
             <a:r>
-              <a:rPr lang="en-US" sz="1650" b="1" dirty="0">
+              <a:rPr lang="en-US" sz="1550" b="1" dirty="0">
                 <a:solidFill>
                   <a:srgbClr val="16191D"/>
                 </a:solidFill>
@@ -4844,9 +5003,9 @@
                 <a:ea typeface="Arial" pitchFamily="34" charset="-122"/>
                 <a:cs typeface="Arial" pitchFamily="34" charset="-120"/>
               </a:rPr>
-              <a:t>It goes quiet</a:t>
-            </a:r>
-            <a:endParaRPr lang="en-US" sz="1650" dirty="0"/>
+              <a:t>Call the tool</a:t>
+            </a:r>
+            <a:endParaRPr lang="en-US" sz="1550" dirty="0"/>
           </a:p>
         </p:txBody>
       </p:sp>
@@ -4858,8 +5017,8 @@
         </p:nvSpPr>
         <p:spPr>
           <a:xfrm>
-            <a:off x="3697148" y="3291840"/>
-            <a:ext cx="1996364" cy="1325880"/>
+            <a:off x="3692576" y="2980944"/>
+            <a:ext cx="2010080" cy="1051560"/>
           </a:xfrm>
           <a:prstGeom prst="rect">
             <a:avLst/>
@@ -4878,7 +5037,7 @@
               <a:buNone/>
             </a:pPr>
             <a:r>
-              <a:rPr lang="en-US" sz="1400" dirty="0">
+              <a:rPr lang="en-US" sz="1350" dirty="0">
                 <a:solidFill>
                   <a:srgbClr val="16191D"/>
                 </a:solidFill>
@@ -4886,9 +5045,9 @@
                 <a:ea typeface="Calibri" pitchFamily="34" charset="-122"/>
                 <a:cs typeface="Calibri" pitchFamily="34" charset="-120"/>
               </a:rPr>
-              <a:t>The helper works alone for up to an hour. No progress bar. Nothing to watch. You cannot interrupt it.</a:t>
-            </a:r>
-            <a:endParaRPr lang="en-US" sz="1400" dirty="0"/>
+              <a:t>It runs unattended for up to an hour, approving its own edits, commands and commits as it goes.</a:t>
+            </a:r>
+            <a:endParaRPr lang="en-US" sz="1350" dirty="0"/>
           </a:p>
         </p:txBody>
       </p:sp>
@@ -4900,12 +5059,12 @@
         </p:nvSpPr>
         <p:spPr>
           <a:xfrm>
-            <a:off x="6242152" y="1691640"/>
-            <a:ext cx="2508428" cy="3063240"/>
+            <a:off x="6233008" y="1645920"/>
+            <a:ext cx="2522144" cy="2423160"/>
           </a:xfrm>
           <a:prstGeom prst="roundRect">
             <a:avLst>
-              <a:gd name="adj" fmla="val 2187"/>
+              <a:gd name="adj" fmla="val 2264"/>
             </a:avLst>
           </a:prstGeom>
           <a:solidFill>
@@ -4927,8 +5086,8 @@
         </p:nvSpPr>
         <p:spPr>
           <a:xfrm>
-            <a:off x="6498184" y="1920240"/>
-            <a:ext cx="420624" cy="420624"/>
+            <a:off x="6489040" y="1847088"/>
+            <a:ext cx="402336" cy="402336"/>
           </a:xfrm>
           <a:prstGeom prst="ellipse">
             <a:avLst/>
@@ -4947,8 +5106,8 @@
         </p:nvSpPr>
         <p:spPr>
           <a:xfrm>
-            <a:off x="6498184" y="1920240"/>
-            <a:ext cx="420624" cy="420624"/>
+            <a:off x="6489040" y="1847088"/>
+            <a:ext cx="402336" cy="402336"/>
           </a:xfrm>
           <a:prstGeom prst="rect">
             <a:avLst/>
@@ -4964,7 +5123,7 @@
               <a:buNone/>
             </a:pPr>
             <a:r>
-              <a:rPr lang="en-US" sz="1500" b="1" dirty="0">
+              <a:rPr lang="en-US" sz="1400" b="1" dirty="0">
                 <a:solidFill>
                   <a:srgbClr val="FFFFFF"/>
                 </a:solidFill>
@@ -4974,7 +5133,7 @@
               </a:rPr>
               <a:t>3</a:t>
             </a:r>
-            <a:endParaRPr lang="en-US" sz="1500" dirty="0"/>
+            <a:endParaRPr lang="en-US" sz="1400" dirty="0"/>
           </a:p>
         </p:txBody>
       </p:sp>
@@ -4986,8 +5145,8 @@
         </p:nvSpPr>
         <p:spPr>
           <a:xfrm>
-            <a:off x="6498184" y="2487168"/>
-            <a:ext cx="1996364" cy="731520"/>
+            <a:off x="6489040" y="2377440"/>
+            <a:ext cx="2010080" cy="566928"/>
           </a:xfrm>
           <a:prstGeom prst="rect">
             <a:avLst/>
@@ -5006,7 +5165,7 @@
               <a:buNone/>
             </a:pPr>
             <a:r>
-              <a:rPr lang="en-US" sz="1650" b="1" dirty="0">
+              <a:rPr lang="en-US" sz="1550" b="1" dirty="0">
                 <a:solidFill>
                   <a:srgbClr val="16191D"/>
                 </a:solidFill>
@@ -5014,9 +5173,9 @@
                 <a:ea typeface="Arial" pitchFamily="34" charset="-122"/>
                 <a:cs typeface="Arial" pitchFamily="34" charset="-120"/>
               </a:rPr>
-              <a:t>It writes as it goes</a:t>
-            </a:r>
-            <a:endParaRPr lang="en-US" sz="1650" dirty="0"/>
+              <a:t>Read the progress log</a:t>
+            </a:r>
+            <a:endParaRPr lang="en-US" sz="1550" dirty="0"/>
           </a:p>
         </p:txBody>
       </p:sp>
@@ -5028,8 +5187,8 @@
         </p:nvSpPr>
         <p:spPr>
           <a:xfrm>
-            <a:off x="6498184" y="3291840"/>
-            <a:ext cx="1996364" cy="1325880"/>
+            <a:off x="6489040" y="2980944"/>
+            <a:ext cx="2010080" cy="1051560"/>
           </a:xfrm>
           <a:prstGeom prst="rect">
             <a:avLst/>
@@ -5048,7 +5207,7 @@
               <a:buNone/>
             </a:pPr>
             <a:r>
-              <a:rPr lang="en-US" sz="1400" dirty="0">
+              <a:rPr lang="en-US" sz="1350" dirty="0">
                 <a:solidFill>
                   <a:srgbClr val="16191D"/>
                 </a:solidFill>
@@ -5056,9 +5215,9 @@
                 <a:ea typeface="Calibri" pitchFamily="34" charset="-122"/>
                 <a:cs typeface="Calibri" pitchFamily="34" charset="-120"/>
               </a:rPr>
-              <a:t>So we make it keep a running log on disk. That is the only way to see inside a job in progress.</a:t>
-            </a:r>
-            <a:endParaRPr lang="en-US" sz="1400" dirty="0"/>
+              <a:t>The only way to see inside a blocking call. The spec requires a line per phase, gate result included.</a:t>
+            </a:r>
+            <a:endParaRPr lang="en-US" sz="1350" dirty="0"/>
           </a:p>
         </p:txBody>
       </p:sp>
@@ -5070,12 +5229,12 @@
         </p:nvSpPr>
         <p:spPr>
           <a:xfrm>
-            <a:off x="9043187" y="1691640"/>
-            <a:ext cx="2508428" cy="3063240"/>
+            <a:off x="9029471" y="1645920"/>
+            <a:ext cx="2522144" cy="2423160"/>
           </a:xfrm>
           <a:prstGeom prst="roundRect">
             <a:avLst>
-              <a:gd name="adj" fmla="val 2187"/>
+              <a:gd name="adj" fmla="val 2264"/>
             </a:avLst>
           </a:prstGeom>
           <a:solidFill>
@@ -5097,8 +5256,8 @@
         </p:nvSpPr>
         <p:spPr>
           <a:xfrm>
-            <a:off x="9299219" y="1920240"/>
-            <a:ext cx="420624" cy="420624"/>
+            <a:off x="9285503" y="1847088"/>
+            <a:ext cx="402336" cy="402336"/>
           </a:xfrm>
           <a:prstGeom prst="ellipse">
             <a:avLst/>
@@ -5117,8 +5276,8 @@
         </p:nvSpPr>
         <p:spPr>
           <a:xfrm>
-            <a:off x="9299219" y="1920240"/>
-            <a:ext cx="420624" cy="420624"/>
+            <a:off x="9285503" y="1847088"/>
+            <a:ext cx="402336" cy="402336"/>
           </a:xfrm>
           <a:prstGeom prst="rect">
             <a:avLst/>
@@ -5134,7 +5293,7 @@
               <a:buNone/>
             </a:pPr>
             <a:r>
-              <a:rPr lang="en-US" sz="1500" b="1" dirty="0">
+              <a:rPr lang="en-US" sz="1400" b="1" dirty="0">
                 <a:solidFill>
                   <a:srgbClr val="FFFFFF"/>
                 </a:solidFill>
@@ -5144,7 +5303,7 @@
               </a:rPr>
               <a:t>4</a:t>
             </a:r>
-            <a:endParaRPr lang="en-US" sz="1500" dirty="0"/>
+            <a:endParaRPr lang="en-US" sz="1400" dirty="0"/>
           </a:p>
         </p:txBody>
       </p:sp>
@@ -5156,8 +5315,8 @@
         </p:nvSpPr>
         <p:spPr>
           <a:xfrm>
-            <a:off x="9299219" y="2487168"/>
-            <a:ext cx="1996364" cy="731520"/>
+            <a:off x="9285503" y="2377440"/>
+            <a:ext cx="2010080" cy="566928"/>
           </a:xfrm>
           <a:prstGeom prst="rect">
             <a:avLst/>
@@ -5176,7 +5335,7 @@
               <a:buNone/>
             </a:pPr>
             <a:r>
-              <a:rPr lang="en-US" sz="1650" b="1" dirty="0">
+              <a:rPr lang="en-US" sz="1550" b="1" dirty="0">
                 <a:solidFill>
                   <a:srgbClr val="16191D"/>
                 </a:solidFill>
@@ -5184,9 +5343,9 @@
                 <a:ea typeface="Arial" pitchFamily="34" charset="-122"/>
                 <a:cs typeface="Arial" pitchFamily="34" charset="-120"/>
               </a:rPr>
-              <a:t>You check the result</a:t>
-            </a:r>
-            <a:endParaRPr lang="en-US" sz="1650" dirty="0"/>
+              <a:t>Verify it yourself</a:t>
+            </a:r>
+            <a:endParaRPr lang="en-US" sz="1550" dirty="0"/>
           </a:p>
         </p:txBody>
       </p:sp>
@@ -5198,8 +5357,8 @@
         </p:nvSpPr>
         <p:spPr>
           <a:xfrm>
-            <a:off x="9299219" y="3291840"/>
-            <a:ext cx="1996364" cy="1325880"/>
+            <a:off x="9285503" y="2980944"/>
+            <a:ext cx="2010080" cy="1051560"/>
           </a:xfrm>
           <a:prstGeom prst="rect">
             <a:avLst/>
@@ -5218,7 +5377,7 @@
               <a:buNone/>
             </a:pPr>
             <a:r>
-              <a:rPr lang="en-US" sz="1400" dirty="0">
+              <a:rPr lang="en-US" sz="1350" dirty="0">
                 <a:solidFill>
                   <a:srgbClr val="16191D"/>
                 </a:solidFill>
@@ -5226,9 +5385,9 @@
                 <a:ea typeface="Calibri" pitchFamily="34" charset="-122"/>
                 <a:cs typeface="Calibri" pitchFamily="34" charset="-120"/>
               </a:rPr>
-              <a:t>Not by reading its summary. By looking at what changed and re-running the tests yourself.</a:t>
-            </a:r>
-            <a:endParaRPr lang="en-US" sz="1400" dirty="0"/>
+              <a:t>Diff, test gate, and a check that the test files the spec named actually exist.</a:t>
+            </a:r>
+            <a:endParaRPr lang="en-US" sz="1350" dirty="0"/>
           </a:p>
         </p:txBody>
       </p:sp>
@@ -5240,12 +5399,160 @@
         </p:nvSpPr>
         <p:spPr>
           <a:xfrm>
-            <a:off x="640080" y="5029200"/>
-            <a:ext cx="10911535" cy="868680"/>
+            <a:off x="640080" y="4206240"/>
+            <a:ext cx="6400800" cy="1280160"/>
           </a:xfrm>
           <a:prstGeom prst="roundRect">
             <a:avLst>
-              <a:gd name="adj" fmla="val 6316"/>
+              <a:gd name="adj" fmla="val 4286"/>
+            </a:avLst>
+          </a:prstGeom>
+          <a:solidFill>
+            <a:srgbClr val="22272E"/>
+          </a:solidFill>
+          <a:ln w="12700">
+            <a:solidFill>
+              <a:srgbClr val="3A4149"/>
+            </a:solidFill>
+            <a:prstDash val="solid"/>
+          </a:ln>
+        </p:spPr>
+      </p:sp>
+      <p:sp>
+        <p:nvSpPr>
+          <p:cNvPr id="25" name="Text 23"/>
+          <p:cNvSpPr txBox="1"/>
+          <p:nvPr/>
+        </p:nvSpPr>
+        <p:spPr>
+          <a:xfrm>
+            <a:off x="896112" y="4206240"/>
+            <a:ext cx="5897880" cy="1280160"/>
+          </a:xfrm>
+          <a:prstGeom prst="rect">
+            <a:avLst/>
+          </a:prstGeom>
+          <a:noFill/>
+          <a:ln/>
+        </p:spPr>
+        <p:txBody>
+          <a:bodyPr wrap="square" lIns="0" tIns="0" rIns="0" bIns="0" rtlCol="0" anchor="ctr"/>
+          <a:lstStyle/>
+          <a:p>
+            <a:pPr indent="0" marL="0">
+              <a:lnSpc>
+                <a:spcPct val="130000"/>
+              </a:lnSpc>
+              <a:buNone/>
+            </a:pPr>
+            <a:r>
+              <a:rPr lang="en-US" sz="1050" dirty="0">
+                <a:solidFill>
+                  <a:srgbClr val="9BE8CF"/>
+                </a:solidFill>
+                <a:latin typeface="Courier New" pitchFamily="34" charset="0"/>
+                <a:ea typeface="Courier New" pitchFamily="34" charset="-122"/>
+                <a:cs typeface="Courier New" pitchFamily="34" charset="-120"/>
+              </a:rPr>
+              <a:t>Phase 0: persisted move-session state; gate passed (54 suites / 694 tests).</a:t>
+            </a:r>
+            <a:endParaRPr lang="en-US" sz="1050" dirty="0"/>
+          </a:p>
+          <a:p>
+            <a:pPr indent="0" marL="0">
+              <a:lnSpc>
+                <a:spcPct val="130000"/>
+              </a:lnSpc>
+              <a:buNone/>
+            </a:pPr>
+            <a:r>
+              <a:rPr lang="en-US" sz="1050" dirty="0">
+                <a:solidFill>
+                  <a:srgbClr val="9BE8CF"/>
+                </a:solidFill>
+                <a:latin typeface="Courier New" pitchFamily="34" charset="0"/>
+                <a:ea typeface="Courier New" pitchFamily="34" charset="-122"/>
+                <a:cs typeface="Courier New" pitchFamily="34" charset="-120"/>
+              </a:rPr>
+              <a:t>Phase 1: read-only manifest hook; gate passed (56 suites / 699 tests).</a:t>
+            </a:r>
+            <a:endParaRPr lang="en-US" sz="1050" dirty="0"/>
+          </a:p>
+          <a:p>
+            <a:pPr indent="0" marL="0">
+              <a:lnSpc>
+                <a:spcPct val="130000"/>
+              </a:lnSpc>
+              <a:buNone/>
+            </a:pPr>
+            <a:r>
+              <a:rPr lang="en-US" sz="1050" dirty="0">
+                <a:solidFill>
+                  <a:srgbClr val="9BE8CF"/>
+                </a:solidFill>
+                <a:latin typeface="Courier New" pitchFamily="34" charset="0"/>
+                <a:ea typeface="Courier New" pitchFamily="34" charset="-122"/>
+                <a:cs typeface="Courier New" pitchFamily="34" charset="-120"/>
+              </a:rPr>
+              <a:t>Final summary: 57 suites, 708 tests passed.</a:t>
+            </a:r>
+            <a:endParaRPr lang="en-US" sz="1050" dirty="0"/>
+          </a:p>
+        </p:txBody>
+      </p:sp>
+      <p:sp>
+        <p:nvSpPr>
+          <p:cNvPr id="26" name="Text 24"/>
+          <p:cNvSpPr txBox="1"/>
+          <p:nvPr/>
+        </p:nvSpPr>
+        <p:spPr>
+          <a:xfrm>
+            <a:off x="640080" y="5559552"/>
+            <a:ext cx="6400800" cy="274320"/>
+          </a:xfrm>
+          <a:prstGeom prst="rect">
+            <a:avLst/>
+          </a:prstGeom>
+          <a:noFill/>
+          <a:ln/>
+        </p:spPr>
+        <p:txBody>
+          <a:bodyPr wrap="square" lIns="0" tIns="0" rIns="0" bIns="0" rtlCol="0" anchor="ctr"/>
+          <a:lstStyle/>
+          <a:p>
+            <a:pPr indent="0" marL="0">
+              <a:buNone/>
+            </a:pPr>
+            <a:r>
+              <a:rPr lang="en-US" sz="1250" i="1" dirty="0">
+                <a:solidFill>
+                  <a:srgbClr val="6B7280"/>
+                </a:solidFill>
+                <a:latin typeface="Calibri" pitchFamily="34" charset="0"/>
+                <a:ea typeface="Calibri" pitchFamily="34" charset="-122"/>
+                <a:cs typeface="Calibri" pitchFamily="34" charset="-120"/>
+              </a:rPr>
+              <a:t>a real progress log, read while the call was still blocking</a:t>
+            </a:r>
+            <a:endParaRPr lang="en-US" sz="1250" dirty="0"/>
+          </a:p>
+        </p:txBody>
+      </p:sp>
+      <p:sp>
+        <p:nvSpPr>
+          <p:cNvPr id="27" name="Shape 25"/>
+          <p:cNvSpPr/>
+          <p:nvPr/>
+        </p:nvSpPr>
+        <p:spPr>
+          <a:xfrm>
+            <a:off x="7406640" y="4206240"/>
+            <a:ext cx="4144975" cy="1280160"/>
+          </a:xfrm>
+          <a:prstGeom prst="roundRect">
+            <a:avLst>
+              <a:gd name="adj" fmla="val 4286"/>
             </a:avLst>
           </a:prstGeom>
           <a:solidFill>
@@ -5261,14 +5568,14 @@
       </p:sp>
       <p:sp>
         <p:nvSpPr>
-          <p:cNvPr id="25" name="Text 23"/>
-          <p:cNvSpPr txBox="1"/>
-          <p:nvPr/>
-        </p:nvSpPr>
-        <p:spPr>
-          <a:xfrm>
-            <a:off x="932688" y="5029200"/>
-            <a:ext cx="10326319" cy="868680"/>
+          <p:cNvPr id="28" name="Text 26"/>
+          <p:cNvSpPr txBox="1"/>
+          <p:nvPr/>
+        </p:nvSpPr>
+        <p:spPr>
+          <a:xfrm>
+            <a:off x="7680960" y="4206240"/>
+            <a:ext cx="3596335" cy="1280160"/>
           </a:xfrm>
           <a:prstGeom prst="rect">
             <a:avLst/>
@@ -5287,7 +5594,7 @@
               <a:buNone/>
             </a:pPr>
             <a:r>
-              <a:rPr lang="en-US" sz="1500" b="1" dirty="0">
+              <a:rPr lang="en-US" sz="1400" b="1" dirty="0">
                 <a:solidFill>
                   <a:srgbClr val="C1690C"/>
                 </a:solidFill>
@@ -5295,7 +5602,7 @@
                 <a:ea typeface="Calibri" pitchFamily="34" charset="-122"/>
                 <a:cs typeface="Calibri" pitchFamily="34" charset="-120"/>
               </a:rPr>
-              <a:t>Step 2 is the uncomfortable one. </a:t>
+              <a:t>Step 2 is the whole risk surface. </a:t>
             </a:r>
             <a:pPr indent="0" marL="0">
               <a:lnSpc>
@@ -5304,7 +5611,7 @@
               <a:buNone/>
             </a:pPr>
             <a:r>
-              <a:rPr lang="en-US" sz="1500" dirty="0">
+              <a:rPr lang="en-US" sz="1400" dirty="0">
                 <a:solidFill>
                   <a:srgbClr val="16191D"/>
                 </a:solidFill>
@@ -5312,9 +5619,9 @@
                 <a:ea typeface="Calibri" pitchFamily="34" charset="-122"/>
                 <a:cs typeface="Calibri" pitchFamily="34" charset="-120"/>
               </a:rPr>
-              <a:t>For an hour, a program you cannot see is editing your project and approving its own changes. Calling the tool is the moment you agree to that.</a:t>
-            </a:r>
-            <a:endParaRPr lang="en-US" sz="1500" dirty="0"/>
+              <a:t>There is no confirmation prompt mid-run. Calling the tool is the confirmation.</a:t>
+            </a:r>
+            <a:endParaRPr lang="en-US" sz="1400" dirty="0"/>
           </a:p>
         </p:txBody>
       </p:sp>
@@ -5376,7 +5683,7 @@
                 <a:ea typeface="Arial" pitchFamily="34" charset="-122"/>
                 <a:cs typeface="Arial" pitchFamily="34" charset="-120"/>
               </a:rPr>
-              <a:t>It will tell you it worked. Believe nothing.</a:t>
+              <a:t>The return value is not evidence</a:t>
             </a:r>
             <a:endParaRPr lang="en-US" sz="3800" dirty="0"/>
           </a:p>
@@ -5415,7 +5722,7 @@
                 <a:ea typeface="Courier New" pitchFamily="34" charset="-122"/>
                 <a:cs typeface="Courier New" pitchFamily="34" charset="-120"/>
               </a:rPr>
-              <a:t>THE EXPENSIVE LESSON</a:t>
+              <a:t>LESSON 1 — THIS COST THE MOST</a:t>
             </a:r>
             <a:endParaRPr lang="en-US" sz="1100" dirty="0"/>
           </a:p>
@@ -5429,12 +5736,12 @@
         </p:nvSpPr>
         <p:spPr>
           <a:xfrm>
-            <a:off x="640080" y="1691640"/>
-            <a:ext cx="3393338" cy="3017520"/>
+            <a:off x="640080" y="1645920"/>
+            <a:ext cx="3393338" cy="2880360"/>
           </a:xfrm>
           <a:prstGeom prst="roundRect">
             <a:avLst>
-              <a:gd name="adj" fmla="val 1818"/>
+              <a:gd name="adj" fmla="val 1905"/>
             </a:avLst>
           </a:prstGeom>
           <a:solidFill>
@@ -5456,7 +5763,7 @@
         </p:nvSpPr>
         <p:spPr>
           <a:xfrm>
-            <a:off x="914400" y="1874520"/>
+            <a:off x="914400" y="1828800"/>
             <a:ext cx="2844698" cy="274320"/>
           </a:xfrm>
           <a:prstGeom prst="rect">
@@ -5481,7 +5788,7 @@
                 <a:ea typeface="Courier New" pitchFamily="34" charset="-122"/>
                 <a:cs typeface="Courier New" pitchFamily="34" charset="-120"/>
               </a:rPr>
-              <a:t>IT SAID IT WORKED</a:t>
+              <a:t>FALSE SUCCESS</a:t>
             </a:r>
             <a:endParaRPr lang="en-US" sz="1050" dirty="0"/>
           </a:p>
@@ -5495,8 +5802,8 @@
         </p:nvSpPr>
         <p:spPr>
           <a:xfrm>
-            <a:off x="914400" y="2212848"/>
-            <a:ext cx="2844698" cy="685800"/>
+            <a:off x="914400" y="2157984"/>
+            <a:ext cx="2844698" cy="621792"/>
           </a:xfrm>
           <a:prstGeom prst="rect">
             <a:avLst/>
@@ -5515,7 +5822,7 @@
               <a:buNone/>
             </a:pPr>
             <a:r>
-              <a:rPr lang="en-US" sz="1800" b="1" dirty="0">
+              <a:rPr lang="en-US" sz="1700" b="1" dirty="0">
                 <a:solidFill>
                   <a:srgbClr val="16191D"/>
                 </a:solidFill>
@@ -5523,9 +5830,9 @@
                 <a:ea typeface="Arial" pitchFamily="34" charset="-122"/>
                 <a:cs typeface="Arial" pitchFamily="34" charset="-120"/>
               </a:rPr>
-              <a:t>Nothing had happened.</a:t>
-            </a:r>
-            <a:endParaRPr lang="en-US" sz="1800" dirty="0"/>
+              <a:t>Clean report, nothing landed.</a:t>
+            </a:r>
+            <a:endParaRPr lang="en-US" sz="1700" dirty="0"/>
           </a:p>
         </p:txBody>
       </p:sp>
@@ -5537,8 +5844,8 @@
         </p:nvSpPr>
         <p:spPr>
           <a:xfrm>
-            <a:off x="914400" y="2971800"/>
-            <a:ext cx="2844698" cy="1600200"/>
+            <a:off x="914400" y="2852928"/>
+            <a:ext cx="2844698" cy="1554480"/>
           </a:xfrm>
           <a:prstGeom prst="rect">
             <a:avLst/>
@@ -5557,7 +5864,7 @@
               <a:buNone/>
             </a:pPr>
             <a:r>
-              <a:rPr lang="en-US" sz="1400" dirty="0">
+              <a:rPr lang="en-US" sz="1350" dirty="0">
                 <a:solidFill>
                   <a:srgbClr val="16191D"/>
                 </a:solidFill>
@@ -5565,9 +5872,9 @@
                 <a:ea typeface="Calibri" pitchFamily="34" charset="-122"/>
                 <a:cs typeface="Calibri" pitchFamily="34" charset="-120"/>
               </a:rPr>
-              <a:t>A clean, cheerful report. The files had been written to a scratch folder nobody looks at. The report was honest — it really had written them. Just not where I lived.</a:t>
-            </a:r>
-            <a:endParaRPr lang="en-US" sz="1400" dirty="0"/>
+              <a:t>It had written the files — into its own scratch directory, because its notion of the project was not the working directory I passed it. It reported success, honestly.</a:t>
+            </a:r>
+            <a:endParaRPr lang="en-US" sz="1350" dirty="0"/>
           </a:p>
         </p:txBody>
       </p:sp>
@@ -5579,12 +5886,12 @@
         </p:nvSpPr>
         <p:spPr>
           <a:xfrm>
-            <a:off x="4399178" y="1691640"/>
-            <a:ext cx="3393338" cy="3017520"/>
+            <a:off x="4399178" y="1645920"/>
+            <a:ext cx="3393338" cy="2880360"/>
           </a:xfrm>
           <a:prstGeom prst="roundRect">
             <a:avLst>
-              <a:gd name="adj" fmla="val 1818"/>
+              <a:gd name="adj" fmla="val 1905"/>
             </a:avLst>
           </a:prstGeom>
           <a:solidFill>
@@ -5606,7 +5913,7 @@
         </p:nvSpPr>
         <p:spPr>
           <a:xfrm>
-            <a:off x="4673498" y="1874520"/>
+            <a:off x="4673498" y="1828800"/>
             <a:ext cx="2844698" cy="274320"/>
           </a:xfrm>
           <a:prstGeom prst="rect">
@@ -5631,7 +5938,7 @@
                 <a:ea typeface="Courier New" pitchFamily="34" charset="-122"/>
                 <a:cs typeface="Courier New" pitchFamily="34" charset="-120"/>
               </a:rPr>
-              <a:t>IT SAID IT FAILED</a:t>
+              <a:t>FALSE FAILURE</a:t>
             </a:r>
             <a:endParaRPr lang="en-US" sz="1050" dirty="0"/>
           </a:p>
@@ -5645,8 +5952,8 @@
         </p:nvSpPr>
         <p:spPr>
           <a:xfrm>
-            <a:off x="4673498" y="2212848"/>
-            <a:ext cx="2844698" cy="685800"/>
+            <a:off x="4673498" y="2157984"/>
+            <a:ext cx="2844698" cy="621792"/>
           </a:xfrm>
           <a:prstGeom prst="rect">
             <a:avLst/>
@@ -5665,7 +5972,7 @@
               <a:buNone/>
             </a:pPr>
             <a:r>
-              <a:rPr lang="en-US" sz="1800" b="1" dirty="0">
+              <a:rPr lang="en-US" sz="1700" b="1" dirty="0">
                 <a:solidFill>
                   <a:srgbClr val="16191D"/>
                 </a:solidFill>
@@ -5673,9 +5980,9 @@
                 <a:ea typeface="Arial" pitchFamily="34" charset="-122"/>
                 <a:cs typeface="Arial" pitchFamily="34" charset="-120"/>
               </a:rPr>
-              <a:t>The work was already done.</a:t>
-            </a:r>
-            <a:endParaRPr lang="en-US" sz="1800" dirty="0"/>
+              <a:t>“timeout waiting for response”</a:t>
+            </a:r>
+            <a:endParaRPr lang="en-US" sz="1700" dirty="0"/>
           </a:p>
         </p:txBody>
       </p:sp>
@@ -5687,8 +5994,8 @@
         </p:nvSpPr>
         <p:spPr>
           <a:xfrm>
-            <a:off x="4673498" y="2971800"/>
-            <a:ext cx="2844698" cy="1600200"/>
+            <a:off x="4673498" y="2852928"/>
+            <a:ext cx="2844698" cy="1554480"/>
           </a:xfrm>
           <a:prstGeom prst="rect">
             <a:avLst/>
@@ -5707,7 +6014,7 @@
               <a:buNone/>
             </a:pPr>
             <a:r>
-              <a:rPr lang="en-US" sz="1400" dirty="0">
+              <a:rPr lang="en-US" sz="1350" dirty="0">
                 <a:solidFill>
                   <a:srgbClr val="16191D"/>
                 </a:solidFill>
@@ -5715,9 +6022,9 @@
                 <a:ea typeface="Calibri" pitchFamily="34" charset="-122"/>
                 <a:cs typeface="Calibri" pitchFamily="34" charset="-120"/>
               </a:rPr>
-              <a:t>An error message and “it didn't implement anything.” In fact seven real, correct changes were sitting there, tests passing. It had finished, then run out of patience waiting to tell me.</a:t>
-            </a:r>
-            <a:endParaRPr lang="en-US" sz="1400" dirty="0"/>
+              <a:t>Seven real commits with correct diffs and a passing gate were already on the branch. The CLI's internal print timeout had fired after the work finished.</a:t>
+            </a:r>
+            <a:endParaRPr lang="en-US" sz="1350" dirty="0"/>
           </a:p>
         </p:txBody>
       </p:sp>
@@ -5729,12 +6036,12 @@
         </p:nvSpPr>
         <p:spPr>
           <a:xfrm>
-            <a:off x="8158277" y="1691640"/>
-            <a:ext cx="3393338" cy="3017520"/>
+            <a:off x="8158277" y="1645920"/>
+            <a:ext cx="3393338" cy="2880360"/>
           </a:xfrm>
           <a:prstGeom prst="roundRect">
             <a:avLst>
-              <a:gd name="adj" fmla="val 1818"/>
+              <a:gd name="adj" fmla="val 1905"/>
             </a:avLst>
           </a:prstGeom>
           <a:solidFill>
@@ -5756,7 +6063,7 @@
         </p:nvSpPr>
         <p:spPr>
           <a:xfrm>
-            <a:off x="8432597" y="1874520"/>
+            <a:off x="8432597" y="1828800"/>
             <a:ext cx="2844698" cy="274320"/>
           </a:xfrm>
           <a:prstGeom prst="rect">
@@ -5781,7 +6088,7 @@
                 <a:ea typeface="Courier New" pitchFamily="34" charset="-122"/>
                 <a:cs typeface="Courier New" pitchFamily="34" charset="-120"/>
               </a:rPr>
-              <a:t>IT SAID NOTHING</a:t>
+              <a:t>NO RETURN AT ALL</a:t>
             </a:r>
             <a:endParaRPr lang="en-US" sz="1050" dirty="0"/>
           </a:p>
@@ -5795,8 +6102,8 @@
         </p:nvSpPr>
         <p:spPr>
           <a:xfrm>
-            <a:off x="8432597" y="2212848"/>
-            <a:ext cx="2844698" cy="685800"/>
+            <a:off x="8432597" y="2157984"/>
+            <a:ext cx="2844698" cy="621792"/>
           </a:xfrm>
           <a:prstGeom prst="rect">
             <a:avLst/>
@@ -5815,7 +6122,7 @@
               <a:buNone/>
             </a:pPr>
             <a:r>
-              <a:rPr lang="en-US" sz="1800" b="1" dirty="0">
+              <a:rPr lang="en-US" sz="1700" b="1" dirty="0">
                 <a:solidFill>
                   <a:srgbClr val="16191D"/>
                 </a:solidFill>
@@ -5823,9 +6130,9 @@
                 <a:ea typeface="Arial" pitchFamily="34" charset="-122"/>
                 <a:cs typeface="Arial" pitchFamily="34" charset="-120"/>
               </a:rPr>
-              <a:t>And it was still going.</a:t>
-            </a:r>
-            <a:endParaRPr lang="en-US" sz="1800" dirty="0"/>
+              <a:t>Connection closed.</a:t>
+            </a:r>
+            <a:endParaRPr lang="en-US" sz="1700" dirty="0"/>
           </a:p>
         </p:txBody>
       </p:sp>
@@ -5837,8 +6144,8 @@
         </p:nvSpPr>
         <p:spPr>
           <a:xfrm>
-            <a:off x="8432597" y="2971800"/>
-            <a:ext cx="2844698" cy="1600200"/>
+            <a:off x="8432597" y="2852928"/>
+            <a:ext cx="2844698" cy="1554480"/>
           </a:xfrm>
           <a:prstGeom prst="rect">
             <a:avLst/>
@@ -5857,7 +6164,7 @@
               <a:buNone/>
             </a:pPr>
             <a:r>
-              <a:rPr lang="en-US" sz="1400" dirty="0">
+              <a:rPr lang="en-US" sz="1350" dirty="0">
                 <a:solidFill>
                   <a:srgbClr val="16191D"/>
                 </a:solidFill>
@@ -5865,9 +6172,9 @@
                 <a:ea typeface="Calibri" pitchFamily="34" charset="-122"/>
                 <a:cs typeface="Calibri" pitchFamily="34" charset="-120"/>
               </a:rPr>
-              <a:t>The connection dropped. That looks identical whether the helper died or is still happily working. It was still working. Starting it again would have doubled the mess.</a:t>
-            </a:r>
-            <a:endParaRPr lang="en-US" sz="1400" dirty="0"/>
+              <a:t>Indistinguishable from a crash — and in none of those cases does the delegate stop. It keeps running, orphaned. Re-dispatching doubles the load that may have caused it.</a:t>
+            </a:r>
+            <a:endParaRPr lang="en-US" sz="1350" dirty="0"/>
           </a:p>
         </p:txBody>
       </p:sp>
@@ -5879,7 +6186,7 @@
         </p:nvSpPr>
         <p:spPr>
           <a:xfrm>
-            <a:off x="640080" y="5029200"/>
+            <a:off x="640080" y="4800600"/>
             <a:ext cx="10911535" cy="777240"/>
           </a:xfrm>
           <a:prstGeom prst="roundRect">
@@ -5906,7 +6213,7 @@
         </p:nvSpPr>
         <p:spPr>
           <a:xfrm>
-            <a:off x="932688" y="5029200"/>
+            <a:off x="932688" y="4800600"/>
             <a:ext cx="10326319" cy="777240"/>
           </a:xfrm>
           <a:prstGeom prst="rect">
@@ -5926,15 +6233,15 @@
               <a:buNone/>
             </a:pPr>
             <a:r>
-              <a:rPr lang="en-US" sz="1500" dirty="0">
-                <a:solidFill>
-                  <a:srgbClr val="16191D"/>
+              <a:rPr lang="en-US" sz="1500" b="1" dirty="0">
+                <a:solidFill>
+                  <a:srgbClr val="C1690C"/>
                 </a:solidFill>
                 <a:latin typeface="Calibri" pitchFamily="34" charset="0"/>
                 <a:ea typeface="Calibri" pitchFamily="34" charset="-122"/>
                 <a:cs typeface="Calibri" pitchFamily="34" charset="-120"/>
               </a:rPr>
-              <a:t>The rule that came out of it: </a:t>
+              <a:t>Standing practice: </a:t>
             </a:r>
             <a:pPr indent="0" marL="0">
               <a:lnSpc>
@@ -5943,17 +6250,56 @@
               <a:buNone/>
             </a:pPr>
             <a:r>
-              <a:rPr lang="en-US" sz="1500" b="1" dirty="0">
-                <a:solidFill>
-                  <a:srgbClr val="C1690C"/>
+              <a:rPr lang="en-US" sz="1500" dirty="0">
+                <a:solidFill>
+                  <a:srgbClr val="16191D"/>
                 </a:solidFill>
                 <a:latin typeface="Calibri" pitchFamily="34" charset="0"/>
                 <a:ea typeface="Calibri" pitchFamily="34" charset="-122"/>
                 <a:cs typeface="Calibri" pitchFamily="34" charset="-120"/>
               </a:rPr>
-              <a:t>the report is a rumour. Go look at the work.</a:t>
+              <a:t>after every dispatch, check git log and git status and re-run the gate yourself — whatever the call returned. Success and failure have both lied.</a:t>
             </a:r>
             <a:endParaRPr lang="en-US" sz="1500" dirty="0"/>
+          </a:p>
+        </p:txBody>
+      </p:sp>
+      <p:sp>
+        <p:nvSpPr>
+          <p:cNvPr id="18" name="Text 16"/>
+          <p:cNvSpPr txBox="1"/>
+          <p:nvPr/>
+        </p:nvSpPr>
+        <p:spPr>
+          <a:xfrm>
+            <a:off x="640080" y="6144768"/>
+            <a:ext cx="10911535" cy="411480"/>
+          </a:xfrm>
+          <a:prstGeom prst="rect">
+            <a:avLst/>
+          </a:prstGeom>
+          <a:noFill/>
+          <a:ln/>
+        </p:spPr>
+        <p:txBody>
+          <a:bodyPr wrap="square" lIns="0" tIns="0" rIns="0" bIns="0" rtlCol="0" anchor="ctr"/>
+          <a:lstStyle/>
+          <a:p>
+            <a:pPr algn="l" indent="0" marL="0">
+              <a:buNone/>
+            </a:pPr>
+            <a:r>
+              <a:rPr lang="en-US" sz="1300" i="1" dirty="0">
+                <a:solidFill>
+                  <a:srgbClr val="6B7280"/>
+                </a:solidFill>
+                <a:latin typeface="Calibri" pitchFamily="34" charset="0"/>
+                <a:ea typeface="Calibri" pitchFamily="34" charset="-122"/>
+                <a:cs typeface="Calibri" pitchFamily="34" charset="-120"/>
+              </a:rPr>
+              <a:t>The tools now return partial output plus a warning on a non-zero exit rather than swallowing it, specifically because of the middle case.</a:t>
+            </a:r>
+            <a:endParaRPr lang="en-US" sz="1300" dirty="0"/>
           </a:p>
         </p:txBody>
       </p:sp>
@@ -6015,7 +6361,7 @@
                 <a:ea typeface="Arial" pitchFamily="34" charset="-122"/>
                 <a:cs typeface="Arial" pitchFamily="34" charset="-120"/>
               </a:rPr>
-              <a:t>“All 635 tests passed”</a:t>
+              <a:t>“Gate passed, 635 tests”</a:t>
             </a:r>
             <a:endParaRPr lang="en-US" sz="3800" dirty="0"/>
           </a:p>
@@ -6054,7 +6400,7 @@
                 <a:ea typeface="Courier New" pitchFamily="34" charset="-122"/>
                 <a:cs typeface="Courier New" pitchFamily="34" charset="-120"/>
               </a:rPr>
-              <a:t>THE MOST EXPENSIVE HABIT TO BREAK</a:t>
+              <a:t>LESSON 2 — THE MOST EXPENSIVE RECURRING BUG CLASS</a:t>
             </a:r>
             <a:endParaRPr lang="en-US" sz="1100" dirty="0"/>
           </a:p>
@@ -6068,12 +6414,12 @@
         </p:nvSpPr>
         <p:spPr>
           <a:xfrm>
-            <a:off x="640080" y="1691640"/>
-            <a:ext cx="5577840" cy="1874520"/>
+            <a:off x="640080" y="1645920"/>
+            <a:ext cx="5577840" cy="1645920"/>
           </a:xfrm>
           <a:prstGeom prst="roundRect">
             <a:avLst>
-              <a:gd name="adj" fmla="val 2927"/>
+              <a:gd name="adj" fmla="val 3333"/>
             </a:avLst>
           </a:prstGeom>
           <a:solidFill>
@@ -6095,8 +6441,8 @@
         </p:nvSpPr>
         <p:spPr>
           <a:xfrm>
-            <a:off x="914400" y="1874520"/>
-            <a:ext cx="5029200" cy="320040"/>
+            <a:off x="932688" y="1828800"/>
+            <a:ext cx="5029200" cy="292608"/>
           </a:xfrm>
           <a:prstGeom prst="rect">
             <a:avLst/>
@@ -6120,7 +6466,7 @@
                 <a:ea typeface="Arial" pitchFamily="34" charset="-122"/>
                 <a:cs typeface="Arial" pitchFamily="34" charset="-120"/>
               </a:rPr>
-              <a:t>What that sentence proves</a:t>
+              <a:t>What that proves</a:t>
             </a:r>
             <a:endParaRPr lang="en-US" sz="1700" dirty="0"/>
           </a:p>
@@ -6134,8 +6480,8 @@
         </p:nvSpPr>
         <p:spPr>
           <a:xfrm>
-            <a:off x="914400" y="2240280"/>
-            <a:ext cx="5029200" cy="1234440"/>
+            <a:off x="932688" y="2212848"/>
+            <a:ext cx="5029200" cy="1005840"/>
           </a:xfrm>
           <a:prstGeom prst="rect">
             <a:avLst/>
@@ -6149,7 +6495,7 @@
           <a:p>
             <a:pPr indent="0" marL="0">
               <a:lnSpc>
-                <a:spcPct val="120000"/>
+                <a:spcPct val="122000"/>
               </a:lnSpc>
               <a:buNone/>
             </a:pPr>
@@ -6162,36 +6508,7 @@
                 <a:ea typeface="Calibri" pitchFamily="34" charset="-122"/>
                 <a:cs typeface="Calibri" pitchFamily="34" charset="-120"/>
               </a:rPr>
-              <a:t>That the tests which exist, pass.</a:t>
-            </a:r>
-            <a:endParaRPr lang="en-US" sz="1500" dirty="0"/>
-          </a:p>
-          <a:p>
-            <a:pPr indent="0" marL="0">
-              <a:lnSpc>
-                <a:spcPct val="120000"/>
-              </a:lnSpc>
-              <a:buNone/>
-            </a:pPr>
-            <a:endParaRPr lang="en-US" sz="1500" dirty="0"/>
-          </a:p>
-          <a:p>
-            <a:pPr indent="0" marL="0">
-              <a:lnSpc>
-                <a:spcPct val="120000"/>
-              </a:lnSpc>
-              <a:buNone/>
-            </a:pPr>
-            <a:r>
-              <a:rPr lang="en-US" sz="1500" dirty="0">
-                <a:solidFill>
-                  <a:srgbClr val="16191D"/>
-                </a:solidFill>
-                <a:latin typeface="Calibri" pitchFamily="34" charset="0"/>
-                <a:ea typeface="Calibri" pitchFamily="34" charset="-122"/>
-                <a:cs typeface="Calibri" pitchFamily="34" charset="-120"/>
-              </a:rPr>
-              <a:t>It says nothing at all about the tests that were supposed to be written and never were.</a:t>
+              <a:t>That the tests which exist, pass. It is silent on the tests the spec named and the delegate never wrote — and a rising count is not an answer to that.</a:t>
             </a:r>
             <a:endParaRPr lang="en-US" sz="1500" dirty="0"/>
           </a:p>
@@ -6205,12 +6522,12 @@
         </p:nvSpPr>
         <p:spPr>
           <a:xfrm>
-            <a:off x="6537960" y="1691640"/>
-            <a:ext cx="5013655" cy="1874520"/>
+            <a:off x="6537960" y="1645920"/>
+            <a:ext cx="5013655" cy="1645920"/>
           </a:xfrm>
           <a:prstGeom prst="roundRect">
             <a:avLst>
-              <a:gd name="adj" fmla="val 2927"/>
+              <a:gd name="adj" fmla="val 3333"/>
             </a:avLst>
           </a:prstGeom>
           <a:solidFill>
@@ -6232,8 +6549,8 @@
         </p:nvSpPr>
         <p:spPr>
           <a:xfrm>
-            <a:off x="6812280" y="1874520"/>
-            <a:ext cx="4572000" cy="320040"/>
+            <a:off x="6830568" y="1828800"/>
+            <a:ext cx="4572000" cy="292608"/>
           </a:xfrm>
           <a:prstGeom prst="rect">
             <a:avLst/>
@@ -6271,8 +6588,8 @@
         </p:nvSpPr>
         <p:spPr>
           <a:xfrm>
-            <a:off x="6812280" y="2240280"/>
-            <a:ext cx="4572000" cy="1234440"/>
+            <a:off x="6830568" y="2212848"/>
+            <a:ext cx="4572000" cy="1005840"/>
           </a:xfrm>
           <a:prstGeom prst="rect">
             <a:avLst/>
@@ -6286,7 +6603,7 @@
           <a:p>
             <a:pPr indent="0" marL="0">
               <a:lnSpc>
-                <a:spcPct val="120000"/>
+                <a:spcPct val="122000"/>
               </a:lnSpc>
               <a:buNone/>
             </a:pPr>
@@ -6299,28 +6616,139 @@
                 <a:ea typeface="Calibri" pitchFamily="34" charset="-122"/>
                 <a:cs typeface="Calibri" pitchFamily="34" charset="-120"/>
               </a:rPr>
-              <a:t>Did the specific test files I asked for actually get created?</a:t>
+              <a:t>Diff against the base commit, confirm the spec's named test files were genuinely modified, then confirm something asserts on the user-facing path.</a:t>
             </a:r>
             <a:endParaRPr lang="en-US" sz="1500" dirty="0"/>
           </a:p>
+        </p:txBody>
+      </p:sp>
+      <p:sp>
+        <p:nvSpPr>
+          <p:cNvPr id="10" name="Text 8"/>
+          <p:cNvSpPr txBox="1"/>
+          <p:nvPr/>
+        </p:nvSpPr>
+        <p:spPr>
+          <a:xfrm>
+            <a:off x="640080" y="3474720"/>
+            <a:ext cx="10911535" cy="365760"/>
+          </a:xfrm>
+          <a:prstGeom prst="rect">
+            <a:avLst/>
+          </a:prstGeom>
+          <a:noFill/>
+          <a:ln/>
+        </p:spPr>
+        <p:txBody>
+          <a:bodyPr wrap="square" lIns="0" tIns="0" rIns="0" bIns="0" rtlCol="0" anchor="ctr"/>
+          <a:lstStyle/>
+          <a:p>
+            <a:pPr indent="0" marL="0">
+              <a:buNone/>
+            </a:pPr>
+            <a:r>
+              <a:rPr lang="en-US" sz="1700" b="1" dirty="0">
+                <a:solidFill>
+                  <a:srgbClr val="16191D"/>
+                </a:solidFill>
+                <a:latin typeface="Arial" pitchFamily="34" charset="0"/>
+                <a:ea typeface="Arial" pitchFamily="34" charset="-122"/>
+                <a:cs typeface="Arial" pitchFamily="34" charset="-120"/>
+              </a:rPr>
+              <a:t>Three that passed every phase gate:</a:t>
+            </a:r>
+            <a:endParaRPr lang="en-US" sz="1700" dirty="0"/>
+          </a:p>
+        </p:txBody>
+      </p:sp>
+      <p:sp>
+        <p:nvSpPr>
+          <p:cNvPr id="11" name="Shape 9"/>
+          <p:cNvSpPr/>
+          <p:nvPr/>
+        </p:nvSpPr>
+        <p:spPr>
+          <a:xfrm>
+            <a:off x="658368" y="4005072"/>
+            <a:ext cx="402336" cy="402336"/>
+          </a:xfrm>
+          <a:prstGeom prst="ellipse">
+            <a:avLst/>
+          </a:prstGeom>
+          <a:solidFill>
+            <a:srgbClr val="C1690C"/>
+          </a:solidFill>
+          <a:ln/>
+        </p:spPr>
+      </p:sp>
+      <p:sp>
+        <p:nvSpPr>
+          <p:cNvPr id="12" name="Text 10"/>
+          <p:cNvSpPr txBox="1"/>
+          <p:nvPr/>
+        </p:nvSpPr>
+        <p:spPr>
+          <a:xfrm>
+            <a:off x="658368" y="4005072"/>
+            <a:ext cx="402336" cy="402336"/>
+          </a:xfrm>
+          <a:prstGeom prst="rect">
+            <a:avLst/>
+          </a:prstGeom>
+          <a:noFill/>
+          <a:ln/>
+        </p:spPr>
+        <p:txBody>
+          <a:bodyPr wrap="square" lIns="0" tIns="0" rIns="0" bIns="0" rtlCol="0" anchor="ctr"/>
+          <a:lstStyle/>
+          <a:p>
+            <a:pPr algn="ctr" indent="0" marL="0">
+              <a:buNone/>
+            </a:pPr>
+            <a:r>
+              <a:rPr lang="en-US" sz="1400" b="1" dirty="0">
+                <a:solidFill>
+                  <a:srgbClr val="FFFFFF"/>
+                </a:solidFill>
+                <a:latin typeface="Arial" pitchFamily="34" charset="0"/>
+                <a:ea typeface="Arial" pitchFamily="34" charset="-122"/>
+                <a:cs typeface="Arial" pitchFamily="34" charset="-120"/>
+              </a:rPr>
+              <a:t>1</a:t>
+            </a:r>
+            <a:endParaRPr lang="en-US" sz="1400" dirty="0"/>
+          </a:p>
+        </p:txBody>
+      </p:sp>
+      <p:sp>
+        <p:nvSpPr>
+          <p:cNvPr id="13" name="Text 11"/>
+          <p:cNvSpPr txBox="1"/>
+          <p:nvPr/>
+        </p:nvSpPr>
+        <p:spPr>
+          <a:xfrm>
+            <a:off x="1207008" y="3950208"/>
+            <a:ext cx="10344607" cy="566928"/>
+          </a:xfrm>
+          <a:prstGeom prst="rect">
+            <a:avLst/>
+          </a:prstGeom>
+          <a:noFill/>
+          <a:ln/>
+        </p:spPr>
+        <p:txBody>
+          <a:bodyPr wrap="square" lIns="0" tIns="0" rIns="0" bIns="0" rtlCol="0" anchor="ctr"/>
+          <a:lstStyle/>
           <a:p>
             <a:pPr indent="0" marL="0">
               <a:lnSpc>
-                <a:spcPct val="120000"/>
+                <a:spcPct val="118000"/>
               </a:lnSpc>
               <a:buNone/>
             </a:pPr>
-            <a:endParaRPr lang="en-US" sz="1500" dirty="0"/>
-          </a:p>
-          <a:p>
-            <a:pPr indent="0" marL="0">
-              <a:lnSpc>
-                <a:spcPct val="120000"/>
-              </a:lnSpc>
-              <a:buNone/>
-            </a:pPr>
-            <a:r>
-              <a:rPr lang="en-US" sz="1500" dirty="0">
+            <a:r>
+              <a:rPr lang="en-US" sz="1400" dirty="0">
                 <a:solidFill>
                   <a:srgbClr val="16191D"/>
                 </a:solidFill>
@@ -6328,22 +6756,42 @@
                 <a:ea typeface="Calibri" pitchFamily="34" charset="-122"/>
                 <a:cs typeface="Calibri" pitchFamily="34" charset="-120"/>
               </a:rPr>
-              <a:t>A test count going up is not an answer to that question.</a:t>
-            </a:r>
-            <a:endParaRPr lang="en-US" sz="1500" dirty="0"/>
-          </a:p>
-        </p:txBody>
-      </p:sp>
-      <p:sp>
-        <p:nvSpPr>
-          <p:cNvPr id="10" name="Text 8"/>
-          <p:cNvSpPr txBox="1"/>
-          <p:nvPr/>
-        </p:nvSpPr>
-        <p:spPr>
-          <a:xfrm>
-            <a:off x="640080" y="3749040"/>
-            <a:ext cx="10911535" cy="365760"/>
+              <a:t>Two UI test files were specified and never created. All four “Move” call sites were hardcoded to a room-only route, making container destinations impossible — an unreachable feature, fully green.</a:t>
+            </a:r>
+            <a:endParaRPr lang="en-US" sz="1400" dirty="0"/>
+          </a:p>
+        </p:txBody>
+      </p:sp>
+      <p:sp>
+        <p:nvSpPr>
+          <p:cNvPr id="14" name="Shape 12"/>
+          <p:cNvSpPr/>
+          <p:nvPr/>
+        </p:nvSpPr>
+        <p:spPr>
+          <a:xfrm>
+            <a:off x="658368" y="4645152"/>
+            <a:ext cx="402336" cy="402336"/>
+          </a:xfrm>
+          <a:prstGeom prst="ellipse">
+            <a:avLst/>
+          </a:prstGeom>
+          <a:solidFill>
+            <a:srgbClr val="C1690C"/>
+          </a:solidFill>
+          <a:ln/>
+        </p:spPr>
+      </p:sp>
+      <p:sp>
+        <p:nvSpPr>
+          <p:cNvPr id="15" name="Text 13"/>
+          <p:cNvSpPr txBox="1"/>
+          <p:nvPr/>
+        </p:nvSpPr>
+        <p:spPr>
+          <a:xfrm>
+            <a:off x="658368" y="4645152"/>
+            <a:ext cx="402336" cy="402336"/>
           </a:xfrm>
           <a:prstGeom prst="rect">
             <a:avLst/>
@@ -6355,34 +6803,76 @@
           <a:bodyPr wrap="square" lIns="0" tIns="0" rIns="0" bIns="0" rtlCol="0" anchor="ctr"/>
           <a:lstStyle/>
           <a:p>
-            <a:pPr indent="0" marL="0">
-              <a:buNone/>
-            </a:pPr>
-            <a:r>
-              <a:rPr lang="en-US" sz="1600" b="1" dirty="0">
-                <a:solidFill>
-                  <a:srgbClr val="16191D"/>
+            <a:pPr algn="ctr" indent="0" marL="0">
+              <a:buNone/>
+            </a:pPr>
+            <a:r>
+              <a:rPr lang="en-US" sz="1400" b="1" dirty="0">
+                <a:solidFill>
+                  <a:srgbClr val="FFFFFF"/>
                 </a:solidFill>
                 <a:latin typeface="Arial" pitchFamily="34" charset="0"/>
                 <a:ea typeface="Arial" pitchFamily="34" charset="-122"/>
                 <a:cs typeface="Arial" pitchFamily="34" charset="-120"/>
               </a:rPr>
-              <a:t>Three times this got through, all the way:</a:t>
-            </a:r>
-            <a:endParaRPr lang="en-US" sz="1600" dirty="0"/>
-          </a:p>
-        </p:txBody>
-      </p:sp>
-      <p:sp>
-        <p:nvSpPr>
-          <p:cNvPr id="11" name="Shape 9"/>
+              <a:t>2</a:t>
+            </a:r>
+            <a:endParaRPr lang="en-US" sz="1400" dirty="0"/>
+          </a:p>
+        </p:txBody>
+      </p:sp>
+      <p:sp>
+        <p:nvSpPr>
+          <p:cNvPr id="16" name="Text 14"/>
+          <p:cNvSpPr txBox="1"/>
+          <p:nvPr/>
+        </p:nvSpPr>
+        <p:spPr>
+          <a:xfrm>
+            <a:off x="1207008" y="4590288"/>
+            <a:ext cx="10344607" cy="566928"/>
+          </a:xfrm>
+          <a:prstGeom prst="rect">
+            <a:avLst/>
+          </a:prstGeom>
+          <a:noFill/>
+          <a:ln/>
+        </p:spPr>
+        <p:txBody>
+          <a:bodyPr wrap="square" lIns="0" tIns="0" rIns="0" bIns="0" rtlCol="0" anchor="ctr"/>
+          <a:lstStyle/>
+          <a:p>
+            <a:pPr indent="0" marL="0">
+              <a:lnSpc>
+                <a:spcPct val="118000"/>
+              </a:lnSpc>
+              <a:buNone/>
+            </a:pPr>
+            <a:r>
+              <a:rPr lang="en-US" sz="1400" dirty="0">
+                <a:solidFill>
+                  <a:srgbClr val="16191D"/>
+                </a:solidFill>
+                <a:latin typeface="Calibri" pitchFamily="34" charset="0"/>
+                <a:ea typeface="Calibri" pitchFamily="34" charset="-122"/>
+                <a:cs typeface="Calibri" pitchFamily="34" charset="-120"/>
+              </a:rPr>
+              <a:t>A helper with exhaustive tests. Its one production caller passed an empty array, so the entire feature was dead code.</a:t>
+            </a:r>
+            <a:endParaRPr lang="en-US" sz="1400" dirty="0"/>
+          </a:p>
+        </p:txBody>
+      </p:sp>
+      <p:sp>
+        <p:nvSpPr>
+          <p:cNvPr id="17" name="Shape 15"/>
           <p:cNvSpPr/>
           <p:nvPr/>
         </p:nvSpPr>
         <p:spPr>
           <a:xfrm>
-            <a:off x="658368" y="4187952"/>
-            <a:ext cx="420624" cy="420624"/>
+            <a:off x="658368" y="5285232"/>
+            <a:ext cx="402336" cy="402336"/>
           </a:xfrm>
           <a:prstGeom prst="ellipse">
             <a:avLst/>
@@ -6395,14 +6885,14 @@
       </p:sp>
       <p:sp>
         <p:nvSpPr>
-          <p:cNvPr id="12" name="Text 10"/>
-          <p:cNvSpPr txBox="1"/>
-          <p:nvPr/>
-        </p:nvSpPr>
-        <p:spPr>
-          <a:xfrm>
-            <a:off x="658368" y="4187952"/>
-            <a:ext cx="420624" cy="420624"/>
+          <p:cNvPr id="18" name="Text 16"/>
+          <p:cNvSpPr txBox="1"/>
+          <p:nvPr/>
+        </p:nvSpPr>
+        <p:spPr>
+          <a:xfrm>
+            <a:off x="658368" y="5285232"/>
+            <a:ext cx="402336" cy="402336"/>
           </a:xfrm>
           <a:prstGeom prst="rect">
             <a:avLst/>
@@ -6418,7 +6908,7 @@
               <a:buNone/>
             </a:pPr>
             <a:r>
-              <a:rPr lang="en-US" sz="1500" b="1" dirty="0">
+              <a:rPr lang="en-US" sz="1400" b="1" dirty="0">
                 <a:solidFill>
                   <a:srgbClr val="FFFFFF"/>
                 </a:solidFill>
@@ -6426,22 +6916,22 @@
                 <a:ea typeface="Arial" pitchFamily="34" charset="-122"/>
                 <a:cs typeface="Arial" pitchFamily="34" charset="-120"/>
               </a:rPr>
-              <a:t>1</a:t>
-            </a:r>
-            <a:endParaRPr lang="en-US" sz="1500" dirty="0"/>
-          </a:p>
-        </p:txBody>
-      </p:sp>
-      <p:sp>
-        <p:nvSpPr>
-          <p:cNvPr id="13" name="Text 11"/>
-          <p:cNvSpPr txBox="1"/>
-          <p:nvPr/>
-        </p:nvSpPr>
-        <p:spPr>
-          <a:xfrm>
-            <a:off x="1234440" y="4187952"/>
-            <a:ext cx="10317175" cy="420624"/>
+              <a:t>3</a:t>
+            </a:r>
+            <a:endParaRPr lang="en-US" sz="1400" dirty="0"/>
+          </a:p>
+        </p:txBody>
+      </p:sp>
+      <p:sp>
+        <p:nvSpPr>
+          <p:cNvPr id="19" name="Text 17"/>
+          <p:cNvSpPr txBox="1"/>
+          <p:nvPr/>
+        </p:nvSpPr>
+        <p:spPr>
+          <a:xfrm>
+            <a:off x="1207008" y="5230368"/>
+            <a:ext cx="10344607" cy="566928"/>
           </a:xfrm>
           <a:prstGeom prst="rect">
             <a:avLst/>
@@ -6454,10 +6944,13 @@
           <a:lstStyle/>
           <a:p>
             <a:pPr indent="0" marL="0">
-              <a:buNone/>
-            </a:pPr>
-            <a:r>
-              <a:rPr lang="en-US" sz="1450" dirty="0">
+              <a:lnSpc>
+                <a:spcPct val="118000"/>
+              </a:lnSpc>
+              <a:buNone/>
+            </a:pPr>
+            <a:r>
+              <a:rPr lang="en-US" sz="1400" dirty="0">
                 <a:solidFill>
                   <a:srgbClr val="16191D"/>
                 </a:solidFill>
@@ -6465,205 +6958,9 @@
                 <a:ea typeface="Calibri" pitchFamily="34" charset="-122"/>
                 <a:cs typeface="Calibri" pitchFamily="34" charset="-120"/>
               </a:rPr>
-              <a:t>A feature shipped where every button quietly led to the wrong place. The screen was untestable and untested.</a:t>
-            </a:r>
-            <a:endParaRPr lang="en-US" sz="1450" dirty="0"/>
-          </a:p>
-        </p:txBody>
-      </p:sp>
-      <p:sp>
-        <p:nvSpPr>
-          <p:cNvPr id="14" name="Shape 12"/>
-          <p:cNvSpPr/>
-          <p:nvPr/>
-        </p:nvSpPr>
-        <p:spPr>
-          <a:xfrm>
-            <a:off x="658368" y="4700016"/>
-            <a:ext cx="420624" cy="420624"/>
-          </a:xfrm>
-          <a:prstGeom prst="ellipse">
-            <a:avLst/>
-          </a:prstGeom>
-          <a:solidFill>
-            <a:srgbClr val="C1690C"/>
-          </a:solidFill>
-          <a:ln/>
-        </p:spPr>
-      </p:sp>
-      <p:sp>
-        <p:nvSpPr>
-          <p:cNvPr id="15" name="Text 13"/>
-          <p:cNvSpPr txBox="1"/>
-          <p:nvPr/>
-        </p:nvSpPr>
-        <p:spPr>
-          <a:xfrm>
-            <a:off x="658368" y="4700016"/>
-            <a:ext cx="420624" cy="420624"/>
-          </a:xfrm>
-          <a:prstGeom prst="rect">
-            <a:avLst/>
-          </a:prstGeom>
-          <a:noFill/>
-          <a:ln/>
-        </p:spPr>
-        <p:txBody>
-          <a:bodyPr wrap="square" lIns="0" tIns="0" rIns="0" bIns="0" rtlCol="0" anchor="ctr"/>
-          <a:lstStyle/>
-          <a:p>
-            <a:pPr algn="ctr" indent="0" marL="0">
-              <a:buNone/>
-            </a:pPr>
-            <a:r>
-              <a:rPr lang="en-US" sz="1500" b="1" dirty="0">
-                <a:solidFill>
-                  <a:srgbClr val="FFFFFF"/>
-                </a:solidFill>
-                <a:latin typeface="Arial" pitchFamily="34" charset="0"/>
-                <a:ea typeface="Arial" pitchFamily="34" charset="-122"/>
-                <a:cs typeface="Arial" pitchFamily="34" charset="-120"/>
-              </a:rPr>
-              <a:t>2</a:t>
-            </a:r>
-            <a:endParaRPr lang="en-US" sz="1500" dirty="0"/>
-          </a:p>
-        </p:txBody>
-      </p:sp>
-      <p:sp>
-        <p:nvSpPr>
-          <p:cNvPr id="16" name="Text 14"/>
-          <p:cNvSpPr txBox="1"/>
-          <p:nvPr/>
-        </p:nvSpPr>
-        <p:spPr>
-          <a:xfrm>
-            <a:off x="1234440" y="4700016"/>
-            <a:ext cx="10317175" cy="420624"/>
-          </a:xfrm>
-          <a:prstGeom prst="rect">
-            <a:avLst/>
-          </a:prstGeom>
-          <a:noFill/>
-          <a:ln/>
-        </p:spPr>
-        <p:txBody>
-          <a:bodyPr wrap="square" lIns="0" tIns="0" rIns="0" bIns="0" rtlCol="0" anchor="ctr"/>
-          <a:lstStyle/>
-          <a:p>
-            <a:pPr indent="0" marL="0">
-              <a:buNone/>
-            </a:pPr>
-            <a:r>
-              <a:rPr lang="en-US" sz="1450" dirty="0">
-                <a:solidFill>
-                  <a:srgbClr val="16191D"/>
-                </a:solidFill>
-                <a:latin typeface="Calibri" pitchFamily="34" charset="0"/>
-                <a:ea typeface="Calibri" pitchFamily="34" charset="-122"/>
-                <a:cs typeface="Calibri" pitchFamily="34" charset="-120"/>
-              </a:rPr>
-              <a:t>A helper function with beautiful tests. The one place that actually used it passed it an empty list. Dead code.</a:t>
-            </a:r>
-            <a:endParaRPr lang="en-US" sz="1450" dirty="0"/>
-          </a:p>
-        </p:txBody>
-      </p:sp>
-      <p:sp>
-        <p:nvSpPr>
-          <p:cNvPr id="17" name="Shape 15"/>
-          <p:cNvSpPr/>
-          <p:nvPr/>
-        </p:nvSpPr>
-        <p:spPr>
-          <a:xfrm>
-            <a:off x="658368" y="5212080"/>
-            <a:ext cx="420624" cy="420624"/>
-          </a:xfrm>
-          <a:prstGeom prst="ellipse">
-            <a:avLst/>
-          </a:prstGeom>
-          <a:solidFill>
-            <a:srgbClr val="C1690C"/>
-          </a:solidFill>
-          <a:ln/>
-        </p:spPr>
-      </p:sp>
-      <p:sp>
-        <p:nvSpPr>
-          <p:cNvPr id="18" name="Text 16"/>
-          <p:cNvSpPr txBox="1"/>
-          <p:nvPr/>
-        </p:nvSpPr>
-        <p:spPr>
-          <a:xfrm>
-            <a:off x="658368" y="5212080"/>
-            <a:ext cx="420624" cy="420624"/>
-          </a:xfrm>
-          <a:prstGeom prst="rect">
-            <a:avLst/>
-          </a:prstGeom>
-          <a:noFill/>
-          <a:ln/>
-        </p:spPr>
-        <p:txBody>
-          <a:bodyPr wrap="square" lIns="0" tIns="0" rIns="0" bIns="0" rtlCol="0" anchor="ctr"/>
-          <a:lstStyle/>
-          <a:p>
-            <a:pPr algn="ctr" indent="0" marL="0">
-              <a:buNone/>
-            </a:pPr>
-            <a:r>
-              <a:rPr lang="en-US" sz="1500" b="1" dirty="0">
-                <a:solidFill>
-                  <a:srgbClr val="FFFFFF"/>
-                </a:solidFill>
-                <a:latin typeface="Arial" pitchFamily="34" charset="0"/>
-                <a:ea typeface="Arial" pitchFamily="34" charset="-122"/>
-                <a:cs typeface="Arial" pitchFamily="34" charset="-120"/>
-              </a:rPr>
-              <a:t>3</a:t>
-            </a:r>
-            <a:endParaRPr lang="en-US" sz="1500" dirty="0"/>
-          </a:p>
-        </p:txBody>
-      </p:sp>
-      <p:sp>
-        <p:nvSpPr>
-          <p:cNvPr id="19" name="Text 17"/>
-          <p:cNvSpPr txBox="1"/>
-          <p:nvPr/>
-        </p:nvSpPr>
-        <p:spPr>
-          <a:xfrm>
-            <a:off x="1234440" y="5212080"/>
-            <a:ext cx="10317175" cy="420624"/>
-          </a:xfrm>
-          <a:prstGeom prst="rect">
-            <a:avLst/>
-          </a:prstGeom>
-          <a:noFill/>
-          <a:ln/>
-        </p:spPr>
-        <p:txBody>
-          <a:bodyPr wrap="square" lIns="0" tIns="0" rIns="0" bIns="0" rtlCol="0" anchor="ctr"/>
-          <a:lstStyle/>
-          <a:p>
-            <a:pPr indent="0" marL="0">
-              <a:buNone/>
-            </a:pPr>
-            <a:r>
-              <a:rPr lang="en-US" sz="1450" dirty="0">
-                <a:solidFill>
-                  <a:srgbClr val="16191D"/>
-                </a:solidFill>
-                <a:latin typeface="Calibri" pitchFamily="34" charset="0"/>
-                <a:ea typeface="Calibri" pitchFamily="34" charset="-122"/>
-                <a:cs typeface="Calibri" pitchFamily="34" charset="-120"/>
-              </a:rPr>
-              <a:t>A backup that skipped one table — and the restore deleted that table first. Every restore destroyed the audit trail.</a:t>
-            </a:r>
-            <a:endParaRPr lang="en-US" sz="1450" dirty="0"/>
+              <a:t>A backup exporter omitted a table that the restore path deletes first. Every restore silently destroyed the audit trail.</a:t>
+            </a:r>
+            <a:endParaRPr lang="en-US" sz="1400" dirty="0"/>
           </a:p>
         </p:txBody>
       </p:sp>
@@ -6725,7 +7022,7 @@
                 <a:ea typeface="Arial" pitchFamily="34" charset="-122"/>
                 <a:cs typeface="Arial" pitchFamily="34" charset="-120"/>
               </a:rPr>
-              <a:t>If it only exists in the chat, it is gone</a:t>
+              <a:t>Four rules the failures produced</a:t>
             </a:r>
             <a:endParaRPr lang="en-US" sz="3800" dirty="0"/>
           </a:p>
@@ -6764,7 +7061,7 @@
                 <a:ea typeface="Courier New" pitchFamily="34" charset="-122"/>
                 <a:cs typeface="Courier New" pitchFamily="34" charset="-120"/>
               </a:rPr>
-              <a:t>WHAT ACTUALLY SURVIVES</a:t>
+              <a:t>THESE GENERALISE TO ANY UNATTENDED AGENT</a:t>
             </a:r>
             <a:endParaRPr lang="en-US" sz="1100" dirty="0"/>
           </a:p>
@@ -6778,12 +7075,12 @@
         </p:nvSpPr>
         <p:spPr>
           <a:xfrm>
-            <a:off x="640080" y="1691640"/>
-            <a:ext cx="5272888" cy="1920240"/>
+            <a:off x="640080" y="1645920"/>
+            <a:ext cx="5272888" cy="2011680"/>
           </a:xfrm>
           <a:prstGeom prst="roundRect">
             <a:avLst>
-              <a:gd name="adj" fmla="val 2857"/>
+              <a:gd name="adj" fmla="val 2727"/>
             </a:avLst>
           </a:prstGeom>
           <a:solidFill>
@@ -6805,8 +7102,8 @@
         </p:nvSpPr>
         <p:spPr>
           <a:xfrm>
-            <a:off x="914400" y="1929384"/>
-            <a:ext cx="420624" cy="420624"/>
+            <a:off x="914400" y="1883664"/>
+            <a:ext cx="402336" cy="402336"/>
           </a:xfrm>
           <a:prstGeom prst="ellipse">
             <a:avLst/>
@@ -6825,8 +7122,8 @@
         </p:nvSpPr>
         <p:spPr>
           <a:xfrm>
-            <a:off x="914400" y="1929384"/>
-            <a:ext cx="420624" cy="420624"/>
+            <a:off x="914400" y="1883664"/>
+            <a:ext cx="402336" cy="402336"/>
           </a:xfrm>
           <a:prstGeom prst="rect">
             <a:avLst/>
@@ -6842,7 +7139,7 @@
               <a:buNone/>
             </a:pPr>
             <a:r>
-              <a:rPr lang="en-US" sz="1500" b="1" dirty="0">
+              <a:rPr lang="en-US" sz="1400" b="1" dirty="0">
                 <a:solidFill>
                   <a:srgbClr val="FFFFFF"/>
                 </a:solidFill>
@@ -6852,7 +7149,7 @@
               </a:rPr>
               <a:t>1</a:t>
             </a:r>
-            <a:endParaRPr lang="en-US" sz="1500" dirty="0"/>
+            <a:endParaRPr lang="en-US" sz="1400" dirty="0"/>
           </a:p>
         </p:txBody>
       </p:sp>
@@ -6864,8 +7161,8 @@
         </p:nvSpPr>
         <p:spPr>
           <a:xfrm>
-            <a:off x="1508760" y="1892808"/>
-            <a:ext cx="4129888" cy="502920"/>
+            <a:off x="1481328" y="1847088"/>
+            <a:ext cx="4157320" cy="502920"/>
           </a:xfrm>
           <a:prstGeom prst="rect">
             <a:avLst/>
@@ -6892,7 +7189,7 @@
                 <a:ea typeface="Arial" pitchFamily="34" charset="-122"/>
                 <a:cs typeface="Arial" pitchFamily="34" charset="-120"/>
               </a:rPr>
-              <a:t>Ask for the work as a file, not an answer</a:t>
+              <a:t>The deliverable is a file, not stdout</a:t>
             </a:r>
             <a:endParaRPr lang="en-US" sz="1600" dirty="0"/>
           </a:p>
@@ -6906,8 +7203,8 @@
         </p:nvSpPr>
         <p:spPr>
           <a:xfrm>
-            <a:off x="914400" y="2496312"/>
-            <a:ext cx="4724248" cy="1005840"/>
+            <a:off x="914400" y="2423160"/>
+            <a:ext cx="4724248" cy="1143000"/>
           </a:xfrm>
           <a:prstGeom prst="rect">
             <a:avLst/>
@@ -6934,7 +7231,7 @@
                 <a:ea typeface="Calibri" pitchFamily="34" charset="-122"/>
                 <a:cs typeface="Calibri" pitchFamily="34" charset="-120"/>
               </a:rPr>
-              <a:t>Anything printed into the conversation is lost the moment the connection drops, and cut short if the job is stopped. I lost an hour of finished work learning this. A file on disk survives both.</a:t>
+              <a:t>Printed output is lost when the connection drops and truncated when a run is killed. A brief whose entire output is printed has a total-loss failure mode — verified on an hour of real work.</a:t>
             </a:r>
             <a:endParaRPr lang="en-US" sz="1350" dirty="0"/>
           </a:p>
@@ -6948,12 +7245,12 @@
         </p:nvSpPr>
         <p:spPr>
           <a:xfrm>
-            <a:off x="6278728" y="1691640"/>
-            <a:ext cx="5272888" cy="1920240"/>
+            <a:off x="6278728" y="1645920"/>
+            <a:ext cx="5272888" cy="2011680"/>
           </a:xfrm>
           <a:prstGeom prst="roundRect">
             <a:avLst>
-              <a:gd name="adj" fmla="val 2857"/>
+              <a:gd name="adj" fmla="val 2727"/>
             </a:avLst>
           </a:prstGeom>
           <a:solidFill>
@@ -6975,8 +7272,8 @@
         </p:nvSpPr>
         <p:spPr>
           <a:xfrm>
-            <a:off x="6553048" y="1929384"/>
-            <a:ext cx="420624" cy="420624"/>
+            <a:off x="6553048" y="1883664"/>
+            <a:ext cx="402336" cy="402336"/>
           </a:xfrm>
           <a:prstGeom prst="ellipse">
             <a:avLst/>
@@ -6995,8 +7292,8 @@
         </p:nvSpPr>
         <p:spPr>
           <a:xfrm>
-            <a:off x="6553048" y="1929384"/>
-            <a:ext cx="420624" cy="420624"/>
+            <a:off x="6553048" y="1883664"/>
+            <a:ext cx="402336" cy="402336"/>
           </a:xfrm>
           <a:prstGeom prst="rect">
             <a:avLst/>
@@ -7012,7 +7309,7 @@
               <a:buNone/>
             </a:pPr>
             <a:r>
-              <a:rPr lang="en-US" sz="1500" b="1" dirty="0">
+              <a:rPr lang="en-US" sz="1400" b="1" dirty="0">
                 <a:solidFill>
                   <a:srgbClr val="FFFFFF"/>
                 </a:solidFill>
@@ -7022,7 +7319,7 @@
               </a:rPr>
               <a:t>2</a:t>
             </a:r>
-            <a:endParaRPr lang="en-US" sz="1500" dirty="0"/>
+            <a:endParaRPr lang="en-US" sz="1400" dirty="0"/>
           </a:p>
         </p:txBody>
       </p:sp>
@@ -7034,8 +7331,8 @@
         </p:nvSpPr>
         <p:spPr>
           <a:xfrm>
-            <a:off x="7147408" y="1892808"/>
-            <a:ext cx="4129888" cy="502920"/>
+            <a:off x="7119976" y="1847088"/>
+            <a:ext cx="4157320" cy="502920"/>
           </a:xfrm>
           <a:prstGeom prst="rect">
             <a:avLst/>
@@ -7062,7 +7359,7 @@
                 <a:ea typeface="Arial" pitchFamily="34" charset="-122"/>
                 <a:cs typeface="Arial" pitchFamily="34" charset="-120"/>
               </a:rPr>
-              <a:t>Make it keep a diary</a:t>
+              <a:t>Match spec detail to model strength</a:t>
             </a:r>
             <a:endParaRPr lang="en-US" sz="1600" dirty="0"/>
           </a:p>
@@ -7076,8 +7373,8 @@
         </p:nvSpPr>
         <p:spPr>
           <a:xfrm>
-            <a:off x="6553048" y="2496312"/>
-            <a:ext cx="4724248" cy="1005840"/>
+            <a:off x="6553048" y="2423160"/>
+            <a:ext cx="4724248" cy="1143000"/>
           </a:xfrm>
           <a:prstGeom prst="rect">
             <a:avLst/>
@@ -7104,7 +7401,7 @@
                 <a:ea typeface="Calibri" pitchFamily="34" charset="-122"/>
                 <a:cs typeface="Calibri" pitchFamily="34" charset="-120"/>
               </a:rPr>
-              <a:t>One line per step, saved as it goes. That turns an hour of silence into something you can read while it is still running — and tells you where it got to if it dies.</a:t>
+              <a:t>Weaker models get exact files, exact before/after code, a do-not-touch list, and zero open questions. Frontier models get intent, invariants and phase gates — cheaper to write and better used.</a:t>
             </a:r>
             <a:endParaRPr lang="en-US" sz="1350" dirty="0"/>
           </a:p>
@@ -7119,11 +7416,11 @@
         <p:spPr>
           <a:xfrm>
             <a:off x="640080" y="3794760"/>
-            <a:ext cx="5272888" cy="1920240"/>
+            <a:ext cx="5272888" cy="2011680"/>
           </a:xfrm>
           <a:prstGeom prst="roundRect">
             <a:avLst>
-              <a:gd name="adj" fmla="val 2857"/>
+              <a:gd name="adj" fmla="val 2727"/>
             </a:avLst>
           </a:prstGeom>
           <a:solidFill>
@@ -7146,7 +7443,7 @@
         <p:spPr>
           <a:xfrm>
             <a:off x="914400" y="4032504"/>
-            <a:ext cx="420624" cy="420624"/>
+            <a:ext cx="402336" cy="402336"/>
           </a:xfrm>
           <a:prstGeom prst="ellipse">
             <a:avLst/>
@@ -7166,7 +7463,7 @@
         <p:spPr>
           <a:xfrm>
             <a:off x="914400" y="4032504"/>
-            <a:ext cx="420624" cy="420624"/>
+            <a:ext cx="402336" cy="402336"/>
           </a:xfrm>
           <a:prstGeom prst="rect">
             <a:avLst/>
@@ -7182,7 +7479,7 @@
               <a:buNone/>
             </a:pPr>
             <a:r>
-              <a:rPr lang="en-US" sz="1500" b="1" dirty="0">
+              <a:rPr lang="en-US" sz="1400" b="1" dirty="0">
                 <a:solidFill>
                   <a:srgbClr val="FFFFFF"/>
                 </a:solidFill>
@@ -7192,7 +7489,7 @@
               </a:rPr>
               <a:t>3</a:t>
             </a:r>
-            <a:endParaRPr lang="en-US" sz="1500" dirty="0"/>
+            <a:endParaRPr lang="en-US" sz="1400" dirty="0"/>
           </a:p>
         </p:txBody>
       </p:sp>
@@ -7204,8 +7501,8 @@
         </p:nvSpPr>
         <p:spPr>
           <a:xfrm>
-            <a:off x="1508760" y="3995928"/>
-            <a:ext cx="4129888" cy="502920"/>
+            <a:off x="1481328" y="3995928"/>
+            <a:ext cx="4157320" cy="502920"/>
           </a:xfrm>
           <a:prstGeom prst="rect">
             <a:avLst/>
@@ -7232,7 +7529,7 @@
                 <a:ea typeface="Arial" pitchFamily="34" charset="-122"/>
                 <a:cs typeface="Arial" pitchFamily="34" charset="-120"/>
               </a:rPr>
-              <a:t>Paste the rules in; do not point at them</a:t>
+              <a:t>Inline every rule that matters</a:t>
             </a:r>
             <a:endParaRPr lang="en-US" sz="1600" dirty="0"/>
           </a:p>
@@ -7246,8 +7543,8 @@
         </p:nvSpPr>
         <p:spPr>
           <a:xfrm>
-            <a:off x="914400" y="4599432"/>
-            <a:ext cx="4724248" cy="1005840"/>
+            <a:off x="914400" y="4572000"/>
+            <a:ext cx="4724248" cy="1143000"/>
           </a:xfrm>
           <a:prstGeom prst="rect">
             <a:avLst/>
@@ -7274,7 +7571,7 @@
                 <a:ea typeface="Calibri" pitchFamily="34" charset="-122"/>
                 <a:cs typeface="Calibri" pitchFamily="34" charset="-120"/>
               </a:rPr>
-              <a:t>The helper cannot see your team's standards, your notes, or anything you told the expensive assistant. If a rule matters for this job, it has to be in this job's instructions.</a:t>
+              <a:t>The delegate cannot see Claude's memory, your skills or your CLAUDE.md, and it runs self-approving, so it will not stop itself. Pointing at a standard does nothing; the standard has to be in the spec.</a:t>
             </a:r>
             <a:endParaRPr lang="en-US" sz="1350" dirty="0"/>
           </a:p>
@@ -7289,11 +7586,11 @@
         <p:spPr>
           <a:xfrm>
             <a:off x="6278728" y="3794760"/>
-            <a:ext cx="5272888" cy="1920240"/>
+            <a:ext cx="5272888" cy="2011680"/>
           </a:xfrm>
           <a:prstGeom prst="roundRect">
             <a:avLst>
-              <a:gd name="adj" fmla="val 2857"/>
+              <a:gd name="adj" fmla="val 2727"/>
             </a:avLst>
           </a:prstGeom>
           <a:solidFill>
@@ -7316,7 +7613,7 @@
         <p:spPr>
           <a:xfrm>
             <a:off x="6553048" y="4032504"/>
-            <a:ext cx="420624" cy="420624"/>
+            <a:ext cx="402336" cy="402336"/>
           </a:xfrm>
           <a:prstGeom prst="ellipse">
             <a:avLst/>
@@ -7336,7 +7633,7 @@
         <p:spPr>
           <a:xfrm>
             <a:off x="6553048" y="4032504"/>
-            <a:ext cx="420624" cy="420624"/>
+            <a:ext cx="402336" cy="402336"/>
           </a:xfrm>
           <a:prstGeom prst="rect">
             <a:avLst/>
@@ -7352,7 +7649,7 @@
               <a:buNone/>
             </a:pPr>
             <a:r>
-              <a:rPr lang="en-US" sz="1500" b="1" dirty="0">
+              <a:rPr lang="en-US" sz="1400" b="1" dirty="0">
                 <a:solidFill>
                   <a:srgbClr val="FFFFFF"/>
                 </a:solidFill>
@@ -7362,7 +7659,7 @@
               </a:rPr>
               <a:t>4</a:t>
             </a:r>
-            <a:endParaRPr lang="en-US" sz="1500" dirty="0"/>
+            <a:endParaRPr lang="en-US" sz="1400" dirty="0"/>
           </a:p>
         </p:txBody>
       </p:sp>
@@ -7374,8 +7671,8 @@
         </p:nvSpPr>
         <p:spPr>
           <a:xfrm>
-            <a:off x="7147408" y="3995928"/>
-            <a:ext cx="4129888" cy="502920"/>
+            <a:off x="7119976" y="3995928"/>
+            <a:ext cx="4157320" cy="502920"/>
           </a:xfrm>
           <a:prstGeom prst="rect">
             <a:avLst/>
@@ -7402,7 +7699,7 @@
                 <a:ea typeface="Arial" pitchFamily="34" charset="-122"/>
                 <a:cs typeface="Arial" pitchFamily="34" charset="-120"/>
               </a:rPr>
-              <a:t>Say what to do when it is unsure</a:t>
+              <a:t>Tell it to stop rather than improvise</a:t>
             </a:r>
             <a:endParaRPr lang="en-US" sz="1600" dirty="0"/>
           </a:p>
@@ -7416,8 +7713,8 @@
         </p:nvSpPr>
         <p:spPr>
           <a:xfrm>
-            <a:off x="6553048" y="4599432"/>
-            <a:ext cx="4724248" cy="1005840"/>
+            <a:off x="6553048" y="4572000"/>
+            <a:ext cx="4724248" cy="1143000"/>
           </a:xfrm>
           <a:prstGeom prst="rect">
             <a:avLst/>
@@ -7444,7 +7741,7 @@
                 <a:ea typeface="Calibri" pitchFamily="34" charset="-122"/>
                 <a:cs typeface="Calibri" pitchFamily="34" charset="-120"/>
               </a:rPr>
-              <a:t>Told explicitly to stop rather than guess, one helper pushed back and said my instructions were wrong. It was right. That beats a confident wrong answer every time.</a:t>
+              <a:t>One spec asserted something untrue about SQL ordering. Told explicitly to stop rather than guess, the delegate pushed back instead of writing a test that asserted it. That is the behaviour you want.</a:t>
             </a:r>
             <a:endParaRPr lang="en-US" sz="1350" dirty="0"/>
           </a:p>
@@ -7508,7 +7805,7 @@
                 <a:ea typeface="Arial" pitchFamily="34" charset="-122"/>
                 <a:cs typeface="Arial" pitchFamily="34" charset="-120"/>
               </a:rPr>
-              <a:t>Reliable beats clever</a:t>
+              <a:t>Picking a model: reliable beats smart</a:t>
             </a:r>
             <a:endParaRPr lang="en-US" sz="3800" dirty="0"/>
           </a:p>
@@ -7547,7 +7844,7 @@
                 <a:ea typeface="Courier New" pitchFamily="34" charset="-122"/>
                 <a:cs typeface="Courier New" pitchFamily="34" charset="-120"/>
               </a:rPr>
-              <a:t>PICKING WHO DOES THE WORK</a:t>
+              <a:t>LESSON 3 — AND THE LEAST INTUITIVE</a:t>
             </a:r>
             <a:endParaRPr lang="en-US" sz="1100" dirty="0"/>
           </a:p>
@@ -7561,12 +7858,12 @@
         </p:nvSpPr>
         <p:spPr>
           <a:xfrm>
-            <a:off x="640080" y="1691640"/>
-            <a:ext cx="10911535" cy="1051560"/>
+            <a:off x="640080" y="1645920"/>
+            <a:ext cx="10911535" cy="914400"/>
           </a:xfrm>
           <a:prstGeom prst="roundRect">
             <a:avLst>
-              <a:gd name="adj" fmla="val 5217"/>
+              <a:gd name="adj" fmla="val 6000"/>
             </a:avLst>
           </a:prstGeom>
           <a:solidFill>
@@ -7588,8 +7885,8 @@
         </p:nvSpPr>
         <p:spPr>
           <a:xfrm>
-            <a:off x="960120" y="1691640"/>
-            <a:ext cx="10271455" cy="1051560"/>
+            <a:off x="932688" y="1645920"/>
+            <a:ext cx="10326319" cy="914400"/>
           </a:xfrm>
           <a:prstGeom prst="rect">
             <a:avLst/>
@@ -7616,7 +7913,7 @@
                 <a:ea typeface="Calibri" pitchFamily="34" charset="-122"/>
                 <a:cs typeface="Calibri" pitchFamily="34" charset="-120"/>
               </a:rPr>
-              <a:t>A brilliant helper that garbles one instruction in fifty is worse, here, than an average one that never does. The clever one stops the whole job dead; the average one keeps going.</a:t>
+              <a:t>A model that reasons well and malforms one tool call in fifty is worse here than an average model that never breaks the loop.</a:t>
             </a:r>
             <a:endParaRPr lang="en-US" sz="1650" dirty="0"/>
           </a:p>
@@ -7630,12 +7927,12 @@
         </p:nvSpPr>
         <p:spPr>
           <a:xfrm>
-            <a:off x="640080" y="2971800"/>
-            <a:ext cx="5272888" cy="2560320"/>
+            <a:off x="640080" y="2834640"/>
+            <a:ext cx="5272888" cy="2468880"/>
           </a:xfrm>
           <a:prstGeom prst="roundRect">
             <a:avLst>
-              <a:gd name="adj" fmla="val 2143"/>
+              <a:gd name="adj" fmla="val 2222"/>
             </a:avLst>
           </a:prstGeom>
           <a:solidFill>
@@ -7657,8 +7954,8 @@
         </p:nvSpPr>
         <p:spPr>
           <a:xfrm>
-            <a:off x="914400" y="3154680"/>
-            <a:ext cx="4724248" cy="548640"/>
+            <a:off x="914400" y="3017520"/>
+            <a:ext cx="4724248" cy="502920"/>
           </a:xfrm>
           <a:prstGeom prst="rect">
             <a:avLst/>
@@ -7685,7 +7982,7 @@
                 <a:ea typeface="Arial" pitchFamily="34" charset="-122"/>
                 <a:cs typeface="Arial" pitchFamily="34" charset="-120"/>
               </a:rPr>
-              <a:t>Benchmark scores are not the question</a:t>
+              <a:t>Why benchmark scores mislead here</a:t>
             </a:r>
             <a:endParaRPr lang="en-US" sz="1700" dirty="0"/>
           </a:p>
@@ -7699,8 +7996,8 @@
         </p:nvSpPr>
         <p:spPr>
           <a:xfrm>
-            <a:off x="914400" y="3749040"/>
-            <a:ext cx="4724248" cy="1645920"/>
+            <a:off x="914400" y="3566160"/>
+            <a:ext cx="4724248" cy="1554480"/>
           </a:xfrm>
           <a:prstGeom prst="rect">
             <a:avLst/>
@@ -7714,12 +8011,12 @@
           <a:p>
             <a:pPr indent="0" marL="0">
               <a:lnSpc>
-                <a:spcPct val="120000"/>
+                <a:spcPct val="118000"/>
               </a:lnSpc>
               <a:buNone/>
             </a:pPr>
             <a:r>
-              <a:rPr lang="en-US" sz="1400" dirty="0">
+              <a:rPr lang="en-US" sz="1350" dirty="0">
                 <a:solidFill>
                   <a:srgbClr val="16191D"/>
                 </a:solidFill>
@@ -7727,28 +8024,28 @@
                 <a:ea typeface="Calibri" pitchFamily="34" charset="-122"/>
                 <a:cs typeface="Calibri" pitchFamily="34" charset="-120"/>
               </a:rPr>
-              <a:t>These helpers work by asking for one small action at a time — open this, change that. Phrase one of those requests wrong and the run ends there.</a:t>
-            </a:r>
-            <a:endParaRPr lang="en-US" sz="1400" dirty="0"/>
+              <a:t>These agents work by emitting tool calls. One malformed call ends the run — so what matters is syntactic adherence across hundreds of turns, not reasoning ability.</a:t>
+            </a:r>
+            <a:endParaRPr lang="en-US" sz="1350" dirty="0"/>
           </a:p>
           <a:p>
             <a:pPr indent="0" marL="0">
               <a:lnSpc>
-                <a:spcPct val="120000"/>
+                <a:spcPct val="118000"/>
               </a:lnSpc>
               <a:buNone/>
             </a:pPr>
-            <a:endParaRPr lang="en-US" sz="1400" dirty="0"/>
+            <a:endParaRPr lang="en-US" sz="1350" dirty="0"/>
           </a:p>
           <a:p>
             <a:pPr indent="0" marL="0">
               <a:lnSpc>
-                <a:spcPct val="120000"/>
+                <a:spcPct val="118000"/>
               </a:lnSpc>
               <a:buNone/>
             </a:pPr>
             <a:r>
-              <a:rPr lang="en-US" sz="1400" dirty="0">
+              <a:rPr lang="en-US" sz="1350" dirty="0">
                 <a:solidFill>
                   <a:srgbClr val="16191D"/>
                 </a:solidFill>
@@ -7756,9 +8053,9 @@
                 <a:ea typeface="Calibri" pitchFamily="34" charset="-122"/>
                 <a:cs typeface="Calibri" pitchFamily="34" charset="-120"/>
               </a:rPr>
-              <a:t>The most common failure in my testing was not the model's fault at all: a bug in the plumbing between the model and the tools.</a:t>
-            </a:r>
-            <a:endParaRPr lang="en-US" sz="1400" dirty="0"/>
+              <a:t>The most common error in my testing was not a model failure at all: a bug in the tool-calling layer these CLIs share, which drops part of the conversation on follow-up turns and then rejects the result.</a:t>
+            </a:r>
+            <a:endParaRPr lang="en-US" sz="1350" dirty="0"/>
           </a:p>
         </p:txBody>
       </p:sp>
@@ -7770,12 +8067,12 @@
         </p:nvSpPr>
         <p:spPr>
           <a:xfrm>
-            <a:off x="6278728" y="2971800"/>
-            <a:ext cx="5272888" cy="2560320"/>
+            <a:off x="6278728" y="2834640"/>
+            <a:ext cx="5272888" cy="2468880"/>
           </a:xfrm>
           <a:prstGeom prst="roundRect">
             <a:avLst>
-              <a:gd name="adj" fmla="val 2143"/>
+              <a:gd name="adj" fmla="val 2222"/>
             </a:avLst>
           </a:prstGeom>
           <a:solidFill>
@@ -7797,8 +8094,8 @@
         </p:nvSpPr>
         <p:spPr>
           <a:xfrm>
-            <a:off x="6553048" y="3154680"/>
-            <a:ext cx="4724248" cy="320040"/>
+            <a:off x="6553048" y="3017520"/>
+            <a:ext cx="4724248" cy="292608"/>
           </a:xfrm>
           <a:prstGeom prst="rect">
             <a:avLst/>
@@ -7822,7 +8119,7 @@
                 <a:ea typeface="Arial" pitchFamily="34" charset="-122"/>
                 <a:cs typeface="Arial" pitchFamily="34" charset="-120"/>
               </a:rPr>
-              <a:t>So we keep a scorecard</a:t>
+              <a:t>So there is a graded roster</a:t>
             </a:r>
             <a:endParaRPr lang="en-US" sz="1700" dirty="0"/>
           </a:p>
@@ -7836,8 +8133,8 @@
         </p:nvSpPr>
         <p:spPr>
           <a:xfrm>
-            <a:off x="6553048" y="3547872"/>
-            <a:ext cx="4724248" cy="1737360"/>
+            <a:off x="6553048" y="3401568"/>
+            <a:ext cx="4724248" cy="1783080"/>
           </a:xfrm>
           <a:prstGeom prst="rect">
             <a:avLst/>
@@ -7851,12 +8148,12 @@
           <a:p>
             <a:pPr indent="0" marL="0">
               <a:lnSpc>
-                <a:spcPct val="120000"/>
+                <a:spcPct val="118000"/>
               </a:lnSpc>
               <a:buNone/>
             </a:pPr>
             <a:r>
-              <a:rPr lang="en-US" sz="1400" dirty="0">
+              <a:rPr lang="en-US" sz="1350" dirty="0">
                 <a:solidFill>
                   <a:srgbClr val="16191D"/>
                 </a:solidFill>
@@ -7864,28 +8161,28 @@
                 <a:ea typeface="Calibri" pitchFamily="34" charset="-122"/>
                 <a:cs typeface="Calibri" pitchFamily="34" charset="-120"/>
               </a:rPr>
-              <a:t>All 34 available models, with what we actually know about each one — and, deliberately, blank cells where we do not know.</a:t>
-            </a:r>
-            <a:endParaRPr lang="en-US" sz="1400" dirty="0"/>
+              <a:t>All 34 ids, every cell carrying a confidence level, and an explicit “unknown” where a search found nothing rather than a plausible guess. Guessed numbers get written into tooling, where they fail silently.</a:t>
+            </a:r>
+            <a:endParaRPr lang="en-US" sz="1350" dirty="0"/>
           </a:p>
           <a:p>
             <a:pPr indent="0" marL="0">
               <a:lnSpc>
-                <a:spcPct val="120000"/>
+                <a:spcPct val="118000"/>
               </a:lnSpc>
               <a:buNone/>
             </a:pPr>
-            <a:endParaRPr lang="en-US" sz="1400" dirty="0"/>
+            <a:endParaRPr lang="en-US" sz="1350" dirty="0"/>
           </a:p>
           <a:p>
             <a:pPr indent="0" marL="0">
               <a:lnSpc>
-                <a:spcPct val="120000"/>
+                <a:spcPct val="118000"/>
               </a:lnSpc>
               <a:buNone/>
             </a:pPr>
             <a:r>
-              <a:rPr lang="en-US" sz="1400" dirty="0">
+              <a:rPr lang="en-US" sz="1350" dirty="0">
                 <a:solidFill>
                   <a:srgbClr val="16191D"/>
                 </a:solidFill>
@@ -7893,9 +8190,9 @@
                 <a:ea typeface="Calibri" pitchFamily="34" charset="-122"/>
                 <a:cs typeface="Calibri" pitchFamily="34" charset="-120"/>
               </a:rPr>
-              <a:t>A guessed number here fails silently later. An honest blank makes someone go and check. Four models are on a do-not-use list purely from watching them work.</a:t>
-            </a:r>
-            <a:endParaRPr lang="en-US" sz="1400" dirty="0"/>
+              <a:t>Four models are on a do-not-use list from direct observation: one loops forever, one takes 40–186s per call, one drops closing braces, one ignores the tools and rewrites files whole.</a:t>
+            </a:r>
+            <a:endParaRPr lang="en-US" sz="1350" dirty="0"/>
           </a:p>
         </p:txBody>
       </p:sp>
@@ -7932,7 +8229,7 @@
                 <a:ea typeface="Calibri" pitchFamily="34" charset="-122"/>
                 <a:cs typeface="Calibri" pitchFamily="34" charset="-120"/>
               </a:rPr>
-              <a:t>The generalisable bit: for unattended work, measure whether something is dependable — not whether it is impressive.</a:t>
+              <a:t>Locally observed results stay separate from researched ones — first-hand evidence about your own setup outranks any leaderboard.</a:t>
             </a:r>
             <a:endParaRPr lang="en-US" sz="1300" dirty="0"/>
           </a:p>
@@ -7996,7 +8293,7 @@
                 <a:ea typeface="Arial" pitchFamily="34" charset="-122"/>
                 <a:cs typeface="Arial" pitchFamily="34" charset="-120"/>
               </a:rPr>
-              <a:t>“But my company pays for the good one”</a:t>
+              <a:t>“We have an unlimited API budget”</a:t>
             </a:r>
             <a:endParaRPr lang="en-US" sz="3800" dirty="0"/>
           </a:p>
@@ -8076,8 +8373,8 @@
         </p:nvSpPr>
         <p:spPr>
           <a:xfrm>
-            <a:off x="914400" y="1874520"/>
-            <a:ext cx="5029200" cy="320040"/>
+            <a:off x="932688" y="1874520"/>
+            <a:ext cx="5029200" cy="292608"/>
           </a:xfrm>
           <a:prstGeom prst="rect">
             <a:avLst/>
@@ -8115,7 +8412,7 @@
         </p:nvSpPr>
         <p:spPr>
           <a:xfrm>
-            <a:off x="914400" y="2240280"/>
+            <a:off x="932688" y="2258568"/>
             <a:ext cx="5029200" cy="960120"/>
           </a:xfrm>
           <a:prstGeom prst="rect">
@@ -8143,7 +8440,7 @@
                 <a:ea typeface="Calibri" pitchFamily="34" charset="-122"/>
                 <a:cs typeface="Calibri" pitchFamily="34" charset="-120"/>
               </a:rPr>
-              <a:t>Fair. If the budget is not the constraint, use the best model for everything and skip the arithmetic. Saving money is the main reason this exists.</a:t>
+              <a:t>Correct. Cost is the primary driver. Remove the constraint and you should run Opus on the bulk work and skip the quota arithmetic.</a:t>
             </a:r>
             <a:endParaRPr lang="en-US" sz="1500" dirty="0"/>
           </a:p>
@@ -8184,8 +8481,8 @@
         </p:nvSpPr>
         <p:spPr>
           <a:xfrm>
-            <a:off x="6812280" y="1874520"/>
-            <a:ext cx="4572000" cy="320040"/>
+            <a:off x="6830568" y="1874520"/>
+            <a:ext cx="4572000" cy="292608"/>
           </a:xfrm>
           <a:prstGeom prst="rect">
             <a:avLst/>
@@ -8209,7 +8506,7 @@
                 <a:ea typeface="Arial" pitchFamily="34" charset="-122"/>
                 <a:cs typeface="Arial" pitchFamily="34" charset="-120"/>
               </a:rPr>
-              <a:t>Except for one thing</a:t>
+              <a:t>Two things survive it</a:t>
             </a:r>
             <a:endParaRPr lang="en-US" sz="1700" dirty="0"/>
           </a:p>
@@ -8223,7 +8520,7 @@
         </p:nvSpPr>
         <p:spPr>
           <a:xfrm>
-            <a:off x="6812280" y="2240280"/>
+            <a:off x="6830568" y="2258568"/>
             <a:ext cx="4572000" cy="960120"/>
           </a:xfrm>
           <a:prstGeom prst="rect">
@@ -8251,7 +8548,7 @@
                 <a:ea typeface="Calibri" pitchFamily="34" charset="-122"/>
                 <a:cs typeface="Calibri" pitchFamily="34" charset="-120"/>
               </a:rPr>
-              <a:t>A second model is a second opinion — and that has nothing to do with price.</a:t>
+              <a:t>A second model is a second opinion. And the supervision half applies to any unattended agent — a Claude subagent included.</a:t>
             </a:r>
             <a:endParaRPr lang="en-US" sz="1500" dirty="0"/>
           </a:p>
@@ -8266,11 +8563,11 @@
         <p:spPr>
           <a:xfrm>
             <a:off x="640080" y="3566160"/>
-            <a:ext cx="10911535" cy="1600200"/>
+            <a:ext cx="10911535" cy="1691640"/>
           </a:xfrm>
           <a:prstGeom prst="roundRect">
             <a:avLst>
-              <a:gd name="adj" fmla="val 3429"/>
+              <a:gd name="adj" fmla="val 3243"/>
             </a:avLst>
           </a:prstGeom>
           <a:solidFill>
@@ -8293,7 +8590,7 @@
         <p:spPr>
           <a:xfrm>
             <a:off x="960120" y="3749040"/>
-            <a:ext cx="10271455" cy="320040"/>
+            <a:ext cx="10271455" cy="292608"/>
           </a:xfrm>
           <a:prstGeom prst="rect">
             <a:avLst/>
@@ -8317,7 +8614,7 @@
                 <a:ea typeface="Arial" pitchFamily="34" charset="-122"/>
                 <a:cs typeface="Arial" pitchFamily="34" charset="-120"/>
               </a:rPr>
-              <a:t>Why you would want a different reviewer</a:t>
+              <a:t>Code review is the clearest case</a:t>
             </a:r>
             <a:endParaRPr lang="en-US" sz="1700" dirty="0"/>
           </a:p>
@@ -8332,7 +8629,7 @@
         <p:spPr>
           <a:xfrm>
             <a:off x="960120" y="4114800"/>
-            <a:ext cx="10271455" cy="960120"/>
+            <a:ext cx="10271455" cy="1051560"/>
           </a:xfrm>
           <a:prstGeom prst="rect">
             <a:avLst/>
@@ -8359,7 +8656,7 @@
                 <a:ea typeface="Calibri" pitchFamily="34" charset="-122"/>
                 <a:cs typeface="Calibri" pitchFamily="34" charset="-120"/>
               </a:rPr>
-              <a:t>Ask the same assistant that wrote something to review it, and you get a reviewer who already agrees with every choice in it. Send it to a model from a different family and you get a reader who does not share those assumptions — the same reason we do not have people review their own work. That is worth doing no matter who is paying, and it is the reason the tool lets you choose who reviews rather than fixing it in advance.</a:t>
+              <a:t>Ask the model that wrote a change to review it and you get a reviewer that already agrees with every decision in it — the same reason we do not let authors approve their own pull requests. Routing the diff to a different family gets a reader that does not share those priors, and disagreement between two of them is itself a signal. That is why both tools take a model argument rather than hard-coding one.</a:t>
             </a:r>
             <a:endParaRPr lang="en-US" sz="1500" dirty="0"/>
           </a:p>
@@ -8398,7 +8695,7 @@
                 <a:ea typeface="Calibri" pitchFamily="34" charset="-122"/>
                 <a:cs typeface="Calibri" pitchFamily="34" charset="-120"/>
               </a:rPr>
-              <a:t>Cost is the main goal. A second opinion is the reason to keep it once cost stops mattering.</a:t>
+              <a:t>Cost is why it was built. The second opinion is why it stays useful once cost stops mattering.</a:t>
             </a:r>
             <a:endParaRPr lang="en-US" sz="1300" dirty="0"/>
           </a:p>
